--- a/Proyecto final text analytics.pptx
+++ b/Proyecto final text analytics.pptx
@@ -9,6 +9,11 @@
     <p:sldId id="257" r:id="rId3"/>
     <p:sldId id="258" r:id="rId4"/>
     <p:sldId id="259" r:id="rId5"/>
+    <p:sldId id="260" r:id="rId6"/>
+    <p:sldId id="261" r:id="rId7"/>
+    <p:sldId id="262" r:id="rId8"/>
+    <p:sldId id="264" r:id="rId9"/>
+    <p:sldId id="263" r:id="rId10"/>
   </p:sldIdLst>
   <p:sldSz cx="12192000" cy="6858000"/>
   <p:notesSz cx="6858000" cy="9144000"/>
@@ -108,6 +113,6016 @@
     </a:lvl9pPr>
   </p:defaultTextStyle>
 </p:presentation>
+</file>
+
+<file path=ppt/diagrams/colors1.xml><?xml version="1.0" encoding="utf-8"?>
+<dgm:colorsDef xmlns:dgm="http://schemas.openxmlformats.org/drawingml/2006/diagram" xmlns:a="http://schemas.openxmlformats.org/drawingml/2006/main" uniqueId="urn:microsoft.com/office/officeart/2005/8/colors/accent1_2">
+  <dgm:title val=""/>
+  <dgm:desc val=""/>
+  <dgm:catLst>
+    <dgm:cat type="accent1" pri="11200"/>
+  </dgm:catLst>
+  <dgm:styleLbl name="node0">
+    <dgm:fillClrLst meth="repeat">
+      <a:schemeClr val="accent1"/>
+    </dgm:fillClrLst>
+    <dgm:linClrLst meth="repeat">
+      <a:schemeClr val="lt1"/>
+    </dgm:linClrLst>
+    <dgm:effectClrLst/>
+    <dgm:txLinClrLst/>
+    <dgm:txFillClrLst/>
+    <dgm:txEffectClrLst/>
+  </dgm:styleLbl>
+  <dgm:styleLbl name="alignNode1">
+    <dgm:fillClrLst meth="repeat">
+      <a:schemeClr val="accent1"/>
+    </dgm:fillClrLst>
+    <dgm:linClrLst meth="repeat">
+      <a:schemeClr val="accent1"/>
+    </dgm:linClrLst>
+    <dgm:effectClrLst/>
+    <dgm:txLinClrLst/>
+    <dgm:txFillClrLst/>
+    <dgm:txEffectClrLst/>
+  </dgm:styleLbl>
+  <dgm:styleLbl name="node1">
+    <dgm:fillClrLst meth="repeat">
+      <a:schemeClr val="accent1"/>
+    </dgm:fillClrLst>
+    <dgm:linClrLst meth="repeat">
+      <a:schemeClr val="lt1"/>
+    </dgm:linClrLst>
+    <dgm:effectClrLst/>
+    <dgm:txLinClrLst/>
+    <dgm:txFillClrLst/>
+    <dgm:txEffectClrLst/>
+  </dgm:styleLbl>
+  <dgm:styleLbl name="lnNode1">
+    <dgm:fillClrLst meth="repeat">
+      <a:schemeClr val="accent1"/>
+    </dgm:fillClrLst>
+    <dgm:linClrLst meth="repeat">
+      <a:schemeClr val="lt1"/>
+    </dgm:linClrLst>
+    <dgm:effectClrLst/>
+    <dgm:txLinClrLst/>
+    <dgm:txFillClrLst/>
+    <dgm:txEffectClrLst/>
+  </dgm:styleLbl>
+  <dgm:styleLbl name="vennNode1">
+    <dgm:fillClrLst meth="repeat">
+      <a:schemeClr val="accent1">
+        <a:alpha val="50000"/>
+      </a:schemeClr>
+    </dgm:fillClrLst>
+    <dgm:linClrLst meth="repeat">
+      <a:schemeClr val="lt1"/>
+    </dgm:linClrLst>
+    <dgm:effectClrLst/>
+    <dgm:txLinClrLst/>
+    <dgm:txFillClrLst/>
+    <dgm:txEffectClrLst/>
+  </dgm:styleLbl>
+  <dgm:styleLbl name="node2">
+    <dgm:fillClrLst meth="repeat">
+      <a:schemeClr val="accent1"/>
+    </dgm:fillClrLst>
+    <dgm:linClrLst meth="repeat">
+      <a:schemeClr val="lt1"/>
+    </dgm:linClrLst>
+    <dgm:effectClrLst/>
+    <dgm:txLinClrLst/>
+    <dgm:txFillClrLst/>
+    <dgm:txEffectClrLst/>
+  </dgm:styleLbl>
+  <dgm:styleLbl name="node3">
+    <dgm:fillClrLst meth="repeat">
+      <a:schemeClr val="accent1"/>
+    </dgm:fillClrLst>
+    <dgm:linClrLst meth="repeat">
+      <a:schemeClr val="lt1"/>
+    </dgm:linClrLst>
+    <dgm:effectClrLst/>
+    <dgm:txLinClrLst/>
+    <dgm:txFillClrLst/>
+    <dgm:txEffectClrLst/>
+  </dgm:styleLbl>
+  <dgm:styleLbl name="node4">
+    <dgm:fillClrLst meth="repeat">
+      <a:schemeClr val="accent1"/>
+    </dgm:fillClrLst>
+    <dgm:linClrLst meth="repeat">
+      <a:schemeClr val="lt1"/>
+    </dgm:linClrLst>
+    <dgm:effectClrLst/>
+    <dgm:txLinClrLst/>
+    <dgm:txFillClrLst/>
+    <dgm:txEffectClrLst/>
+  </dgm:styleLbl>
+  <dgm:styleLbl name="fgImgPlace1">
+    <dgm:fillClrLst meth="repeat">
+      <a:schemeClr val="accent1">
+        <a:tint val="50000"/>
+      </a:schemeClr>
+    </dgm:fillClrLst>
+    <dgm:linClrLst meth="repeat">
+      <a:schemeClr val="lt1"/>
+    </dgm:linClrLst>
+    <dgm:effectClrLst/>
+    <dgm:txLinClrLst/>
+    <dgm:txFillClrLst meth="repeat">
+      <a:schemeClr val="lt1"/>
+    </dgm:txFillClrLst>
+    <dgm:txEffectClrLst/>
+  </dgm:styleLbl>
+  <dgm:styleLbl name="alignImgPlace1">
+    <dgm:fillClrLst meth="repeat">
+      <a:schemeClr val="accent1">
+        <a:tint val="50000"/>
+      </a:schemeClr>
+    </dgm:fillClrLst>
+    <dgm:linClrLst meth="repeat">
+      <a:schemeClr val="lt1"/>
+    </dgm:linClrLst>
+    <dgm:effectClrLst/>
+    <dgm:txLinClrLst/>
+    <dgm:txFillClrLst meth="repeat">
+      <a:schemeClr val="lt1"/>
+    </dgm:txFillClrLst>
+    <dgm:txEffectClrLst/>
+  </dgm:styleLbl>
+  <dgm:styleLbl name="bgImgPlace1">
+    <dgm:fillClrLst meth="repeat">
+      <a:schemeClr val="accent1">
+        <a:tint val="50000"/>
+      </a:schemeClr>
+    </dgm:fillClrLst>
+    <dgm:linClrLst meth="repeat">
+      <a:schemeClr val="lt1"/>
+    </dgm:linClrLst>
+    <dgm:effectClrLst/>
+    <dgm:txLinClrLst/>
+    <dgm:txFillClrLst meth="repeat">
+      <a:schemeClr val="lt1"/>
+    </dgm:txFillClrLst>
+    <dgm:txEffectClrLst/>
+  </dgm:styleLbl>
+  <dgm:styleLbl name="sibTrans2D1">
+    <dgm:fillClrLst meth="repeat">
+      <a:schemeClr val="accent1">
+        <a:tint val="60000"/>
+      </a:schemeClr>
+    </dgm:fillClrLst>
+    <dgm:linClrLst meth="repeat">
+      <a:schemeClr val="accent1">
+        <a:tint val="60000"/>
+      </a:schemeClr>
+    </dgm:linClrLst>
+    <dgm:effectClrLst/>
+    <dgm:txLinClrLst/>
+    <dgm:txFillClrLst/>
+    <dgm:txEffectClrLst/>
+  </dgm:styleLbl>
+  <dgm:styleLbl name="fgSibTrans2D1">
+    <dgm:fillClrLst meth="repeat">
+      <a:schemeClr val="accent1">
+        <a:tint val="60000"/>
+      </a:schemeClr>
+    </dgm:fillClrLst>
+    <dgm:linClrLst meth="repeat">
+      <a:schemeClr val="accent1">
+        <a:tint val="60000"/>
+      </a:schemeClr>
+    </dgm:linClrLst>
+    <dgm:effectClrLst/>
+    <dgm:txLinClrLst/>
+    <dgm:txFillClrLst/>
+    <dgm:txEffectClrLst/>
+  </dgm:styleLbl>
+  <dgm:styleLbl name="bgSibTrans2D1">
+    <dgm:fillClrLst meth="repeat">
+      <a:schemeClr val="accent1">
+        <a:tint val="60000"/>
+      </a:schemeClr>
+    </dgm:fillClrLst>
+    <dgm:linClrLst meth="repeat">
+      <a:schemeClr val="accent1">
+        <a:tint val="60000"/>
+      </a:schemeClr>
+    </dgm:linClrLst>
+    <dgm:effectClrLst/>
+    <dgm:txLinClrLst/>
+    <dgm:txFillClrLst/>
+    <dgm:txEffectClrLst/>
+  </dgm:styleLbl>
+  <dgm:styleLbl name="sibTrans1D1">
+    <dgm:fillClrLst meth="repeat">
+      <a:schemeClr val="accent1"/>
+    </dgm:fillClrLst>
+    <dgm:linClrLst meth="repeat">
+      <a:schemeClr val="accent1"/>
+    </dgm:linClrLst>
+    <dgm:effectClrLst/>
+    <dgm:txLinClrLst/>
+    <dgm:txFillClrLst meth="repeat">
+      <a:schemeClr val="tx1"/>
+    </dgm:txFillClrLst>
+    <dgm:txEffectClrLst/>
+  </dgm:styleLbl>
+  <dgm:styleLbl name="callout">
+    <dgm:fillClrLst meth="repeat">
+      <a:schemeClr val="accent1"/>
+    </dgm:fillClrLst>
+    <dgm:linClrLst meth="repeat">
+      <a:schemeClr val="accent1">
+        <a:tint val="50000"/>
+      </a:schemeClr>
+    </dgm:linClrLst>
+    <dgm:effectClrLst/>
+    <dgm:txLinClrLst/>
+    <dgm:txFillClrLst meth="repeat">
+      <a:schemeClr val="tx1"/>
+    </dgm:txFillClrLst>
+    <dgm:txEffectClrLst/>
+  </dgm:styleLbl>
+  <dgm:styleLbl name="asst0">
+    <dgm:fillClrLst meth="repeat">
+      <a:schemeClr val="accent1"/>
+    </dgm:fillClrLst>
+    <dgm:linClrLst meth="repeat">
+      <a:schemeClr val="lt1"/>
+    </dgm:linClrLst>
+    <dgm:effectClrLst/>
+    <dgm:txLinClrLst/>
+    <dgm:txFillClrLst/>
+    <dgm:txEffectClrLst/>
+  </dgm:styleLbl>
+  <dgm:styleLbl name="asst1">
+    <dgm:fillClrLst meth="repeat">
+      <a:schemeClr val="accent1"/>
+    </dgm:fillClrLst>
+    <dgm:linClrLst meth="repeat">
+      <a:schemeClr val="lt1"/>
+    </dgm:linClrLst>
+    <dgm:effectClrLst/>
+    <dgm:txLinClrLst/>
+    <dgm:txFillClrLst/>
+    <dgm:txEffectClrLst/>
+  </dgm:styleLbl>
+  <dgm:styleLbl name="asst2">
+    <dgm:fillClrLst meth="repeat">
+      <a:schemeClr val="accent1"/>
+    </dgm:fillClrLst>
+    <dgm:linClrLst meth="repeat">
+      <a:schemeClr val="lt1"/>
+    </dgm:linClrLst>
+    <dgm:effectClrLst/>
+    <dgm:txLinClrLst/>
+    <dgm:txFillClrLst/>
+    <dgm:txEffectClrLst/>
+  </dgm:styleLbl>
+  <dgm:styleLbl name="asst3">
+    <dgm:fillClrLst meth="repeat">
+      <a:schemeClr val="accent1"/>
+    </dgm:fillClrLst>
+    <dgm:linClrLst meth="repeat">
+      <a:schemeClr val="lt1"/>
+    </dgm:linClrLst>
+    <dgm:effectClrLst/>
+    <dgm:txLinClrLst/>
+    <dgm:txFillClrLst/>
+    <dgm:txEffectClrLst/>
+  </dgm:styleLbl>
+  <dgm:styleLbl name="asst4">
+    <dgm:fillClrLst meth="repeat">
+      <a:schemeClr val="accent1"/>
+    </dgm:fillClrLst>
+    <dgm:linClrLst meth="repeat">
+      <a:schemeClr val="lt1"/>
+    </dgm:linClrLst>
+    <dgm:effectClrLst/>
+    <dgm:txLinClrLst/>
+    <dgm:txFillClrLst/>
+    <dgm:txEffectClrLst/>
+  </dgm:styleLbl>
+  <dgm:styleLbl name="parChTrans2D1">
+    <dgm:fillClrLst meth="repeat">
+      <a:schemeClr val="accent1">
+        <a:tint val="60000"/>
+      </a:schemeClr>
+    </dgm:fillClrLst>
+    <dgm:linClrLst meth="repeat">
+      <a:schemeClr val="accent1">
+        <a:tint val="60000"/>
+      </a:schemeClr>
+    </dgm:linClrLst>
+    <dgm:effectClrLst/>
+    <dgm:txLinClrLst/>
+    <dgm:txFillClrLst meth="repeat">
+      <a:schemeClr val="lt1"/>
+    </dgm:txFillClrLst>
+    <dgm:txEffectClrLst/>
+  </dgm:styleLbl>
+  <dgm:styleLbl name="parChTrans2D2">
+    <dgm:fillClrLst meth="repeat">
+      <a:schemeClr val="accent1"/>
+    </dgm:fillClrLst>
+    <dgm:linClrLst meth="repeat">
+      <a:schemeClr val="accent1"/>
+    </dgm:linClrLst>
+    <dgm:effectClrLst/>
+    <dgm:txLinClrLst/>
+    <dgm:txFillClrLst meth="repeat">
+      <a:schemeClr val="lt1"/>
+    </dgm:txFillClrLst>
+    <dgm:txEffectClrLst/>
+  </dgm:styleLbl>
+  <dgm:styleLbl name="parChTrans2D3">
+    <dgm:fillClrLst meth="repeat">
+      <a:schemeClr val="accent1"/>
+    </dgm:fillClrLst>
+    <dgm:linClrLst meth="repeat">
+      <a:schemeClr val="accent1"/>
+    </dgm:linClrLst>
+    <dgm:effectClrLst/>
+    <dgm:txLinClrLst/>
+    <dgm:txFillClrLst meth="repeat">
+      <a:schemeClr val="lt1"/>
+    </dgm:txFillClrLst>
+    <dgm:txEffectClrLst/>
+  </dgm:styleLbl>
+  <dgm:styleLbl name="parChTrans2D4">
+    <dgm:fillClrLst meth="repeat">
+      <a:schemeClr val="accent1"/>
+    </dgm:fillClrLst>
+    <dgm:linClrLst meth="repeat">
+      <a:schemeClr val="accent1"/>
+    </dgm:linClrLst>
+    <dgm:effectClrLst/>
+    <dgm:txLinClrLst/>
+    <dgm:txFillClrLst meth="repeat">
+      <a:schemeClr val="lt1"/>
+    </dgm:txFillClrLst>
+    <dgm:txEffectClrLst/>
+  </dgm:styleLbl>
+  <dgm:styleLbl name="parChTrans1D1">
+    <dgm:fillClrLst meth="repeat">
+      <a:schemeClr val="accent1"/>
+    </dgm:fillClrLst>
+    <dgm:linClrLst meth="repeat">
+      <a:schemeClr val="accent1">
+        <a:shade val="60000"/>
+      </a:schemeClr>
+    </dgm:linClrLst>
+    <dgm:effectClrLst/>
+    <dgm:txLinClrLst/>
+    <dgm:txFillClrLst meth="repeat">
+      <a:schemeClr val="tx1"/>
+    </dgm:txFillClrLst>
+    <dgm:txEffectClrLst/>
+  </dgm:styleLbl>
+  <dgm:styleLbl name="parChTrans1D2">
+    <dgm:fillClrLst meth="repeat">
+      <a:schemeClr val="accent1"/>
+    </dgm:fillClrLst>
+    <dgm:linClrLst meth="repeat">
+      <a:schemeClr val="accent1">
+        <a:shade val="60000"/>
+      </a:schemeClr>
+    </dgm:linClrLst>
+    <dgm:effectClrLst/>
+    <dgm:txLinClrLst/>
+    <dgm:txFillClrLst meth="repeat">
+      <a:schemeClr val="tx1"/>
+    </dgm:txFillClrLst>
+    <dgm:txEffectClrLst/>
+  </dgm:styleLbl>
+  <dgm:styleLbl name="parChTrans1D3">
+    <dgm:fillClrLst meth="repeat">
+      <a:schemeClr val="accent1"/>
+    </dgm:fillClrLst>
+    <dgm:linClrLst meth="repeat">
+      <a:schemeClr val="accent1">
+        <a:shade val="80000"/>
+      </a:schemeClr>
+    </dgm:linClrLst>
+    <dgm:effectClrLst/>
+    <dgm:txLinClrLst/>
+    <dgm:txFillClrLst meth="repeat">
+      <a:schemeClr val="tx1"/>
+    </dgm:txFillClrLst>
+    <dgm:txEffectClrLst/>
+  </dgm:styleLbl>
+  <dgm:styleLbl name="parChTrans1D4">
+    <dgm:fillClrLst meth="repeat">
+      <a:schemeClr val="accent1"/>
+    </dgm:fillClrLst>
+    <dgm:linClrLst meth="repeat">
+      <a:schemeClr val="accent1">
+        <a:shade val="80000"/>
+      </a:schemeClr>
+    </dgm:linClrLst>
+    <dgm:effectClrLst/>
+    <dgm:txLinClrLst/>
+    <dgm:txFillClrLst meth="repeat">
+      <a:schemeClr val="tx1"/>
+    </dgm:txFillClrLst>
+    <dgm:txEffectClrLst/>
+  </dgm:styleLbl>
+  <dgm:styleLbl name="fgAcc1">
+    <dgm:fillClrLst meth="repeat">
+      <a:schemeClr val="lt1">
+        <a:alpha val="90000"/>
+      </a:schemeClr>
+    </dgm:fillClrLst>
+    <dgm:linClrLst meth="repeat">
+      <a:schemeClr val="accent1"/>
+    </dgm:linClrLst>
+    <dgm:effectClrLst/>
+    <dgm:txLinClrLst/>
+    <dgm:txFillClrLst meth="repeat">
+      <a:schemeClr val="dk1"/>
+    </dgm:txFillClrLst>
+    <dgm:txEffectClrLst/>
+  </dgm:styleLbl>
+  <dgm:styleLbl name="conFgAcc1">
+    <dgm:fillClrLst meth="repeat">
+      <a:schemeClr val="lt1">
+        <a:alpha val="90000"/>
+      </a:schemeClr>
+    </dgm:fillClrLst>
+    <dgm:linClrLst meth="repeat">
+      <a:schemeClr val="accent1"/>
+    </dgm:linClrLst>
+    <dgm:effectClrLst/>
+    <dgm:txLinClrLst/>
+    <dgm:txFillClrLst meth="repeat">
+      <a:schemeClr val="dk1"/>
+    </dgm:txFillClrLst>
+    <dgm:txEffectClrLst/>
+  </dgm:styleLbl>
+  <dgm:styleLbl name="alignAcc1">
+    <dgm:fillClrLst meth="repeat">
+      <a:schemeClr val="lt1">
+        <a:alpha val="90000"/>
+      </a:schemeClr>
+    </dgm:fillClrLst>
+    <dgm:linClrLst meth="repeat">
+      <a:schemeClr val="accent1"/>
+    </dgm:linClrLst>
+    <dgm:effectClrLst/>
+    <dgm:txLinClrLst/>
+    <dgm:txFillClrLst meth="repeat">
+      <a:schemeClr val="dk1"/>
+    </dgm:txFillClrLst>
+    <dgm:txEffectClrLst/>
+  </dgm:styleLbl>
+  <dgm:styleLbl name="trAlignAcc1">
+    <dgm:fillClrLst meth="repeat">
+      <a:schemeClr val="lt1">
+        <a:alpha val="40000"/>
+      </a:schemeClr>
+    </dgm:fillClrLst>
+    <dgm:linClrLst meth="repeat">
+      <a:schemeClr val="accent1"/>
+    </dgm:linClrLst>
+    <dgm:effectClrLst/>
+    <dgm:txLinClrLst/>
+    <dgm:txFillClrLst meth="repeat">
+      <a:schemeClr val="dk1"/>
+    </dgm:txFillClrLst>
+    <dgm:txEffectClrLst/>
+  </dgm:styleLbl>
+  <dgm:styleLbl name="bgAcc1">
+    <dgm:fillClrLst meth="repeat">
+      <a:schemeClr val="lt1">
+        <a:alpha val="90000"/>
+      </a:schemeClr>
+    </dgm:fillClrLst>
+    <dgm:linClrLst meth="repeat">
+      <a:schemeClr val="accent1"/>
+    </dgm:linClrLst>
+    <dgm:effectClrLst/>
+    <dgm:txLinClrLst/>
+    <dgm:txFillClrLst meth="repeat">
+      <a:schemeClr val="dk1"/>
+    </dgm:txFillClrLst>
+    <dgm:txEffectClrLst/>
+  </dgm:styleLbl>
+  <dgm:styleLbl name="solidFgAcc1">
+    <dgm:fillClrLst meth="repeat">
+      <a:schemeClr val="lt1"/>
+    </dgm:fillClrLst>
+    <dgm:linClrLst meth="repeat">
+      <a:schemeClr val="accent1"/>
+    </dgm:linClrLst>
+    <dgm:effectClrLst/>
+    <dgm:txLinClrLst/>
+    <dgm:txFillClrLst meth="repeat">
+      <a:schemeClr val="dk1"/>
+    </dgm:txFillClrLst>
+    <dgm:txEffectClrLst/>
+  </dgm:styleLbl>
+  <dgm:styleLbl name="solidAlignAcc1">
+    <dgm:fillClrLst meth="repeat">
+      <a:schemeClr val="lt1"/>
+    </dgm:fillClrLst>
+    <dgm:linClrLst meth="repeat">
+      <a:schemeClr val="accent1"/>
+    </dgm:linClrLst>
+    <dgm:effectClrLst/>
+    <dgm:txLinClrLst/>
+    <dgm:txFillClrLst meth="repeat">
+      <a:schemeClr val="dk1"/>
+    </dgm:txFillClrLst>
+    <dgm:txEffectClrLst/>
+  </dgm:styleLbl>
+  <dgm:styleLbl name="solidBgAcc1">
+    <dgm:fillClrLst meth="repeat">
+      <a:schemeClr val="lt1"/>
+    </dgm:fillClrLst>
+    <dgm:linClrLst meth="repeat">
+      <a:schemeClr val="accent1"/>
+    </dgm:linClrLst>
+    <dgm:effectClrLst/>
+    <dgm:txLinClrLst/>
+    <dgm:txFillClrLst meth="repeat">
+      <a:schemeClr val="dk1"/>
+    </dgm:txFillClrLst>
+    <dgm:txEffectClrLst/>
+  </dgm:styleLbl>
+  <dgm:styleLbl name="fgAccFollowNode1">
+    <dgm:fillClrLst meth="repeat">
+      <a:schemeClr val="accent1">
+        <a:alpha val="90000"/>
+        <a:tint val="40000"/>
+      </a:schemeClr>
+    </dgm:fillClrLst>
+    <dgm:linClrLst meth="repeat">
+      <a:schemeClr val="accent1">
+        <a:alpha val="90000"/>
+        <a:tint val="40000"/>
+      </a:schemeClr>
+    </dgm:linClrLst>
+    <dgm:effectClrLst/>
+    <dgm:txLinClrLst/>
+    <dgm:txFillClrLst meth="repeat">
+      <a:schemeClr val="dk1"/>
+    </dgm:txFillClrLst>
+    <dgm:txEffectClrLst/>
+  </dgm:styleLbl>
+  <dgm:styleLbl name="alignAccFollowNode1">
+    <dgm:fillClrLst meth="repeat">
+      <a:schemeClr val="accent1">
+        <a:alpha val="90000"/>
+        <a:tint val="40000"/>
+      </a:schemeClr>
+    </dgm:fillClrLst>
+    <dgm:linClrLst meth="repeat">
+      <a:schemeClr val="accent1">
+        <a:alpha val="90000"/>
+        <a:tint val="40000"/>
+      </a:schemeClr>
+    </dgm:linClrLst>
+    <dgm:effectClrLst/>
+    <dgm:txLinClrLst/>
+    <dgm:txFillClrLst meth="repeat">
+      <a:schemeClr val="dk1"/>
+    </dgm:txFillClrLst>
+    <dgm:txEffectClrLst/>
+  </dgm:styleLbl>
+  <dgm:styleLbl name="bgAccFollowNode1">
+    <dgm:fillClrLst meth="repeat">
+      <a:schemeClr val="accent1">
+        <a:alpha val="90000"/>
+        <a:tint val="40000"/>
+      </a:schemeClr>
+    </dgm:fillClrLst>
+    <dgm:linClrLst meth="repeat">
+      <a:schemeClr val="accent1">
+        <a:alpha val="90000"/>
+        <a:tint val="40000"/>
+      </a:schemeClr>
+    </dgm:linClrLst>
+    <dgm:effectClrLst/>
+    <dgm:txLinClrLst/>
+    <dgm:txFillClrLst meth="repeat">
+      <a:schemeClr val="dk1"/>
+    </dgm:txFillClrLst>
+    <dgm:txEffectClrLst/>
+  </dgm:styleLbl>
+  <dgm:styleLbl name="fgAcc0">
+    <dgm:fillClrLst meth="repeat">
+      <a:schemeClr val="lt1">
+        <a:alpha val="90000"/>
+      </a:schemeClr>
+    </dgm:fillClrLst>
+    <dgm:linClrLst meth="repeat">
+      <a:schemeClr val="accent1"/>
+    </dgm:linClrLst>
+    <dgm:effectClrLst/>
+    <dgm:txLinClrLst/>
+    <dgm:txFillClrLst meth="repeat">
+      <a:schemeClr val="dk1"/>
+    </dgm:txFillClrLst>
+    <dgm:txEffectClrLst/>
+  </dgm:styleLbl>
+  <dgm:styleLbl name="fgAcc2">
+    <dgm:fillClrLst meth="repeat">
+      <a:schemeClr val="lt1">
+        <a:alpha val="90000"/>
+      </a:schemeClr>
+    </dgm:fillClrLst>
+    <dgm:linClrLst meth="repeat">
+      <a:schemeClr val="accent1"/>
+    </dgm:linClrLst>
+    <dgm:effectClrLst/>
+    <dgm:txLinClrLst/>
+    <dgm:txFillClrLst meth="repeat">
+      <a:schemeClr val="dk1"/>
+    </dgm:txFillClrLst>
+    <dgm:txEffectClrLst/>
+  </dgm:styleLbl>
+  <dgm:styleLbl name="fgAcc3">
+    <dgm:fillClrLst meth="repeat">
+      <a:schemeClr val="lt1">
+        <a:alpha val="90000"/>
+      </a:schemeClr>
+    </dgm:fillClrLst>
+    <dgm:linClrLst meth="repeat">
+      <a:schemeClr val="accent1"/>
+    </dgm:linClrLst>
+    <dgm:effectClrLst/>
+    <dgm:txLinClrLst/>
+    <dgm:txFillClrLst meth="repeat">
+      <a:schemeClr val="dk1"/>
+    </dgm:txFillClrLst>
+    <dgm:txEffectClrLst/>
+  </dgm:styleLbl>
+  <dgm:styleLbl name="fgAcc4">
+    <dgm:fillClrLst meth="repeat">
+      <a:schemeClr val="lt1">
+        <a:alpha val="90000"/>
+      </a:schemeClr>
+    </dgm:fillClrLst>
+    <dgm:linClrLst meth="repeat">
+      <a:schemeClr val="accent1"/>
+    </dgm:linClrLst>
+    <dgm:effectClrLst/>
+    <dgm:txLinClrLst/>
+    <dgm:txFillClrLst meth="repeat">
+      <a:schemeClr val="dk1"/>
+    </dgm:txFillClrLst>
+    <dgm:txEffectClrLst/>
+  </dgm:styleLbl>
+  <dgm:styleLbl name="bgShp">
+    <dgm:fillClrLst meth="repeat">
+      <a:schemeClr val="accent1">
+        <a:tint val="40000"/>
+      </a:schemeClr>
+    </dgm:fillClrLst>
+    <dgm:linClrLst meth="repeat">
+      <a:schemeClr val="accent1"/>
+    </dgm:linClrLst>
+    <dgm:effectClrLst/>
+    <dgm:txLinClrLst/>
+    <dgm:txFillClrLst meth="repeat">
+      <a:schemeClr val="dk1"/>
+    </dgm:txFillClrLst>
+    <dgm:txEffectClrLst/>
+  </dgm:styleLbl>
+  <dgm:styleLbl name="dkBgShp">
+    <dgm:fillClrLst meth="repeat">
+      <a:schemeClr val="accent1">
+        <a:shade val="80000"/>
+      </a:schemeClr>
+    </dgm:fillClrLst>
+    <dgm:linClrLst meth="repeat">
+      <a:schemeClr val="accent1"/>
+    </dgm:linClrLst>
+    <dgm:effectClrLst/>
+    <dgm:txLinClrLst/>
+    <dgm:txFillClrLst meth="repeat">
+      <a:schemeClr val="lt1"/>
+    </dgm:txFillClrLst>
+    <dgm:txEffectClrLst/>
+  </dgm:styleLbl>
+  <dgm:styleLbl name="trBgShp">
+    <dgm:fillClrLst meth="repeat">
+      <a:schemeClr val="accent1">
+        <a:tint val="50000"/>
+        <a:alpha val="40000"/>
+      </a:schemeClr>
+    </dgm:fillClrLst>
+    <dgm:linClrLst meth="repeat">
+      <a:schemeClr val="accent1"/>
+    </dgm:linClrLst>
+    <dgm:effectClrLst/>
+    <dgm:txLinClrLst/>
+    <dgm:txFillClrLst meth="repeat">
+      <a:schemeClr val="lt1"/>
+    </dgm:txFillClrLst>
+    <dgm:txEffectClrLst/>
+  </dgm:styleLbl>
+  <dgm:styleLbl name="fgShp">
+    <dgm:fillClrLst meth="repeat">
+      <a:schemeClr val="accent1">
+        <a:tint val="60000"/>
+      </a:schemeClr>
+    </dgm:fillClrLst>
+    <dgm:linClrLst meth="repeat">
+      <a:schemeClr val="lt1"/>
+    </dgm:linClrLst>
+    <dgm:effectClrLst/>
+    <dgm:txLinClrLst/>
+    <dgm:txFillClrLst meth="repeat">
+      <a:schemeClr val="dk1"/>
+    </dgm:txFillClrLst>
+    <dgm:txEffectClrLst/>
+  </dgm:styleLbl>
+  <dgm:styleLbl name="revTx">
+    <dgm:fillClrLst meth="repeat">
+      <a:schemeClr val="lt1">
+        <a:alpha val="0"/>
+      </a:schemeClr>
+    </dgm:fillClrLst>
+    <dgm:linClrLst meth="repeat">
+      <a:schemeClr val="dk1">
+        <a:alpha val="0"/>
+      </a:schemeClr>
+    </dgm:linClrLst>
+    <dgm:effectClrLst/>
+    <dgm:txLinClrLst/>
+    <dgm:txFillClrLst meth="repeat">
+      <a:schemeClr val="tx1"/>
+    </dgm:txFillClrLst>
+    <dgm:txEffectClrLst/>
+  </dgm:styleLbl>
+</dgm:colorsDef>
+</file>
+
+<file path=ppt/diagrams/colors2.xml><?xml version="1.0" encoding="utf-8"?>
+<dgm:colorsDef xmlns:dgm="http://schemas.openxmlformats.org/drawingml/2006/diagram" xmlns:a="http://schemas.openxmlformats.org/drawingml/2006/main" uniqueId="urn:microsoft.com/office/officeart/2005/8/colors/accent1_2">
+  <dgm:title val=""/>
+  <dgm:desc val=""/>
+  <dgm:catLst>
+    <dgm:cat type="accent1" pri="11200"/>
+  </dgm:catLst>
+  <dgm:styleLbl name="node0">
+    <dgm:fillClrLst meth="repeat">
+      <a:schemeClr val="accent1"/>
+    </dgm:fillClrLst>
+    <dgm:linClrLst meth="repeat">
+      <a:schemeClr val="lt1"/>
+    </dgm:linClrLst>
+    <dgm:effectClrLst/>
+    <dgm:txLinClrLst/>
+    <dgm:txFillClrLst/>
+    <dgm:txEffectClrLst/>
+  </dgm:styleLbl>
+  <dgm:styleLbl name="alignNode1">
+    <dgm:fillClrLst meth="repeat">
+      <a:schemeClr val="accent1"/>
+    </dgm:fillClrLst>
+    <dgm:linClrLst meth="repeat">
+      <a:schemeClr val="accent1"/>
+    </dgm:linClrLst>
+    <dgm:effectClrLst/>
+    <dgm:txLinClrLst/>
+    <dgm:txFillClrLst/>
+    <dgm:txEffectClrLst/>
+  </dgm:styleLbl>
+  <dgm:styleLbl name="node1">
+    <dgm:fillClrLst meth="repeat">
+      <a:schemeClr val="accent1"/>
+    </dgm:fillClrLst>
+    <dgm:linClrLst meth="repeat">
+      <a:schemeClr val="lt1"/>
+    </dgm:linClrLst>
+    <dgm:effectClrLst/>
+    <dgm:txLinClrLst/>
+    <dgm:txFillClrLst/>
+    <dgm:txEffectClrLst/>
+  </dgm:styleLbl>
+  <dgm:styleLbl name="lnNode1">
+    <dgm:fillClrLst meth="repeat">
+      <a:schemeClr val="accent1"/>
+    </dgm:fillClrLst>
+    <dgm:linClrLst meth="repeat">
+      <a:schemeClr val="lt1"/>
+    </dgm:linClrLst>
+    <dgm:effectClrLst/>
+    <dgm:txLinClrLst/>
+    <dgm:txFillClrLst/>
+    <dgm:txEffectClrLst/>
+  </dgm:styleLbl>
+  <dgm:styleLbl name="vennNode1">
+    <dgm:fillClrLst meth="repeat">
+      <a:schemeClr val="accent1">
+        <a:alpha val="50000"/>
+      </a:schemeClr>
+    </dgm:fillClrLst>
+    <dgm:linClrLst meth="repeat">
+      <a:schemeClr val="lt1"/>
+    </dgm:linClrLst>
+    <dgm:effectClrLst/>
+    <dgm:txLinClrLst/>
+    <dgm:txFillClrLst/>
+    <dgm:txEffectClrLst/>
+  </dgm:styleLbl>
+  <dgm:styleLbl name="node2">
+    <dgm:fillClrLst meth="repeat">
+      <a:schemeClr val="accent1"/>
+    </dgm:fillClrLst>
+    <dgm:linClrLst meth="repeat">
+      <a:schemeClr val="lt1"/>
+    </dgm:linClrLst>
+    <dgm:effectClrLst/>
+    <dgm:txLinClrLst/>
+    <dgm:txFillClrLst/>
+    <dgm:txEffectClrLst/>
+  </dgm:styleLbl>
+  <dgm:styleLbl name="node3">
+    <dgm:fillClrLst meth="repeat">
+      <a:schemeClr val="accent1"/>
+    </dgm:fillClrLst>
+    <dgm:linClrLst meth="repeat">
+      <a:schemeClr val="lt1"/>
+    </dgm:linClrLst>
+    <dgm:effectClrLst/>
+    <dgm:txLinClrLst/>
+    <dgm:txFillClrLst/>
+    <dgm:txEffectClrLst/>
+  </dgm:styleLbl>
+  <dgm:styleLbl name="node4">
+    <dgm:fillClrLst meth="repeat">
+      <a:schemeClr val="accent1"/>
+    </dgm:fillClrLst>
+    <dgm:linClrLst meth="repeat">
+      <a:schemeClr val="lt1"/>
+    </dgm:linClrLst>
+    <dgm:effectClrLst/>
+    <dgm:txLinClrLst/>
+    <dgm:txFillClrLst/>
+    <dgm:txEffectClrLst/>
+  </dgm:styleLbl>
+  <dgm:styleLbl name="fgImgPlace1">
+    <dgm:fillClrLst meth="repeat">
+      <a:schemeClr val="accent1">
+        <a:tint val="50000"/>
+      </a:schemeClr>
+    </dgm:fillClrLst>
+    <dgm:linClrLst meth="repeat">
+      <a:schemeClr val="lt1"/>
+    </dgm:linClrLst>
+    <dgm:effectClrLst/>
+    <dgm:txLinClrLst/>
+    <dgm:txFillClrLst meth="repeat">
+      <a:schemeClr val="lt1"/>
+    </dgm:txFillClrLst>
+    <dgm:txEffectClrLst/>
+  </dgm:styleLbl>
+  <dgm:styleLbl name="alignImgPlace1">
+    <dgm:fillClrLst meth="repeat">
+      <a:schemeClr val="accent1">
+        <a:tint val="50000"/>
+      </a:schemeClr>
+    </dgm:fillClrLst>
+    <dgm:linClrLst meth="repeat">
+      <a:schemeClr val="lt1"/>
+    </dgm:linClrLst>
+    <dgm:effectClrLst/>
+    <dgm:txLinClrLst/>
+    <dgm:txFillClrLst meth="repeat">
+      <a:schemeClr val="lt1"/>
+    </dgm:txFillClrLst>
+    <dgm:txEffectClrLst/>
+  </dgm:styleLbl>
+  <dgm:styleLbl name="bgImgPlace1">
+    <dgm:fillClrLst meth="repeat">
+      <a:schemeClr val="accent1">
+        <a:tint val="50000"/>
+      </a:schemeClr>
+    </dgm:fillClrLst>
+    <dgm:linClrLst meth="repeat">
+      <a:schemeClr val="lt1"/>
+    </dgm:linClrLst>
+    <dgm:effectClrLst/>
+    <dgm:txLinClrLst/>
+    <dgm:txFillClrLst meth="repeat">
+      <a:schemeClr val="lt1"/>
+    </dgm:txFillClrLst>
+    <dgm:txEffectClrLst/>
+  </dgm:styleLbl>
+  <dgm:styleLbl name="sibTrans2D1">
+    <dgm:fillClrLst meth="repeat">
+      <a:schemeClr val="accent1">
+        <a:tint val="60000"/>
+      </a:schemeClr>
+    </dgm:fillClrLst>
+    <dgm:linClrLst meth="repeat">
+      <a:schemeClr val="accent1">
+        <a:tint val="60000"/>
+      </a:schemeClr>
+    </dgm:linClrLst>
+    <dgm:effectClrLst/>
+    <dgm:txLinClrLst/>
+    <dgm:txFillClrLst/>
+    <dgm:txEffectClrLst/>
+  </dgm:styleLbl>
+  <dgm:styleLbl name="fgSibTrans2D1">
+    <dgm:fillClrLst meth="repeat">
+      <a:schemeClr val="accent1">
+        <a:tint val="60000"/>
+      </a:schemeClr>
+    </dgm:fillClrLst>
+    <dgm:linClrLst meth="repeat">
+      <a:schemeClr val="accent1">
+        <a:tint val="60000"/>
+      </a:schemeClr>
+    </dgm:linClrLst>
+    <dgm:effectClrLst/>
+    <dgm:txLinClrLst/>
+    <dgm:txFillClrLst/>
+    <dgm:txEffectClrLst/>
+  </dgm:styleLbl>
+  <dgm:styleLbl name="bgSibTrans2D1">
+    <dgm:fillClrLst meth="repeat">
+      <a:schemeClr val="accent1">
+        <a:tint val="60000"/>
+      </a:schemeClr>
+    </dgm:fillClrLst>
+    <dgm:linClrLst meth="repeat">
+      <a:schemeClr val="accent1">
+        <a:tint val="60000"/>
+      </a:schemeClr>
+    </dgm:linClrLst>
+    <dgm:effectClrLst/>
+    <dgm:txLinClrLst/>
+    <dgm:txFillClrLst/>
+    <dgm:txEffectClrLst/>
+  </dgm:styleLbl>
+  <dgm:styleLbl name="sibTrans1D1">
+    <dgm:fillClrLst meth="repeat">
+      <a:schemeClr val="accent1"/>
+    </dgm:fillClrLst>
+    <dgm:linClrLst meth="repeat">
+      <a:schemeClr val="accent1"/>
+    </dgm:linClrLst>
+    <dgm:effectClrLst/>
+    <dgm:txLinClrLst/>
+    <dgm:txFillClrLst meth="repeat">
+      <a:schemeClr val="tx1"/>
+    </dgm:txFillClrLst>
+    <dgm:txEffectClrLst/>
+  </dgm:styleLbl>
+  <dgm:styleLbl name="callout">
+    <dgm:fillClrLst meth="repeat">
+      <a:schemeClr val="accent1"/>
+    </dgm:fillClrLst>
+    <dgm:linClrLst meth="repeat">
+      <a:schemeClr val="accent1">
+        <a:tint val="50000"/>
+      </a:schemeClr>
+    </dgm:linClrLst>
+    <dgm:effectClrLst/>
+    <dgm:txLinClrLst/>
+    <dgm:txFillClrLst meth="repeat">
+      <a:schemeClr val="tx1"/>
+    </dgm:txFillClrLst>
+    <dgm:txEffectClrLst/>
+  </dgm:styleLbl>
+  <dgm:styleLbl name="asst0">
+    <dgm:fillClrLst meth="repeat">
+      <a:schemeClr val="accent1"/>
+    </dgm:fillClrLst>
+    <dgm:linClrLst meth="repeat">
+      <a:schemeClr val="lt1"/>
+    </dgm:linClrLst>
+    <dgm:effectClrLst/>
+    <dgm:txLinClrLst/>
+    <dgm:txFillClrLst/>
+    <dgm:txEffectClrLst/>
+  </dgm:styleLbl>
+  <dgm:styleLbl name="asst1">
+    <dgm:fillClrLst meth="repeat">
+      <a:schemeClr val="accent1"/>
+    </dgm:fillClrLst>
+    <dgm:linClrLst meth="repeat">
+      <a:schemeClr val="lt1"/>
+    </dgm:linClrLst>
+    <dgm:effectClrLst/>
+    <dgm:txLinClrLst/>
+    <dgm:txFillClrLst/>
+    <dgm:txEffectClrLst/>
+  </dgm:styleLbl>
+  <dgm:styleLbl name="asst2">
+    <dgm:fillClrLst meth="repeat">
+      <a:schemeClr val="accent1"/>
+    </dgm:fillClrLst>
+    <dgm:linClrLst meth="repeat">
+      <a:schemeClr val="lt1"/>
+    </dgm:linClrLst>
+    <dgm:effectClrLst/>
+    <dgm:txLinClrLst/>
+    <dgm:txFillClrLst/>
+    <dgm:txEffectClrLst/>
+  </dgm:styleLbl>
+  <dgm:styleLbl name="asst3">
+    <dgm:fillClrLst meth="repeat">
+      <a:schemeClr val="accent1"/>
+    </dgm:fillClrLst>
+    <dgm:linClrLst meth="repeat">
+      <a:schemeClr val="lt1"/>
+    </dgm:linClrLst>
+    <dgm:effectClrLst/>
+    <dgm:txLinClrLst/>
+    <dgm:txFillClrLst/>
+    <dgm:txEffectClrLst/>
+  </dgm:styleLbl>
+  <dgm:styleLbl name="asst4">
+    <dgm:fillClrLst meth="repeat">
+      <a:schemeClr val="accent1"/>
+    </dgm:fillClrLst>
+    <dgm:linClrLst meth="repeat">
+      <a:schemeClr val="lt1"/>
+    </dgm:linClrLst>
+    <dgm:effectClrLst/>
+    <dgm:txLinClrLst/>
+    <dgm:txFillClrLst/>
+    <dgm:txEffectClrLst/>
+  </dgm:styleLbl>
+  <dgm:styleLbl name="parChTrans2D1">
+    <dgm:fillClrLst meth="repeat">
+      <a:schemeClr val="accent1">
+        <a:tint val="60000"/>
+      </a:schemeClr>
+    </dgm:fillClrLst>
+    <dgm:linClrLst meth="repeat">
+      <a:schemeClr val="accent1">
+        <a:tint val="60000"/>
+      </a:schemeClr>
+    </dgm:linClrLst>
+    <dgm:effectClrLst/>
+    <dgm:txLinClrLst/>
+    <dgm:txFillClrLst meth="repeat">
+      <a:schemeClr val="lt1"/>
+    </dgm:txFillClrLst>
+    <dgm:txEffectClrLst/>
+  </dgm:styleLbl>
+  <dgm:styleLbl name="parChTrans2D2">
+    <dgm:fillClrLst meth="repeat">
+      <a:schemeClr val="accent1"/>
+    </dgm:fillClrLst>
+    <dgm:linClrLst meth="repeat">
+      <a:schemeClr val="accent1"/>
+    </dgm:linClrLst>
+    <dgm:effectClrLst/>
+    <dgm:txLinClrLst/>
+    <dgm:txFillClrLst meth="repeat">
+      <a:schemeClr val="lt1"/>
+    </dgm:txFillClrLst>
+    <dgm:txEffectClrLst/>
+  </dgm:styleLbl>
+  <dgm:styleLbl name="parChTrans2D3">
+    <dgm:fillClrLst meth="repeat">
+      <a:schemeClr val="accent1"/>
+    </dgm:fillClrLst>
+    <dgm:linClrLst meth="repeat">
+      <a:schemeClr val="accent1"/>
+    </dgm:linClrLst>
+    <dgm:effectClrLst/>
+    <dgm:txLinClrLst/>
+    <dgm:txFillClrLst meth="repeat">
+      <a:schemeClr val="lt1"/>
+    </dgm:txFillClrLst>
+    <dgm:txEffectClrLst/>
+  </dgm:styleLbl>
+  <dgm:styleLbl name="parChTrans2D4">
+    <dgm:fillClrLst meth="repeat">
+      <a:schemeClr val="accent1"/>
+    </dgm:fillClrLst>
+    <dgm:linClrLst meth="repeat">
+      <a:schemeClr val="accent1"/>
+    </dgm:linClrLst>
+    <dgm:effectClrLst/>
+    <dgm:txLinClrLst/>
+    <dgm:txFillClrLst meth="repeat">
+      <a:schemeClr val="lt1"/>
+    </dgm:txFillClrLst>
+    <dgm:txEffectClrLst/>
+  </dgm:styleLbl>
+  <dgm:styleLbl name="parChTrans1D1">
+    <dgm:fillClrLst meth="repeat">
+      <a:schemeClr val="accent1"/>
+    </dgm:fillClrLst>
+    <dgm:linClrLst meth="repeat">
+      <a:schemeClr val="accent1">
+        <a:shade val="60000"/>
+      </a:schemeClr>
+    </dgm:linClrLst>
+    <dgm:effectClrLst/>
+    <dgm:txLinClrLst/>
+    <dgm:txFillClrLst meth="repeat">
+      <a:schemeClr val="tx1"/>
+    </dgm:txFillClrLst>
+    <dgm:txEffectClrLst/>
+  </dgm:styleLbl>
+  <dgm:styleLbl name="parChTrans1D2">
+    <dgm:fillClrLst meth="repeat">
+      <a:schemeClr val="accent1"/>
+    </dgm:fillClrLst>
+    <dgm:linClrLst meth="repeat">
+      <a:schemeClr val="accent1">
+        <a:shade val="60000"/>
+      </a:schemeClr>
+    </dgm:linClrLst>
+    <dgm:effectClrLst/>
+    <dgm:txLinClrLst/>
+    <dgm:txFillClrLst meth="repeat">
+      <a:schemeClr val="tx1"/>
+    </dgm:txFillClrLst>
+    <dgm:txEffectClrLst/>
+  </dgm:styleLbl>
+  <dgm:styleLbl name="parChTrans1D3">
+    <dgm:fillClrLst meth="repeat">
+      <a:schemeClr val="accent1"/>
+    </dgm:fillClrLst>
+    <dgm:linClrLst meth="repeat">
+      <a:schemeClr val="accent1">
+        <a:shade val="80000"/>
+      </a:schemeClr>
+    </dgm:linClrLst>
+    <dgm:effectClrLst/>
+    <dgm:txLinClrLst/>
+    <dgm:txFillClrLst meth="repeat">
+      <a:schemeClr val="tx1"/>
+    </dgm:txFillClrLst>
+    <dgm:txEffectClrLst/>
+  </dgm:styleLbl>
+  <dgm:styleLbl name="parChTrans1D4">
+    <dgm:fillClrLst meth="repeat">
+      <a:schemeClr val="accent1"/>
+    </dgm:fillClrLst>
+    <dgm:linClrLst meth="repeat">
+      <a:schemeClr val="accent1">
+        <a:shade val="80000"/>
+      </a:schemeClr>
+    </dgm:linClrLst>
+    <dgm:effectClrLst/>
+    <dgm:txLinClrLst/>
+    <dgm:txFillClrLst meth="repeat">
+      <a:schemeClr val="tx1"/>
+    </dgm:txFillClrLst>
+    <dgm:txEffectClrLst/>
+  </dgm:styleLbl>
+  <dgm:styleLbl name="fgAcc1">
+    <dgm:fillClrLst meth="repeat">
+      <a:schemeClr val="lt1">
+        <a:alpha val="90000"/>
+      </a:schemeClr>
+    </dgm:fillClrLst>
+    <dgm:linClrLst meth="repeat">
+      <a:schemeClr val="accent1"/>
+    </dgm:linClrLst>
+    <dgm:effectClrLst/>
+    <dgm:txLinClrLst/>
+    <dgm:txFillClrLst meth="repeat">
+      <a:schemeClr val="dk1"/>
+    </dgm:txFillClrLst>
+    <dgm:txEffectClrLst/>
+  </dgm:styleLbl>
+  <dgm:styleLbl name="conFgAcc1">
+    <dgm:fillClrLst meth="repeat">
+      <a:schemeClr val="lt1">
+        <a:alpha val="90000"/>
+      </a:schemeClr>
+    </dgm:fillClrLst>
+    <dgm:linClrLst meth="repeat">
+      <a:schemeClr val="accent1"/>
+    </dgm:linClrLst>
+    <dgm:effectClrLst/>
+    <dgm:txLinClrLst/>
+    <dgm:txFillClrLst meth="repeat">
+      <a:schemeClr val="dk1"/>
+    </dgm:txFillClrLst>
+    <dgm:txEffectClrLst/>
+  </dgm:styleLbl>
+  <dgm:styleLbl name="alignAcc1">
+    <dgm:fillClrLst meth="repeat">
+      <a:schemeClr val="lt1">
+        <a:alpha val="90000"/>
+      </a:schemeClr>
+    </dgm:fillClrLst>
+    <dgm:linClrLst meth="repeat">
+      <a:schemeClr val="accent1"/>
+    </dgm:linClrLst>
+    <dgm:effectClrLst/>
+    <dgm:txLinClrLst/>
+    <dgm:txFillClrLst meth="repeat">
+      <a:schemeClr val="dk1"/>
+    </dgm:txFillClrLst>
+    <dgm:txEffectClrLst/>
+  </dgm:styleLbl>
+  <dgm:styleLbl name="trAlignAcc1">
+    <dgm:fillClrLst meth="repeat">
+      <a:schemeClr val="lt1">
+        <a:alpha val="40000"/>
+      </a:schemeClr>
+    </dgm:fillClrLst>
+    <dgm:linClrLst meth="repeat">
+      <a:schemeClr val="accent1"/>
+    </dgm:linClrLst>
+    <dgm:effectClrLst/>
+    <dgm:txLinClrLst/>
+    <dgm:txFillClrLst meth="repeat">
+      <a:schemeClr val="dk1"/>
+    </dgm:txFillClrLst>
+    <dgm:txEffectClrLst/>
+  </dgm:styleLbl>
+  <dgm:styleLbl name="bgAcc1">
+    <dgm:fillClrLst meth="repeat">
+      <a:schemeClr val="lt1">
+        <a:alpha val="90000"/>
+      </a:schemeClr>
+    </dgm:fillClrLst>
+    <dgm:linClrLst meth="repeat">
+      <a:schemeClr val="accent1"/>
+    </dgm:linClrLst>
+    <dgm:effectClrLst/>
+    <dgm:txLinClrLst/>
+    <dgm:txFillClrLst meth="repeat">
+      <a:schemeClr val="dk1"/>
+    </dgm:txFillClrLst>
+    <dgm:txEffectClrLst/>
+  </dgm:styleLbl>
+  <dgm:styleLbl name="solidFgAcc1">
+    <dgm:fillClrLst meth="repeat">
+      <a:schemeClr val="lt1"/>
+    </dgm:fillClrLst>
+    <dgm:linClrLst meth="repeat">
+      <a:schemeClr val="accent1"/>
+    </dgm:linClrLst>
+    <dgm:effectClrLst/>
+    <dgm:txLinClrLst/>
+    <dgm:txFillClrLst meth="repeat">
+      <a:schemeClr val="dk1"/>
+    </dgm:txFillClrLst>
+    <dgm:txEffectClrLst/>
+  </dgm:styleLbl>
+  <dgm:styleLbl name="solidAlignAcc1">
+    <dgm:fillClrLst meth="repeat">
+      <a:schemeClr val="lt1"/>
+    </dgm:fillClrLst>
+    <dgm:linClrLst meth="repeat">
+      <a:schemeClr val="accent1"/>
+    </dgm:linClrLst>
+    <dgm:effectClrLst/>
+    <dgm:txLinClrLst/>
+    <dgm:txFillClrLst meth="repeat">
+      <a:schemeClr val="dk1"/>
+    </dgm:txFillClrLst>
+    <dgm:txEffectClrLst/>
+  </dgm:styleLbl>
+  <dgm:styleLbl name="solidBgAcc1">
+    <dgm:fillClrLst meth="repeat">
+      <a:schemeClr val="lt1"/>
+    </dgm:fillClrLst>
+    <dgm:linClrLst meth="repeat">
+      <a:schemeClr val="accent1"/>
+    </dgm:linClrLst>
+    <dgm:effectClrLst/>
+    <dgm:txLinClrLst/>
+    <dgm:txFillClrLst meth="repeat">
+      <a:schemeClr val="dk1"/>
+    </dgm:txFillClrLst>
+    <dgm:txEffectClrLst/>
+  </dgm:styleLbl>
+  <dgm:styleLbl name="fgAccFollowNode1">
+    <dgm:fillClrLst meth="repeat">
+      <a:schemeClr val="accent1">
+        <a:alpha val="90000"/>
+        <a:tint val="40000"/>
+      </a:schemeClr>
+    </dgm:fillClrLst>
+    <dgm:linClrLst meth="repeat">
+      <a:schemeClr val="accent1">
+        <a:alpha val="90000"/>
+        <a:tint val="40000"/>
+      </a:schemeClr>
+    </dgm:linClrLst>
+    <dgm:effectClrLst/>
+    <dgm:txLinClrLst/>
+    <dgm:txFillClrLst meth="repeat">
+      <a:schemeClr val="dk1"/>
+    </dgm:txFillClrLst>
+    <dgm:txEffectClrLst/>
+  </dgm:styleLbl>
+  <dgm:styleLbl name="alignAccFollowNode1">
+    <dgm:fillClrLst meth="repeat">
+      <a:schemeClr val="accent1">
+        <a:alpha val="90000"/>
+        <a:tint val="40000"/>
+      </a:schemeClr>
+    </dgm:fillClrLst>
+    <dgm:linClrLst meth="repeat">
+      <a:schemeClr val="accent1">
+        <a:alpha val="90000"/>
+        <a:tint val="40000"/>
+      </a:schemeClr>
+    </dgm:linClrLst>
+    <dgm:effectClrLst/>
+    <dgm:txLinClrLst/>
+    <dgm:txFillClrLst meth="repeat">
+      <a:schemeClr val="dk1"/>
+    </dgm:txFillClrLst>
+    <dgm:txEffectClrLst/>
+  </dgm:styleLbl>
+  <dgm:styleLbl name="bgAccFollowNode1">
+    <dgm:fillClrLst meth="repeat">
+      <a:schemeClr val="accent1">
+        <a:alpha val="90000"/>
+        <a:tint val="40000"/>
+      </a:schemeClr>
+    </dgm:fillClrLst>
+    <dgm:linClrLst meth="repeat">
+      <a:schemeClr val="accent1">
+        <a:alpha val="90000"/>
+        <a:tint val="40000"/>
+      </a:schemeClr>
+    </dgm:linClrLst>
+    <dgm:effectClrLst/>
+    <dgm:txLinClrLst/>
+    <dgm:txFillClrLst meth="repeat">
+      <a:schemeClr val="dk1"/>
+    </dgm:txFillClrLst>
+    <dgm:txEffectClrLst/>
+  </dgm:styleLbl>
+  <dgm:styleLbl name="fgAcc0">
+    <dgm:fillClrLst meth="repeat">
+      <a:schemeClr val="lt1">
+        <a:alpha val="90000"/>
+      </a:schemeClr>
+    </dgm:fillClrLst>
+    <dgm:linClrLst meth="repeat">
+      <a:schemeClr val="accent1"/>
+    </dgm:linClrLst>
+    <dgm:effectClrLst/>
+    <dgm:txLinClrLst/>
+    <dgm:txFillClrLst meth="repeat">
+      <a:schemeClr val="dk1"/>
+    </dgm:txFillClrLst>
+    <dgm:txEffectClrLst/>
+  </dgm:styleLbl>
+  <dgm:styleLbl name="fgAcc2">
+    <dgm:fillClrLst meth="repeat">
+      <a:schemeClr val="lt1">
+        <a:alpha val="90000"/>
+      </a:schemeClr>
+    </dgm:fillClrLst>
+    <dgm:linClrLst meth="repeat">
+      <a:schemeClr val="accent1"/>
+    </dgm:linClrLst>
+    <dgm:effectClrLst/>
+    <dgm:txLinClrLst/>
+    <dgm:txFillClrLst meth="repeat">
+      <a:schemeClr val="dk1"/>
+    </dgm:txFillClrLst>
+    <dgm:txEffectClrLst/>
+  </dgm:styleLbl>
+  <dgm:styleLbl name="fgAcc3">
+    <dgm:fillClrLst meth="repeat">
+      <a:schemeClr val="lt1">
+        <a:alpha val="90000"/>
+      </a:schemeClr>
+    </dgm:fillClrLst>
+    <dgm:linClrLst meth="repeat">
+      <a:schemeClr val="accent1"/>
+    </dgm:linClrLst>
+    <dgm:effectClrLst/>
+    <dgm:txLinClrLst/>
+    <dgm:txFillClrLst meth="repeat">
+      <a:schemeClr val="dk1"/>
+    </dgm:txFillClrLst>
+    <dgm:txEffectClrLst/>
+  </dgm:styleLbl>
+  <dgm:styleLbl name="fgAcc4">
+    <dgm:fillClrLst meth="repeat">
+      <a:schemeClr val="lt1">
+        <a:alpha val="90000"/>
+      </a:schemeClr>
+    </dgm:fillClrLst>
+    <dgm:linClrLst meth="repeat">
+      <a:schemeClr val="accent1"/>
+    </dgm:linClrLst>
+    <dgm:effectClrLst/>
+    <dgm:txLinClrLst/>
+    <dgm:txFillClrLst meth="repeat">
+      <a:schemeClr val="dk1"/>
+    </dgm:txFillClrLst>
+    <dgm:txEffectClrLst/>
+  </dgm:styleLbl>
+  <dgm:styleLbl name="bgShp">
+    <dgm:fillClrLst meth="repeat">
+      <a:schemeClr val="accent1">
+        <a:tint val="40000"/>
+      </a:schemeClr>
+    </dgm:fillClrLst>
+    <dgm:linClrLst meth="repeat">
+      <a:schemeClr val="accent1"/>
+    </dgm:linClrLst>
+    <dgm:effectClrLst/>
+    <dgm:txLinClrLst/>
+    <dgm:txFillClrLst meth="repeat">
+      <a:schemeClr val="dk1"/>
+    </dgm:txFillClrLst>
+    <dgm:txEffectClrLst/>
+  </dgm:styleLbl>
+  <dgm:styleLbl name="dkBgShp">
+    <dgm:fillClrLst meth="repeat">
+      <a:schemeClr val="accent1">
+        <a:shade val="80000"/>
+      </a:schemeClr>
+    </dgm:fillClrLst>
+    <dgm:linClrLst meth="repeat">
+      <a:schemeClr val="accent1"/>
+    </dgm:linClrLst>
+    <dgm:effectClrLst/>
+    <dgm:txLinClrLst/>
+    <dgm:txFillClrLst meth="repeat">
+      <a:schemeClr val="lt1"/>
+    </dgm:txFillClrLst>
+    <dgm:txEffectClrLst/>
+  </dgm:styleLbl>
+  <dgm:styleLbl name="trBgShp">
+    <dgm:fillClrLst meth="repeat">
+      <a:schemeClr val="accent1">
+        <a:tint val="50000"/>
+        <a:alpha val="40000"/>
+      </a:schemeClr>
+    </dgm:fillClrLst>
+    <dgm:linClrLst meth="repeat">
+      <a:schemeClr val="accent1"/>
+    </dgm:linClrLst>
+    <dgm:effectClrLst/>
+    <dgm:txLinClrLst/>
+    <dgm:txFillClrLst meth="repeat">
+      <a:schemeClr val="lt1"/>
+    </dgm:txFillClrLst>
+    <dgm:txEffectClrLst/>
+  </dgm:styleLbl>
+  <dgm:styleLbl name="fgShp">
+    <dgm:fillClrLst meth="repeat">
+      <a:schemeClr val="accent1">
+        <a:tint val="60000"/>
+      </a:schemeClr>
+    </dgm:fillClrLst>
+    <dgm:linClrLst meth="repeat">
+      <a:schemeClr val="lt1"/>
+    </dgm:linClrLst>
+    <dgm:effectClrLst/>
+    <dgm:txLinClrLst/>
+    <dgm:txFillClrLst meth="repeat">
+      <a:schemeClr val="dk1"/>
+    </dgm:txFillClrLst>
+    <dgm:txEffectClrLst/>
+  </dgm:styleLbl>
+  <dgm:styleLbl name="revTx">
+    <dgm:fillClrLst meth="repeat">
+      <a:schemeClr val="lt1">
+        <a:alpha val="0"/>
+      </a:schemeClr>
+    </dgm:fillClrLst>
+    <dgm:linClrLst meth="repeat">
+      <a:schemeClr val="dk1">
+        <a:alpha val="0"/>
+      </a:schemeClr>
+    </dgm:linClrLst>
+    <dgm:effectClrLst/>
+    <dgm:txLinClrLst/>
+    <dgm:txFillClrLst meth="repeat">
+      <a:schemeClr val="tx1"/>
+    </dgm:txFillClrLst>
+    <dgm:txEffectClrLst/>
+  </dgm:styleLbl>
+</dgm:colorsDef>
+</file>
+
+<file path=ppt/diagrams/data1.xml><?xml version="1.0" encoding="utf-8"?>
+<dgm:dataModel xmlns:dgm="http://schemas.openxmlformats.org/drawingml/2006/diagram" xmlns:a="http://schemas.openxmlformats.org/drawingml/2006/main">
+  <dgm:ptLst>
+    <dgm:pt modelId="{D353F09A-583F-46D8-93D3-6AFEE64F8026}" type="doc">
+      <dgm:prSet loTypeId="urn:microsoft.com/office/officeart/2005/8/layout/vList5" loCatId="list" qsTypeId="urn:microsoft.com/office/officeart/2005/8/quickstyle/simple1" qsCatId="simple" csTypeId="urn:microsoft.com/office/officeart/2005/8/colors/accent1_2" csCatId="accent1"/>
+      <dgm:spPr/>
+      <dgm:t>
+        <a:bodyPr/>
+        <a:lstStyle/>
+        <a:p>
+          <a:endParaRPr lang="en-US"/>
+        </a:p>
+      </dgm:t>
+    </dgm:pt>
+    <dgm:pt modelId="{565A5826-784E-4F97-AEB8-6FC5EE3AC5EE}">
+      <dgm:prSet/>
+      <dgm:spPr/>
+      <dgm:t>
+        <a:bodyPr/>
+        <a:lstStyle/>
+        <a:p>
+          <a:r>
+            <a:rPr lang="en-US" b="1"/>
+            <a:t>Objetivo Técnico</a:t>
+          </a:r>
+          <a:endParaRPr lang="en-US"/>
+        </a:p>
+      </dgm:t>
+    </dgm:pt>
+    <dgm:pt modelId="{D12C3E2C-ACEB-45BC-AF06-707D4C16565F}" type="parTrans" cxnId="{F5AF10E9-FB4D-43B8-8305-BDD96AF41840}">
+      <dgm:prSet/>
+      <dgm:spPr/>
+      <dgm:t>
+        <a:bodyPr/>
+        <a:lstStyle/>
+        <a:p>
+          <a:endParaRPr lang="en-US"/>
+        </a:p>
+      </dgm:t>
+    </dgm:pt>
+    <dgm:pt modelId="{EF8D83B6-C10D-4066-90ED-41A038A23315}" type="sibTrans" cxnId="{F5AF10E9-FB4D-43B8-8305-BDD96AF41840}">
+      <dgm:prSet/>
+      <dgm:spPr/>
+      <dgm:t>
+        <a:bodyPr/>
+        <a:lstStyle/>
+        <a:p>
+          <a:endParaRPr lang="en-US"/>
+        </a:p>
+      </dgm:t>
+    </dgm:pt>
+    <dgm:pt modelId="{ECAD9A5E-9A5C-426A-96F2-7093E99CC62D}">
+      <dgm:prSet/>
+      <dgm:spPr/>
+      <dgm:t>
+        <a:bodyPr/>
+        <a:lstStyle/>
+        <a:p>
+          <a:r>
+            <a:rPr lang="en-US"/>
+            <a:t>Determinar la capacidad de tres arquitecturas de IA para distinguir matices emocionales finos (</a:t>
+          </a:r>
+          <a:r>
+            <a:rPr lang="en-US" i="1"/>
+            <a:t>Extremo</a:t>
+          </a:r>
+          <a:r>
+            <a:rPr lang="en-US"/>
+            <a:t> vs. </a:t>
+          </a:r>
+          <a:r>
+            <a:rPr lang="en-US" i="1"/>
+            <a:t>Regular</a:t>
+          </a:r>
+          <a:r>
+            <a:rPr lang="en-US"/>
+            <a:t>) en el comportamiento del consumidor.</a:t>
+          </a:r>
+        </a:p>
+      </dgm:t>
+    </dgm:pt>
+    <dgm:pt modelId="{C97819D0-E026-4355-A41A-3D3CDB1CB8EC}" type="parTrans" cxnId="{3FA6FFEC-6031-48F0-B66A-D134EB00D17F}">
+      <dgm:prSet/>
+      <dgm:spPr/>
+      <dgm:t>
+        <a:bodyPr/>
+        <a:lstStyle/>
+        <a:p>
+          <a:endParaRPr lang="en-US"/>
+        </a:p>
+      </dgm:t>
+    </dgm:pt>
+    <dgm:pt modelId="{A084E6D8-A134-4196-BAA9-9E5153479217}" type="sibTrans" cxnId="{3FA6FFEC-6031-48F0-B66A-D134EB00D17F}">
+      <dgm:prSet/>
+      <dgm:spPr/>
+      <dgm:t>
+        <a:bodyPr/>
+        <a:lstStyle/>
+        <a:p>
+          <a:endParaRPr lang="en-US"/>
+        </a:p>
+      </dgm:t>
+    </dgm:pt>
+    <dgm:pt modelId="{9774BB44-633B-42A1-A99C-B60F3BA9AA1F}">
+      <dgm:prSet/>
+      <dgm:spPr/>
+      <dgm:t>
+        <a:bodyPr/>
+        <a:lstStyle/>
+        <a:p>
+          <a:r>
+            <a:rPr lang="en-US" b="1"/>
+            <a:t>Resultados del Benchmarking</a:t>
+          </a:r>
+          <a:endParaRPr lang="en-US"/>
+        </a:p>
+      </dgm:t>
+    </dgm:pt>
+    <dgm:pt modelId="{F313E755-D5F9-42C6-A0C6-605B5BA0DAB1}" type="parTrans" cxnId="{16D262B0-55D7-439A-A025-5580C365FDFE}">
+      <dgm:prSet/>
+      <dgm:spPr/>
+      <dgm:t>
+        <a:bodyPr/>
+        <a:lstStyle/>
+        <a:p>
+          <a:endParaRPr lang="en-US"/>
+        </a:p>
+      </dgm:t>
+    </dgm:pt>
+    <dgm:pt modelId="{8214933C-5C4E-4EAC-A976-2695541BB802}" type="sibTrans" cxnId="{16D262B0-55D7-439A-A025-5580C365FDFE}">
+      <dgm:prSet/>
+      <dgm:spPr/>
+      <dgm:t>
+        <a:bodyPr/>
+        <a:lstStyle/>
+        <a:p>
+          <a:endParaRPr lang="en-US"/>
+        </a:p>
+      </dgm:t>
+    </dgm:pt>
+    <dgm:pt modelId="{F2E74C07-98DC-462F-9D1D-2CBB3EE82D19}">
+      <dgm:prSet/>
+      <dgm:spPr/>
+      <dgm:t>
+        <a:bodyPr/>
+        <a:lstStyle/>
+        <a:p>
+          <a:r>
+            <a:rPr lang="en-US"/>
+            <a:t>Se comparó el desempeño de modelos estadísticos, lineales y de aprendizaje profundo:</a:t>
+          </a:r>
+        </a:p>
+      </dgm:t>
+    </dgm:pt>
+    <dgm:pt modelId="{72B3D9E1-7A25-4E4C-9394-11AFCEFBFBB3}" type="parTrans" cxnId="{C1222658-4663-4F64-947B-854A1F6748CC}">
+      <dgm:prSet/>
+      <dgm:spPr/>
+      <dgm:t>
+        <a:bodyPr/>
+        <a:lstStyle/>
+        <a:p>
+          <a:endParaRPr lang="en-US"/>
+        </a:p>
+      </dgm:t>
+    </dgm:pt>
+    <dgm:pt modelId="{D8726261-A40D-40F1-AE55-5B296A8BE061}" type="sibTrans" cxnId="{C1222658-4663-4F64-947B-854A1F6748CC}">
+      <dgm:prSet/>
+      <dgm:spPr/>
+      <dgm:t>
+        <a:bodyPr/>
+        <a:lstStyle/>
+        <a:p>
+          <a:endParaRPr lang="en-US"/>
+        </a:p>
+      </dgm:t>
+    </dgm:pt>
+    <dgm:pt modelId="{DC51C6FC-8B5C-43D5-8605-318C0268442D}">
+      <dgm:prSet/>
+      <dgm:spPr/>
+      <dgm:t>
+        <a:bodyPr/>
+        <a:lstStyle/>
+        <a:p>
+          <a:r>
+            <a:rPr lang="en-US" b="1"/>
+            <a:t>Naïve Bayes (Accuracy 43%):</a:t>
+          </a:r>
+          <a:r>
+            <a:rPr lang="en-US"/>
+            <a:t> Funcionó como línea base. Mostró una tendencia conservadora, fallando significativamente en detectar los "Extremos", lo cual es crítico para identificar crisis reales.</a:t>
+          </a:r>
+        </a:p>
+      </dgm:t>
+    </dgm:pt>
+    <dgm:pt modelId="{9557B72C-DB6D-43AC-8C8C-3B34026A1352}" type="parTrans" cxnId="{C2E46431-A0D0-4C97-BF66-BF0AB8B3147B}">
+      <dgm:prSet/>
+      <dgm:spPr/>
+      <dgm:t>
+        <a:bodyPr/>
+        <a:lstStyle/>
+        <a:p>
+          <a:endParaRPr lang="en-US"/>
+        </a:p>
+      </dgm:t>
+    </dgm:pt>
+    <dgm:pt modelId="{221DD9DE-3FF0-4B61-9243-60148539492D}" type="sibTrans" cxnId="{C2E46431-A0D0-4C97-BF66-BF0AB8B3147B}">
+      <dgm:prSet/>
+      <dgm:spPr/>
+      <dgm:t>
+        <a:bodyPr/>
+        <a:lstStyle/>
+        <a:p>
+          <a:endParaRPr lang="en-US"/>
+        </a:p>
+      </dgm:t>
+    </dgm:pt>
+    <dgm:pt modelId="{E826B8BE-9783-4680-9637-48ED3F564E64}">
+      <dgm:prSet/>
+      <dgm:spPr/>
+      <dgm:t>
+        <a:bodyPr/>
+        <a:lstStyle/>
+        <a:p>
+          <a:r>
+            <a:rPr lang="en-US" b="1" dirty="0"/>
+            <a:t>Deep Learning (Accuracy 53%):</a:t>
+          </a:r>
+          <a:r>
+            <a:rPr lang="en-US" dirty="0"/>
+            <a:t> La Red Neuronal </a:t>
+          </a:r>
+          <a:r>
+            <a:rPr lang="en-US" dirty="0" err="1"/>
+            <a:t>demostró</a:t>
+          </a:r>
+          <a:r>
+            <a:rPr lang="en-US" dirty="0"/>
+            <a:t> </a:t>
+          </a:r>
+          <a:r>
+            <a:rPr lang="en-US" dirty="0" err="1"/>
+            <a:t>una</a:t>
+          </a:r>
+          <a:r>
+            <a:rPr lang="en-US" dirty="0"/>
+            <a:t> </a:t>
+          </a:r>
+          <a:r>
+            <a:rPr lang="en-US" dirty="0" err="1"/>
+            <a:t>capacidad</a:t>
+          </a:r>
+          <a:r>
+            <a:rPr lang="en-US" dirty="0"/>
+            <a:t> superior para </a:t>
+          </a:r>
+          <a:r>
+            <a:rPr lang="en-US" dirty="0" err="1"/>
+            <a:t>captar</a:t>
+          </a:r>
+          <a:r>
+            <a:rPr lang="en-US" dirty="0"/>
+            <a:t> </a:t>
+          </a:r>
+          <a:r>
+            <a:rPr lang="en-US" dirty="0" err="1"/>
+            <a:t>patrones</a:t>
+          </a:r>
+          <a:r>
+            <a:rPr lang="en-US" dirty="0"/>
+            <a:t> </a:t>
+          </a:r>
+          <a:r>
+            <a:rPr lang="en-US" dirty="0" err="1"/>
+            <a:t>complejos</a:t>
+          </a:r>
+          <a:r>
+            <a:rPr lang="en-US" dirty="0"/>
+            <a:t>, </a:t>
+          </a:r>
+          <a:r>
+            <a:rPr lang="en-US" dirty="0" err="1"/>
+            <a:t>superando</a:t>
+          </a:r>
+          <a:r>
+            <a:rPr lang="en-US" dirty="0"/>
+            <a:t> al </a:t>
+          </a:r>
+          <a:r>
+            <a:rPr lang="en-US" dirty="0" err="1"/>
+            <a:t>modelo</a:t>
+          </a:r>
+          <a:r>
+            <a:rPr lang="en-US" dirty="0"/>
+            <a:t> base </a:t>
+          </a:r>
+          <a:r>
+            <a:rPr lang="en-US" dirty="0" err="1"/>
+            <a:t>por</a:t>
+          </a:r>
+          <a:r>
+            <a:rPr lang="en-US" dirty="0"/>
+            <a:t> un 10%, </a:t>
+          </a:r>
+          <a:r>
+            <a:rPr lang="en-US" dirty="0" err="1"/>
+            <a:t>aunque</a:t>
+          </a:r>
+          <a:r>
+            <a:rPr lang="en-US" dirty="0"/>
+            <a:t> con un </a:t>
+          </a:r>
+          <a:r>
+            <a:rPr lang="en-US" dirty="0" err="1"/>
+            <a:t>costo</a:t>
+          </a:r>
+          <a:r>
+            <a:rPr lang="en-US" dirty="0"/>
+            <a:t> </a:t>
+          </a:r>
+          <a:r>
+            <a:rPr lang="en-US" dirty="0" err="1"/>
+            <a:t>computacional</a:t>
+          </a:r>
+          <a:r>
+            <a:rPr lang="en-US" dirty="0"/>
+            <a:t> mayor.</a:t>
+          </a:r>
+        </a:p>
+      </dgm:t>
+    </dgm:pt>
+    <dgm:pt modelId="{07A09A73-A2AE-4ED8-A5EE-2FECB0DDCB78}" type="parTrans" cxnId="{88FDE7DF-C25F-48A3-9D8F-1AC4494765F6}">
+      <dgm:prSet/>
+      <dgm:spPr/>
+      <dgm:t>
+        <a:bodyPr/>
+        <a:lstStyle/>
+        <a:p>
+          <a:endParaRPr lang="en-US"/>
+        </a:p>
+      </dgm:t>
+    </dgm:pt>
+    <dgm:pt modelId="{5D615045-5858-4036-8FE1-1E0E7EC53493}" type="sibTrans" cxnId="{88FDE7DF-C25F-48A3-9D8F-1AC4494765F6}">
+      <dgm:prSet/>
+      <dgm:spPr/>
+      <dgm:t>
+        <a:bodyPr/>
+        <a:lstStyle/>
+        <a:p>
+          <a:endParaRPr lang="en-US"/>
+        </a:p>
+      </dgm:t>
+    </dgm:pt>
+    <dgm:pt modelId="{713CD92E-F184-4A13-998A-FC2EF24AC4C7}">
+      <dgm:prSet/>
+      <dgm:spPr/>
+      <dgm:t>
+        <a:bodyPr/>
+        <a:lstStyle/>
+        <a:p>
+          <a:r>
+            <a:rPr lang="en-US" b="1"/>
+            <a:t>SVM - LinearSVC (Accuracy 55%):</a:t>
+          </a:r>
+          <a:r>
+            <a:rPr lang="en-US"/>
+            <a:t> Resultó ser el modelo más robusto para esta granularidad, logrando el mejor equilibrio entre precisión y tiempo de respuesta.</a:t>
+          </a:r>
+        </a:p>
+      </dgm:t>
+    </dgm:pt>
+    <dgm:pt modelId="{B2E13B37-4FBD-4940-9736-136F30374816}" type="parTrans" cxnId="{F4283E1F-4AC2-4942-99A3-4BD3894117DC}">
+      <dgm:prSet/>
+      <dgm:spPr/>
+      <dgm:t>
+        <a:bodyPr/>
+        <a:lstStyle/>
+        <a:p>
+          <a:endParaRPr lang="en-US"/>
+        </a:p>
+      </dgm:t>
+    </dgm:pt>
+    <dgm:pt modelId="{C9F9AD38-8D13-4A0D-B49B-82D73704E0F8}" type="sibTrans" cxnId="{F4283E1F-4AC2-4942-99A3-4BD3894117DC}">
+      <dgm:prSet/>
+      <dgm:spPr/>
+      <dgm:t>
+        <a:bodyPr/>
+        <a:lstStyle/>
+        <a:p>
+          <a:endParaRPr lang="en-US"/>
+        </a:p>
+      </dgm:t>
+    </dgm:pt>
+    <dgm:pt modelId="{ED7E0E47-57AA-4F1E-A0C1-5903B58C13E8}" type="pres">
+      <dgm:prSet presAssocID="{D353F09A-583F-46D8-93D3-6AFEE64F8026}" presName="Name0" presStyleCnt="0">
+        <dgm:presLayoutVars>
+          <dgm:dir/>
+          <dgm:animLvl val="lvl"/>
+          <dgm:resizeHandles val="exact"/>
+        </dgm:presLayoutVars>
+      </dgm:prSet>
+      <dgm:spPr/>
+    </dgm:pt>
+    <dgm:pt modelId="{240BE6C7-D181-417E-8E12-9FB94A32676E}" type="pres">
+      <dgm:prSet presAssocID="{565A5826-784E-4F97-AEB8-6FC5EE3AC5EE}" presName="linNode" presStyleCnt="0"/>
+      <dgm:spPr/>
+    </dgm:pt>
+    <dgm:pt modelId="{9EBAB14C-AA6A-4E63-903E-FD54981C1118}" type="pres">
+      <dgm:prSet presAssocID="{565A5826-784E-4F97-AEB8-6FC5EE3AC5EE}" presName="parentText" presStyleLbl="node1" presStyleIdx="0" presStyleCnt="2">
+        <dgm:presLayoutVars>
+          <dgm:chMax val="1"/>
+          <dgm:bulletEnabled val="1"/>
+        </dgm:presLayoutVars>
+      </dgm:prSet>
+      <dgm:spPr/>
+    </dgm:pt>
+    <dgm:pt modelId="{2FC1D35B-5B6A-4D04-AB30-73EB1C45BB7D}" type="pres">
+      <dgm:prSet presAssocID="{565A5826-784E-4F97-AEB8-6FC5EE3AC5EE}" presName="descendantText" presStyleLbl="alignAccFollowNode1" presStyleIdx="0" presStyleCnt="2">
+        <dgm:presLayoutVars>
+          <dgm:bulletEnabled val="1"/>
+        </dgm:presLayoutVars>
+      </dgm:prSet>
+      <dgm:spPr/>
+    </dgm:pt>
+    <dgm:pt modelId="{09E1DB57-D1DD-4987-A094-614E96E0B3BE}" type="pres">
+      <dgm:prSet presAssocID="{EF8D83B6-C10D-4066-90ED-41A038A23315}" presName="sp" presStyleCnt="0"/>
+      <dgm:spPr/>
+    </dgm:pt>
+    <dgm:pt modelId="{0C676153-088B-478B-A44E-FEA8EB6AFFDD}" type="pres">
+      <dgm:prSet presAssocID="{9774BB44-633B-42A1-A99C-B60F3BA9AA1F}" presName="linNode" presStyleCnt="0"/>
+      <dgm:spPr/>
+    </dgm:pt>
+    <dgm:pt modelId="{FEDCDB1F-A1BD-45A0-8921-04823BF64439}" type="pres">
+      <dgm:prSet presAssocID="{9774BB44-633B-42A1-A99C-B60F3BA9AA1F}" presName="parentText" presStyleLbl="node1" presStyleIdx="1" presStyleCnt="2">
+        <dgm:presLayoutVars>
+          <dgm:chMax val="1"/>
+          <dgm:bulletEnabled val="1"/>
+        </dgm:presLayoutVars>
+      </dgm:prSet>
+      <dgm:spPr/>
+    </dgm:pt>
+    <dgm:pt modelId="{741D07AF-A4AD-4AE3-8C30-849217CF8D25}" type="pres">
+      <dgm:prSet presAssocID="{9774BB44-633B-42A1-A99C-B60F3BA9AA1F}" presName="descendantText" presStyleLbl="alignAccFollowNode1" presStyleIdx="1" presStyleCnt="2">
+        <dgm:presLayoutVars>
+          <dgm:bulletEnabled val="1"/>
+        </dgm:presLayoutVars>
+      </dgm:prSet>
+      <dgm:spPr/>
+    </dgm:pt>
+  </dgm:ptLst>
+  <dgm:cxnLst>
+    <dgm:cxn modelId="{0F9A7809-7360-4890-9FBA-588E438144E2}" type="presOf" srcId="{ECAD9A5E-9A5C-426A-96F2-7093E99CC62D}" destId="{2FC1D35B-5B6A-4D04-AB30-73EB1C45BB7D}" srcOrd="0" destOrd="0" presId="urn:microsoft.com/office/officeart/2005/8/layout/vList5"/>
+    <dgm:cxn modelId="{5BA7500A-C7D5-4496-B683-13FF6A8DE1F2}" type="presOf" srcId="{565A5826-784E-4F97-AEB8-6FC5EE3AC5EE}" destId="{9EBAB14C-AA6A-4E63-903E-FD54981C1118}" srcOrd="0" destOrd="0" presId="urn:microsoft.com/office/officeart/2005/8/layout/vList5"/>
+    <dgm:cxn modelId="{F4283E1F-4AC2-4942-99A3-4BD3894117DC}" srcId="{F2E74C07-98DC-462F-9D1D-2CBB3EE82D19}" destId="{713CD92E-F184-4A13-998A-FC2EF24AC4C7}" srcOrd="2" destOrd="0" parTransId="{B2E13B37-4FBD-4940-9736-136F30374816}" sibTransId="{C9F9AD38-8D13-4A0D-B49B-82D73704E0F8}"/>
+    <dgm:cxn modelId="{05AE1D2B-3E70-445D-9620-CF8AC28C42B5}" type="presOf" srcId="{713CD92E-F184-4A13-998A-FC2EF24AC4C7}" destId="{741D07AF-A4AD-4AE3-8C30-849217CF8D25}" srcOrd="0" destOrd="3" presId="urn:microsoft.com/office/officeart/2005/8/layout/vList5"/>
+    <dgm:cxn modelId="{C2E46431-A0D0-4C97-BF66-BF0AB8B3147B}" srcId="{F2E74C07-98DC-462F-9D1D-2CBB3EE82D19}" destId="{DC51C6FC-8B5C-43D5-8605-318C0268442D}" srcOrd="0" destOrd="0" parTransId="{9557B72C-DB6D-43AC-8C8C-3B34026A1352}" sibTransId="{221DD9DE-3FF0-4B61-9243-60148539492D}"/>
+    <dgm:cxn modelId="{8B47523B-A464-41FD-85C8-8EB5FAA16D5E}" type="presOf" srcId="{E826B8BE-9783-4680-9637-48ED3F564E64}" destId="{741D07AF-A4AD-4AE3-8C30-849217CF8D25}" srcOrd="0" destOrd="2" presId="urn:microsoft.com/office/officeart/2005/8/layout/vList5"/>
+    <dgm:cxn modelId="{F3045969-45C4-4CC7-9640-285986B678E1}" type="presOf" srcId="{DC51C6FC-8B5C-43D5-8605-318C0268442D}" destId="{741D07AF-A4AD-4AE3-8C30-849217CF8D25}" srcOrd="0" destOrd="1" presId="urn:microsoft.com/office/officeart/2005/8/layout/vList5"/>
+    <dgm:cxn modelId="{4E253E6C-23A5-4D29-93E0-3DAA3AF5A908}" type="presOf" srcId="{D353F09A-583F-46D8-93D3-6AFEE64F8026}" destId="{ED7E0E47-57AA-4F1E-A0C1-5903B58C13E8}" srcOrd="0" destOrd="0" presId="urn:microsoft.com/office/officeart/2005/8/layout/vList5"/>
+    <dgm:cxn modelId="{2618C850-FF96-4935-909A-646C14022EAE}" type="presOf" srcId="{F2E74C07-98DC-462F-9D1D-2CBB3EE82D19}" destId="{741D07AF-A4AD-4AE3-8C30-849217CF8D25}" srcOrd="0" destOrd="0" presId="urn:microsoft.com/office/officeart/2005/8/layout/vList5"/>
+    <dgm:cxn modelId="{C1222658-4663-4F64-947B-854A1F6748CC}" srcId="{9774BB44-633B-42A1-A99C-B60F3BA9AA1F}" destId="{F2E74C07-98DC-462F-9D1D-2CBB3EE82D19}" srcOrd="0" destOrd="0" parTransId="{72B3D9E1-7A25-4E4C-9394-11AFCEFBFBB3}" sibTransId="{D8726261-A40D-40F1-AE55-5B296A8BE061}"/>
+    <dgm:cxn modelId="{16D262B0-55D7-439A-A025-5580C365FDFE}" srcId="{D353F09A-583F-46D8-93D3-6AFEE64F8026}" destId="{9774BB44-633B-42A1-A99C-B60F3BA9AA1F}" srcOrd="1" destOrd="0" parTransId="{F313E755-D5F9-42C6-A0C6-605B5BA0DAB1}" sibTransId="{8214933C-5C4E-4EAC-A976-2695541BB802}"/>
+    <dgm:cxn modelId="{1782DBC5-F400-43F5-ABD0-A45D51E7F9AB}" type="presOf" srcId="{9774BB44-633B-42A1-A99C-B60F3BA9AA1F}" destId="{FEDCDB1F-A1BD-45A0-8921-04823BF64439}" srcOrd="0" destOrd="0" presId="urn:microsoft.com/office/officeart/2005/8/layout/vList5"/>
+    <dgm:cxn modelId="{88FDE7DF-C25F-48A3-9D8F-1AC4494765F6}" srcId="{F2E74C07-98DC-462F-9D1D-2CBB3EE82D19}" destId="{E826B8BE-9783-4680-9637-48ED3F564E64}" srcOrd="1" destOrd="0" parTransId="{07A09A73-A2AE-4ED8-A5EE-2FECB0DDCB78}" sibTransId="{5D615045-5858-4036-8FE1-1E0E7EC53493}"/>
+    <dgm:cxn modelId="{F5AF10E9-FB4D-43B8-8305-BDD96AF41840}" srcId="{D353F09A-583F-46D8-93D3-6AFEE64F8026}" destId="{565A5826-784E-4F97-AEB8-6FC5EE3AC5EE}" srcOrd="0" destOrd="0" parTransId="{D12C3E2C-ACEB-45BC-AF06-707D4C16565F}" sibTransId="{EF8D83B6-C10D-4066-90ED-41A038A23315}"/>
+    <dgm:cxn modelId="{3FA6FFEC-6031-48F0-B66A-D134EB00D17F}" srcId="{565A5826-784E-4F97-AEB8-6FC5EE3AC5EE}" destId="{ECAD9A5E-9A5C-426A-96F2-7093E99CC62D}" srcOrd="0" destOrd="0" parTransId="{C97819D0-E026-4355-A41A-3D3CDB1CB8EC}" sibTransId="{A084E6D8-A134-4196-BAA9-9E5153479217}"/>
+    <dgm:cxn modelId="{E4DACD4E-397F-4BD4-9ACA-A694F74ADF5C}" type="presParOf" srcId="{ED7E0E47-57AA-4F1E-A0C1-5903B58C13E8}" destId="{240BE6C7-D181-417E-8E12-9FB94A32676E}" srcOrd="0" destOrd="0" presId="urn:microsoft.com/office/officeart/2005/8/layout/vList5"/>
+    <dgm:cxn modelId="{29DD09E3-017E-4268-AF28-7A1B7C5872CA}" type="presParOf" srcId="{240BE6C7-D181-417E-8E12-9FB94A32676E}" destId="{9EBAB14C-AA6A-4E63-903E-FD54981C1118}" srcOrd="0" destOrd="0" presId="urn:microsoft.com/office/officeart/2005/8/layout/vList5"/>
+    <dgm:cxn modelId="{51FB9133-A36C-4532-B568-5C21FC4FDF55}" type="presParOf" srcId="{240BE6C7-D181-417E-8E12-9FB94A32676E}" destId="{2FC1D35B-5B6A-4D04-AB30-73EB1C45BB7D}" srcOrd="1" destOrd="0" presId="urn:microsoft.com/office/officeart/2005/8/layout/vList5"/>
+    <dgm:cxn modelId="{2B98FAB9-73D1-454D-9E5E-CA98D7688A60}" type="presParOf" srcId="{ED7E0E47-57AA-4F1E-A0C1-5903B58C13E8}" destId="{09E1DB57-D1DD-4987-A094-614E96E0B3BE}" srcOrd="1" destOrd="0" presId="urn:microsoft.com/office/officeart/2005/8/layout/vList5"/>
+    <dgm:cxn modelId="{4BB92F29-5DD6-4375-8B5D-0E5909FEF409}" type="presParOf" srcId="{ED7E0E47-57AA-4F1E-A0C1-5903B58C13E8}" destId="{0C676153-088B-478B-A44E-FEA8EB6AFFDD}" srcOrd="2" destOrd="0" presId="urn:microsoft.com/office/officeart/2005/8/layout/vList5"/>
+    <dgm:cxn modelId="{0B88B75D-1F79-4B5E-9A14-363D1C04D48C}" type="presParOf" srcId="{0C676153-088B-478B-A44E-FEA8EB6AFFDD}" destId="{FEDCDB1F-A1BD-45A0-8921-04823BF64439}" srcOrd="0" destOrd="0" presId="urn:microsoft.com/office/officeart/2005/8/layout/vList5"/>
+    <dgm:cxn modelId="{3CC5FEB5-69E2-4972-81BC-9C6191EEB6A8}" type="presParOf" srcId="{0C676153-088B-478B-A44E-FEA8EB6AFFDD}" destId="{741D07AF-A4AD-4AE3-8C30-849217CF8D25}" srcOrd="1" destOrd="0" presId="urn:microsoft.com/office/officeart/2005/8/layout/vList5"/>
+  </dgm:cxnLst>
+  <dgm:bg/>
+  <dgm:whole/>
+  <dgm:extLst>
+    <a:ext uri="http://schemas.microsoft.com/office/drawing/2008/diagram">
+      <dsp:dataModelExt xmlns:dsp="http://schemas.microsoft.com/office/drawing/2008/diagram" relId="rId6" minVer="http://schemas.openxmlformats.org/drawingml/2006/diagram"/>
+    </a:ext>
+  </dgm:extLst>
+</dgm:dataModel>
+</file>
+
+<file path=ppt/diagrams/data2.xml><?xml version="1.0" encoding="utf-8"?>
+<dgm:dataModel xmlns:dgm="http://schemas.openxmlformats.org/drawingml/2006/diagram" xmlns:a="http://schemas.openxmlformats.org/drawingml/2006/main">
+  <dgm:ptLst>
+    <dgm:pt modelId="{D353F09A-583F-46D8-93D3-6AFEE64F8026}" type="doc">
+      <dgm:prSet loTypeId="urn:microsoft.com/office/officeart/2005/8/layout/vList5" loCatId="list" qsTypeId="urn:microsoft.com/office/officeart/2005/8/quickstyle/simple1" qsCatId="simple" csTypeId="urn:microsoft.com/office/officeart/2005/8/colors/accent1_2" csCatId="accent1"/>
+      <dgm:spPr/>
+      <dgm:t>
+        <a:bodyPr/>
+        <a:lstStyle/>
+        <a:p>
+          <a:endParaRPr lang="en-US"/>
+        </a:p>
+      </dgm:t>
+    </dgm:pt>
+    <dgm:pt modelId="{565A5826-784E-4F97-AEB8-6FC5EE3AC5EE}">
+      <dgm:prSet/>
+      <dgm:spPr/>
+      <dgm:t>
+        <a:bodyPr/>
+        <a:lstStyle/>
+        <a:p>
+          <a:r>
+            <a:rPr lang="en-US" b="1"/>
+            <a:t>Objetivo Técnico</a:t>
+          </a:r>
+          <a:endParaRPr lang="en-US"/>
+        </a:p>
+      </dgm:t>
+    </dgm:pt>
+    <dgm:pt modelId="{D12C3E2C-ACEB-45BC-AF06-707D4C16565F}" type="parTrans" cxnId="{F5AF10E9-FB4D-43B8-8305-BDD96AF41840}">
+      <dgm:prSet/>
+      <dgm:spPr/>
+      <dgm:t>
+        <a:bodyPr/>
+        <a:lstStyle/>
+        <a:p>
+          <a:endParaRPr lang="en-US"/>
+        </a:p>
+      </dgm:t>
+    </dgm:pt>
+    <dgm:pt modelId="{EF8D83B6-C10D-4066-90ED-41A038A23315}" type="sibTrans" cxnId="{F5AF10E9-FB4D-43B8-8305-BDD96AF41840}">
+      <dgm:prSet/>
+      <dgm:spPr/>
+      <dgm:t>
+        <a:bodyPr/>
+        <a:lstStyle/>
+        <a:p>
+          <a:endParaRPr lang="en-US"/>
+        </a:p>
+      </dgm:t>
+    </dgm:pt>
+    <dgm:pt modelId="{ECAD9A5E-9A5C-426A-96F2-7093E99CC62D}">
+      <dgm:prSet/>
+      <dgm:spPr/>
+      <dgm:t>
+        <a:bodyPr/>
+        <a:lstStyle/>
+        <a:p>
+          <a:r>
+            <a:rPr lang="en-US"/>
+            <a:t>Determinar la capacidad de tres arquitecturas de IA para distinguir matices emocionales finos (</a:t>
+          </a:r>
+          <a:r>
+            <a:rPr lang="en-US" i="1"/>
+            <a:t>Extremo</a:t>
+          </a:r>
+          <a:r>
+            <a:rPr lang="en-US"/>
+            <a:t> vs. </a:t>
+          </a:r>
+          <a:r>
+            <a:rPr lang="en-US" i="1"/>
+            <a:t>Regular</a:t>
+          </a:r>
+          <a:r>
+            <a:rPr lang="en-US"/>
+            <a:t>) en el comportamiento del consumidor.</a:t>
+          </a:r>
+        </a:p>
+      </dgm:t>
+    </dgm:pt>
+    <dgm:pt modelId="{C97819D0-E026-4355-A41A-3D3CDB1CB8EC}" type="parTrans" cxnId="{3FA6FFEC-6031-48F0-B66A-D134EB00D17F}">
+      <dgm:prSet/>
+      <dgm:spPr/>
+      <dgm:t>
+        <a:bodyPr/>
+        <a:lstStyle/>
+        <a:p>
+          <a:endParaRPr lang="en-US"/>
+        </a:p>
+      </dgm:t>
+    </dgm:pt>
+    <dgm:pt modelId="{A084E6D8-A134-4196-BAA9-9E5153479217}" type="sibTrans" cxnId="{3FA6FFEC-6031-48F0-B66A-D134EB00D17F}">
+      <dgm:prSet/>
+      <dgm:spPr/>
+      <dgm:t>
+        <a:bodyPr/>
+        <a:lstStyle/>
+        <a:p>
+          <a:endParaRPr lang="en-US"/>
+        </a:p>
+      </dgm:t>
+    </dgm:pt>
+    <dgm:pt modelId="{9774BB44-633B-42A1-A99C-B60F3BA9AA1F}">
+      <dgm:prSet/>
+      <dgm:spPr/>
+      <dgm:t>
+        <a:bodyPr/>
+        <a:lstStyle/>
+        <a:p>
+          <a:r>
+            <a:rPr lang="en-US" b="1"/>
+            <a:t>Resultados del Benchmarking</a:t>
+          </a:r>
+          <a:endParaRPr lang="en-US"/>
+        </a:p>
+      </dgm:t>
+    </dgm:pt>
+    <dgm:pt modelId="{F313E755-D5F9-42C6-A0C6-605B5BA0DAB1}" type="parTrans" cxnId="{16D262B0-55D7-439A-A025-5580C365FDFE}">
+      <dgm:prSet/>
+      <dgm:spPr/>
+      <dgm:t>
+        <a:bodyPr/>
+        <a:lstStyle/>
+        <a:p>
+          <a:endParaRPr lang="en-US"/>
+        </a:p>
+      </dgm:t>
+    </dgm:pt>
+    <dgm:pt modelId="{8214933C-5C4E-4EAC-A976-2695541BB802}" type="sibTrans" cxnId="{16D262B0-55D7-439A-A025-5580C365FDFE}">
+      <dgm:prSet/>
+      <dgm:spPr/>
+      <dgm:t>
+        <a:bodyPr/>
+        <a:lstStyle/>
+        <a:p>
+          <a:endParaRPr lang="en-US"/>
+        </a:p>
+      </dgm:t>
+    </dgm:pt>
+    <dgm:pt modelId="{F2E74C07-98DC-462F-9D1D-2CBB3EE82D19}">
+      <dgm:prSet/>
+      <dgm:spPr/>
+      <dgm:t>
+        <a:bodyPr/>
+        <a:lstStyle/>
+        <a:p>
+          <a:r>
+            <a:rPr lang="en-US"/>
+            <a:t>Se comparó el desempeño de modelos estadísticos, lineales y de aprendizaje profundo:</a:t>
+          </a:r>
+        </a:p>
+      </dgm:t>
+    </dgm:pt>
+    <dgm:pt modelId="{72B3D9E1-7A25-4E4C-9394-11AFCEFBFBB3}" type="parTrans" cxnId="{C1222658-4663-4F64-947B-854A1F6748CC}">
+      <dgm:prSet/>
+      <dgm:spPr/>
+      <dgm:t>
+        <a:bodyPr/>
+        <a:lstStyle/>
+        <a:p>
+          <a:endParaRPr lang="en-US"/>
+        </a:p>
+      </dgm:t>
+    </dgm:pt>
+    <dgm:pt modelId="{D8726261-A40D-40F1-AE55-5B296A8BE061}" type="sibTrans" cxnId="{C1222658-4663-4F64-947B-854A1F6748CC}">
+      <dgm:prSet/>
+      <dgm:spPr/>
+      <dgm:t>
+        <a:bodyPr/>
+        <a:lstStyle/>
+        <a:p>
+          <a:endParaRPr lang="en-US"/>
+        </a:p>
+      </dgm:t>
+    </dgm:pt>
+    <dgm:pt modelId="{DC51C6FC-8B5C-43D5-8605-318C0268442D}">
+      <dgm:prSet/>
+      <dgm:spPr/>
+      <dgm:t>
+        <a:bodyPr/>
+        <a:lstStyle/>
+        <a:p>
+          <a:r>
+            <a:rPr lang="en-US" b="1"/>
+            <a:t>Naïve Bayes (Accuracy 43%):</a:t>
+          </a:r>
+          <a:r>
+            <a:rPr lang="en-US"/>
+            <a:t> Funcionó como línea base. Mostró una tendencia conservadora, fallando significativamente en detectar los "Extremos", lo cual es crítico para identificar crisis reales.</a:t>
+          </a:r>
+        </a:p>
+      </dgm:t>
+    </dgm:pt>
+    <dgm:pt modelId="{9557B72C-DB6D-43AC-8C8C-3B34026A1352}" type="parTrans" cxnId="{C2E46431-A0D0-4C97-BF66-BF0AB8B3147B}">
+      <dgm:prSet/>
+      <dgm:spPr/>
+      <dgm:t>
+        <a:bodyPr/>
+        <a:lstStyle/>
+        <a:p>
+          <a:endParaRPr lang="en-US"/>
+        </a:p>
+      </dgm:t>
+    </dgm:pt>
+    <dgm:pt modelId="{221DD9DE-3FF0-4B61-9243-60148539492D}" type="sibTrans" cxnId="{C2E46431-A0D0-4C97-BF66-BF0AB8B3147B}">
+      <dgm:prSet/>
+      <dgm:spPr/>
+      <dgm:t>
+        <a:bodyPr/>
+        <a:lstStyle/>
+        <a:p>
+          <a:endParaRPr lang="en-US"/>
+        </a:p>
+      </dgm:t>
+    </dgm:pt>
+    <dgm:pt modelId="{E826B8BE-9783-4680-9637-48ED3F564E64}">
+      <dgm:prSet/>
+      <dgm:spPr/>
+      <dgm:t>
+        <a:bodyPr/>
+        <a:lstStyle/>
+        <a:p>
+          <a:r>
+            <a:rPr lang="en-US" b="1" dirty="0"/>
+            <a:t>Deep Learning (Accuracy 53%):</a:t>
+          </a:r>
+          <a:r>
+            <a:rPr lang="en-US" dirty="0"/>
+            <a:t> La Red Neuronal </a:t>
+          </a:r>
+          <a:r>
+            <a:rPr lang="en-US" dirty="0" err="1"/>
+            <a:t>demostró</a:t>
+          </a:r>
+          <a:r>
+            <a:rPr lang="en-US" dirty="0"/>
+            <a:t> </a:t>
+          </a:r>
+          <a:r>
+            <a:rPr lang="en-US" dirty="0" err="1"/>
+            <a:t>una</a:t>
+          </a:r>
+          <a:r>
+            <a:rPr lang="en-US" dirty="0"/>
+            <a:t> </a:t>
+          </a:r>
+          <a:r>
+            <a:rPr lang="en-US" dirty="0" err="1"/>
+            <a:t>capacidad</a:t>
+          </a:r>
+          <a:r>
+            <a:rPr lang="en-US" dirty="0"/>
+            <a:t> superior para </a:t>
+          </a:r>
+          <a:r>
+            <a:rPr lang="en-US" dirty="0" err="1"/>
+            <a:t>captar</a:t>
+          </a:r>
+          <a:r>
+            <a:rPr lang="en-US" dirty="0"/>
+            <a:t> </a:t>
+          </a:r>
+          <a:r>
+            <a:rPr lang="en-US" dirty="0" err="1"/>
+            <a:t>patrones</a:t>
+          </a:r>
+          <a:r>
+            <a:rPr lang="en-US" dirty="0"/>
+            <a:t> </a:t>
+          </a:r>
+          <a:r>
+            <a:rPr lang="en-US" dirty="0" err="1"/>
+            <a:t>complejos</a:t>
+          </a:r>
+          <a:r>
+            <a:rPr lang="en-US" dirty="0"/>
+            <a:t>, </a:t>
+          </a:r>
+          <a:r>
+            <a:rPr lang="en-US" dirty="0" err="1"/>
+            <a:t>superando</a:t>
+          </a:r>
+          <a:r>
+            <a:rPr lang="en-US" dirty="0"/>
+            <a:t> al </a:t>
+          </a:r>
+          <a:r>
+            <a:rPr lang="en-US" dirty="0" err="1"/>
+            <a:t>modelo</a:t>
+          </a:r>
+          <a:r>
+            <a:rPr lang="en-US" dirty="0"/>
+            <a:t> base </a:t>
+          </a:r>
+          <a:r>
+            <a:rPr lang="en-US" dirty="0" err="1"/>
+            <a:t>por</a:t>
+          </a:r>
+          <a:r>
+            <a:rPr lang="en-US" dirty="0"/>
+            <a:t> un 10%, </a:t>
+          </a:r>
+          <a:r>
+            <a:rPr lang="en-US" dirty="0" err="1"/>
+            <a:t>aunque</a:t>
+          </a:r>
+          <a:r>
+            <a:rPr lang="en-US" dirty="0"/>
+            <a:t> con un </a:t>
+          </a:r>
+          <a:r>
+            <a:rPr lang="en-US" dirty="0" err="1"/>
+            <a:t>costo</a:t>
+          </a:r>
+          <a:r>
+            <a:rPr lang="en-US" dirty="0"/>
+            <a:t> </a:t>
+          </a:r>
+          <a:r>
+            <a:rPr lang="en-US" dirty="0" err="1"/>
+            <a:t>computacional</a:t>
+          </a:r>
+          <a:r>
+            <a:rPr lang="en-US" dirty="0"/>
+            <a:t> mayor.</a:t>
+          </a:r>
+        </a:p>
+      </dgm:t>
+    </dgm:pt>
+    <dgm:pt modelId="{07A09A73-A2AE-4ED8-A5EE-2FECB0DDCB78}" type="parTrans" cxnId="{88FDE7DF-C25F-48A3-9D8F-1AC4494765F6}">
+      <dgm:prSet/>
+      <dgm:spPr/>
+      <dgm:t>
+        <a:bodyPr/>
+        <a:lstStyle/>
+        <a:p>
+          <a:endParaRPr lang="en-US"/>
+        </a:p>
+      </dgm:t>
+    </dgm:pt>
+    <dgm:pt modelId="{5D615045-5858-4036-8FE1-1E0E7EC53493}" type="sibTrans" cxnId="{88FDE7DF-C25F-48A3-9D8F-1AC4494765F6}">
+      <dgm:prSet/>
+      <dgm:spPr/>
+      <dgm:t>
+        <a:bodyPr/>
+        <a:lstStyle/>
+        <a:p>
+          <a:endParaRPr lang="en-US"/>
+        </a:p>
+      </dgm:t>
+    </dgm:pt>
+    <dgm:pt modelId="{713CD92E-F184-4A13-998A-FC2EF24AC4C7}">
+      <dgm:prSet/>
+      <dgm:spPr/>
+      <dgm:t>
+        <a:bodyPr/>
+        <a:lstStyle/>
+        <a:p>
+          <a:r>
+            <a:rPr lang="en-US" b="1"/>
+            <a:t>SVM - LinearSVC (Accuracy 55%):</a:t>
+          </a:r>
+          <a:r>
+            <a:rPr lang="en-US"/>
+            <a:t> Resultó ser el modelo más robusto para esta granularidad, logrando el mejor equilibrio entre precisión y tiempo de respuesta.</a:t>
+          </a:r>
+        </a:p>
+      </dgm:t>
+    </dgm:pt>
+    <dgm:pt modelId="{B2E13B37-4FBD-4940-9736-136F30374816}" type="parTrans" cxnId="{F4283E1F-4AC2-4942-99A3-4BD3894117DC}">
+      <dgm:prSet/>
+      <dgm:spPr/>
+      <dgm:t>
+        <a:bodyPr/>
+        <a:lstStyle/>
+        <a:p>
+          <a:endParaRPr lang="en-US"/>
+        </a:p>
+      </dgm:t>
+    </dgm:pt>
+    <dgm:pt modelId="{C9F9AD38-8D13-4A0D-B49B-82D73704E0F8}" type="sibTrans" cxnId="{F4283E1F-4AC2-4942-99A3-4BD3894117DC}">
+      <dgm:prSet/>
+      <dgm:spPr/>
+      <dgm:t>
+        <a:bodyPr/>
+        <a:lstStyle/>
+        <a:p>
+          <a:endParaRPr lang="en-US"/>
+        </a:p>
+      </dgm:t>
+    </dgm:pt>
+    <dgm:pt modelId="{ED7E0E47-57AA-4F1E-A0C1-5903B58C13E8}" type="pres">
+      <dgm:prSet presAssocID="{D353F09A-583F-46D8-93D3-6AFEE64F8026}" presName="Name0" presStyleCnt="0">
+        <dgm:presLayoutVars>
+          <dgm:dir/>
+          <dgm:animLvl val="lvl"/>
+          <dgm:resizeHandles val="exact"/>
+        </dgm:presLayoutVars>
+      </dgm:prSet>
+      <dgm:spPr/>
+    </dgm:pt>
+    <dgm:pt modelId="{240BE6C7-D181-417E-8E12-9FB94A32676E}" type="pres">
+      <dgm:prSet presAssocID="{565A5826-784E-4F97-AEB8-6FC5EE3AC5EE}" presName="linNode" presStyleCnt="0"/>
+      <dgm:spPr/>
+    </dgm:pt>
+    <dgm:pt modelId="{9EBAB14C-AA6A-4E63-903E-FD54981C1118}" type="pres">
+      <dgm:prSet presAssocID="{565A5826-784E-4F97-AEB8-6FC5EE3AC5EE}" presName="parentText" presStyleLbl="node1" presStyleIdx="0" presStyleCnt="2">
+        <dgm:presLayoutVars>
+          <dgm:chMax val="1"/>
+          <dgm:bulletEnabled val="1"/>
+        </dgm:presLayoutVars>
+      </dgm:prSet>
+      <dgm:spPr/>
+    </dgm:pt>
+    <dgm:pt modelId="{2FC1D35B-5B6A-4D04-AB30-73EB1C45BB7D}" type="pres">
+      <dgm:prSet presAssocID="{565A5826-784E-4F97-AEB8-6FC5EE3AC5EE}" presName="descendantText" presStyleLbl="alignAccFollowNode1" presStyleIdx="0" presStyleCnt="2">
+        <dgm:presLayoutVars>
+          <dgm:bulletEnabled val="1"/>
+        </dgm:presLayoutVars>
+      </dgm:prSet>
+      <dgm:spPr/>
+    </dgm:pt>
+    <dgm:pt modelId="{09E1DB57-D1DD-4987-A094-614E96E0B3BE}" type="pres">
+      <dgm:prSet presAssocID="{EF8D83B6-C10D-4066-90ED-41A038A23315}" presName="sp" presStyleCnt="0"/>
+      <dgm:spPr/>
+    </dgm:pt>
+    <dgm:pt modelId="{0C676153-088B-478B-A44E-FEA8EB6AFFDD}" type="pres">
+      <dgm:prSet presAssocID="{9774BB44-633B-42A1-A99C-B60F3BA9AA1F}" presName="linNode" presStyleCnt="0"/>
+      <dgm:spPr/>
+    </dgm:pt>
+    <dgm:pt modelId="{FEDCDB1F-A1BD-45A0-8921-04823BF64439}" type="pres">
+      <dgm:prSet presAssocID="{9774BB44-633B-42A1-A99C-B60F3BA9AA1F}" presName="parentText" presStyleLbl="node1" presStyleIdx="1" presStyleCnt="2">
+        <dgm:presLayoutVars>
+          <dgm:chMax val="1"/>
+          <dgm:bulletEnabled val="1"/>
+        </dgm:presLayoutVars>
+      </dgm:prSet>
+      <dgm:spPr/>
+    </dgm:pt>
+    <dgm:pt modelId="{741D07AF-A4AD-4AE3-8C30-849217CF8D25}" type="pres">
+      <dgm:prSet presAssocID="{9774BB44-633B-42A1-A99C-B60F3BA9AA1F}" presName="descendantText" presStyleLbl="alignAccFollowNode1" presStyleIdx="1" presStyleCnt="2">
+        <dgm:presLayoutVars>
+          <dgm:bulletEnabled val="1"/>
+        </dgm:presLayoutVars>
+      </dgm:prSet>
+      <dgm:spPr/>
+    </dgm:pt>
+  </dgm:ptLst>
+  <dgm:cxnLst>
+    <dgm:cxn modelId="{0F9A7809-7360-4890-9FBA-588E438144E2}" type="presOf" srcId="{ECAD9A5E-9A5C-426A-96F2-7093E99CC62D}" destId="{2FC1D35B-5B6A-4D04-AB30-73EB1C45BB7D}" srcOrd="0" destOrd="0" presId="urn:microsoft.com/office/officeart/2005/8/layout/vList5"/>
+    <dgm:cxn modelId="{5BA7500A-C7D5-4496-B683-13FF6A8DE1F2}" type="presOf" srcId="{565A5826-784E-4F97-AEB8-6FC5EE3AC5EE}" destId="{9EBAB14C-AA6A-4E63-903E-FD54981C1118}" srcOrd="0" destOrd="0" presId="urn:microsoft.com/office/officeart/2005/8/layout/vList5"/>
+    <dgm:cxn modelId="{F4283E1F-4AC2-4942-99A3-4BD3894117DC}" srcId="{F2E74C07-98DC-462F-9D1D-2CBB3EE82D19}" destId="{713CD92E-F184-4A13-998A-FC2EF24AC4C7}" srcOrd="2" destOrd="0" parTransId="{B2E13B37-4FBD-4940-9736-136F30374816}" sibTransId="{C9F9AD38-8D13-4A0D-B49B-82D73704E0F8}"/>
+    <dgm:cxn modelId="{05AE1D2B-3E70-445D-9620-CF8AC28C42B5}" type="presOf" srcId="{713CD92E-F184-4A13-998A-FC2EF24AC4C7}" destId="{741D07AF-A4AD-4AE3-8C30-849217CF8D25}" srcOrd="0" destOrd="3" presId="urn:microsoft.com/office/officeart/2005/8/layout/vList5"/>
+    <dgm:cxn modelId="{C2E46431-A0D0-4C97-BF66-BF0AB8B3147B}" srcId="{F2E74C07-98DC-462F-9D1D-2CBB3EE82D19}" destId="{DC51C6FC-8B5C-43D5-8605-318C0268442D}" srcOrd="0" destOrd="0" parTransId="{9557B72C-DB6D-43AC-8C8C-3B34026A1352}" sibTransId="{221DD9DE-3FF0-4B61-9243-60148539492D}"/>
+    <dgm:cxn modelId="{8B47523B-A464-41FD-85C8-8EB5FAA16D5E}" type="presOf" srcId="{E826B8BE-9783-4680-9637-48ED3F564E64}" destId="{741D07AF-A4AD-4AE3-8C30-849217CF8D25}" srcOrd="0" destOrd="2" presId="urn:microsoft.com/office/officeart/2005/8/layout/vList5"/>
+    <dgm:cxn modelId="{F3045969-45C4-4CC7-9640-285986B678E1}" type="presOf" srcId="{DC51C6FC-8B5C-43D5-8605-318C0268442D}" destId="{741D07AF-A4AD-4AE3-8C30-849217CF8D25}" srcOrd="0" destOrd="1" presId="urn:microsoft.com/office/officeart/2005/8/layout/vList5"/>
+    <dgm:cxn modelId="{4E253E6C-23A5-4D29-93E0-3DAA3AF5A908}" type="presOf" srcId="{D353F09A-583F-46D8-93D3-6AFEE64F8026}" destId="{ED7E0E47-57AA-4F1E-A0C1-5903B58C13E8}" srcOrd="0" destOrd="0" presId="urn:microsoft.com/office/officeart/2005/8/layout/vList5"/>
+    <dgm:cxn modelId="{2618C850-FF96-4935-909A-646C14022EAE}" type="presOf" srcId="{F2E74C07-98DC-462F-9D1D-2CBB3EE82D19}" destId="{741D07AF-A4AD-4AE3-8C30-849217CF8D25}" srcOrd="0" destOrd="0" presId="urn:microsoft.com/office/officeart/2005/8/layout/vList5"/>
+    <dgm:cxn modelId="{C1222658-4663-4F64-947B-854A1F6748CC}" srcId="{9774BB44-633B-42A1-A99C-B60F3BA9AA1F}" destId="{F2E74C07-98DC-462F-9D1D-2CBB3EE82D19}" srcOrd="0" destOrd="0" parTransId="{72B3D9E1-7A25-4E4C-9394-11AFCEFBFBB3}" sibTransId="{D8726261-A40D-40F1-AE55-5B296A8BE061}"/>
+    <dgm:cxn modelId="{16D262B0-55D7-439A-A025-5580C365FDFE}" srcId="{D353F09A-583F-46D8-93D3-6AFEE64F8026}" destId="{9774BB44-633B-42A1-A99C-B60F3BA9AA1F}" srcOrd="1" destOrd="0" parTransId="{F313E755-D5F9-42C6-A0C6-605B5BA0DAB1}" sibTransId="{8214933C-5C4E-4EAC-A976-2695541BB802}"/>
+    <dgm:cxn modelId="{1782DBC5-F400-43F5-ABD0-A45D51E7F9AB}" type="presOf" srcId="{9774BB44-633B-42A1-A99C-B60F3BA9AA1F}" destId="{FEDCDB1F-A1BD-45A0-8921-04823BF64439}" srcOrd="0" destOrd="0" presId="urn:microsoft.com/office/officeart/2005/8/layout/vList5"/>
+    <dgm:cxn modelId="{88FDE7DF-C25F-48A3-9D8F-1AC4494765F6}" srcId="{F2E74C07-98DC-462F-9D1D-2CBB3EE82D19}" destId="{E826B8BE-9783-4680-9637-48ED3F564E64}" srcOrd="1" destOrd="0" parTransId="{07A09A73-A2AE-4ED8-A5EE-2FECB0DDCB78}" sibTransId="{5D615045-5858-4036-8FE1-1E0E7EC53493}"/>
+    <dgm:cxn modelId="{F5AF10E9-FB4D-43B8-8305-BDD96AF41840}" srcId="{D353F09A-583F-46D8-93D3-6AFEE64F8026}" destId="{565A5826-784E-4F97-AEB8-6FC5EE3AC5EE}" srcOrd="0" destOrd="0" parTransId="{D12C3E2C-ACEB-45BC-AF06-707D4C16565F}" sibTransId="{EF8D83B6-C10D-4066-90ED-41A038A23315}"/>
+    <dgm:cxn modelId="{3FA6FFEC-6031-48F0-B66A-D134EB00D17F}" srcId="{565A5826-784E-4F97-AEB8-6FC5EE3AC5EE}" destId="{ECAD9A5E-9A5C-426A-96F2-7093E99CC62D}" srcOrd="0" destOrd="0" parTransId="{C97819D0-E026-4355-A41A-3D3CDB1CB8EC}" sibTransId="{A084E6D8-A134-4196-BAA9-9E5153479217}"/>
+    <dgm:cxn modelId="{E4DACD4E-397F-4BD4-9ACA-A694F74ADF5C}" type="presParOf" srcId="{ED7E0E47-57AA-4F1E-A0C1-5903B58C13E8}" destId="{240BE6C7-D181-417E-8E12-9FB94A32676E}" srcOrd="0" destOrd="0" presId="urn:microsoft.com/office/officeart/2005/8/layout/vList5"/>
+    <dgm:cxn modelId="{29DD09E3-017E-4268-AF28-7A1B7C5872CA}" type="presParOf" srcId="{240BE6C7-D181-417E-8E12-9FB94A32676E}" destId="{9EBAB14C-AA6A-4E63-903E-FD54981C1118}" srcOrd="0" destOrd="0" presId="urn:microsoft.com/office/officeart/2005/8/layout/vList5"/>
+    <dgm:cxn modelId="{51FB9133-A36C-4532-B568-5C21FC4FDF55}" type="presParOf" srcId="{240BE6C7-D181-417E-8E12-9FB94A32676E}" destId="{2FC1D35B-5B6A-4D04-AB30-73EB1C45BB7D}" srcOrd="1" destOrd="0" presId="urn:microsoft.com/office/officeart/2005/8/layout/vList5"/>
+    <dgm:cxn modelId="{2B98FAB9-73D1-454D-9E5E-CA98D7688A60}" type="presParOf" srcId="{ED7E0E47-57AA-4F1E-A0C1-5903B58C13E8}" destId="{09E1DB57-D1DD-4987-A094-614E96E0B3BE}" srcOrd="1" destOrd="0" presId="urn:microsoft.com/office/officeart/2005/8/layout/vList5"/>
+    <dgm:cxn modelId="{4BB92F29-5DD6-4375-8B5D-0E5909FEF409}" type="presParOf" srcId="{ED7E0E47-57AA-4F1E-A0C1-5903B58C13E8}" destId="{0C676153-088B-478B-A44E-FEA8EB6AFFDD}" srcOrd="2" destOrd="0" presId="urn:microsoft.com/office/officeart/2005/8/layout/vList5"/>
+    <dgm:cxn modelId="{0B88B75D-1F79-4B5E-9A14-363D1C04D48C}" type="presParOf" srcId="{0C676153-088B-478B-A44E-FEA8EB6AFFDD}" destId="{FEDCDB1F-A1BD-45A0-8921-04823BF64439}" srcOrd="0" destOrd="0" presId="urn:microsoft.com/office/officeart/2005/8/layout/vList5"/>
+    <dgm:cxn modelId="{3CC5FEB5-69E2-4972-81BC-9C6191EEB6A8}" type="presParOf" srcId="{0C676153-088B-478B-A44E-FEA8EB6AFFDD}" destId="{741D07AF-A4AD-4AE3-8C30-849217CF8D25}" srcOrd="1" destOrd="0" presId="urn:microsoft.com/office/officeart/2005/8/layout/vList5"/>
+  </dgm:cxnLst>
+  <dgm:bg/>
+  <dgm:whole/>
+  <dgm:extLst>
+    <a:ext uri="http://schemas.microsoft.com/office/drawing/2008/diagram">
+      <dsp:dataModelExt xmlns:dsp="http://schemas.microsoft.com/office/drawing/2008/diagram" relId="rId6" minVer="http://schemas.openxmlformats.org/drawingml/2006/diagram"/>
+    </a:ext>
+  </dgm:extLst>
+</dgm:dataModel>
+</file>
+
+<file path=ppt/diagrams/drawing1.xml><?xml version="1.0" encoding="utf-8"?>
+<dsp:drawing xmlns:dgm="http://schemas.openxmlformats.org/drawingml/2006/diagram" xmlns:dsp="http://schemas.microsoft.com/office/drawing/2008/diagram" xmlns:a="http://schemas.openxmlformats.org/drawingml/2006/main">
+  <dsp:spTree>
+    <dsp:nvGrpSpPr>
+      <dsp:cNvPr id="0" name=""/>
+      <dsp:cNvGrpSpPr/>
+    </dsp:nvGrpSpPr>
+    <dsp:grpSpPr/>
+    <dsp:sp modelId="{2FC1D35B-5B6A-4D04-AB30-73EB1C45BB7D}">
+      <dsp:nvSpPr>
+        <dsp:cNvPr id="0" name=""/>
+        <dsp:cNvSpPr/>
+      </dsp:nvSpPr>
+      <dsp:spPr>
+        <a:xfrm rot="5400000">
+          <a:off x="3986714" y="-1251676"/>
+          <a:ext cx="1602168" cy="4506163"/>
+        </a:xfrm>
+        <a:prstGeom prst="round2SameRect">
+          <a:avLst/>
+        </a:prstGeom>
+        <a:solidFill>
+          <a:schemeClr val="accent1">
+            <a:alpha val="90000"/>
+            <a:tint val="40000"/>
+            <a:hueOff val="0"/>
+            <a:satOff val="0"/>
+            <a:lumOff val="0"/>
+            <a:alphaOff val="0"/>
+          </a:schemeClr>
+        </a:solidFill>
+        <a:ln w="19050" cap="flat" cmpd="sng" algn="ctr">
+          <a:solidFill>
+            <a:schemeClr val="accent1">
+              <a:alpha val="90000"/>
+              <a:tint val="40000"/>
+              <a:hueOff val="0"/>
+              <a:satOff val="0"/>
+              <a:lumOff val="0"/>
+              <a:alphaOff val="0"/>
+            </a:schemeClr>
+          </a:solidFill>
+          <a:prstDash val="solid"/>
+          <a:miter lim="800000"/>
+        </a:ln>
+        <a:effectLst/>
+      </dsp:spPr>
+      <dsp:style>
+        <a:lnRef idx="2">
+          <a:scrgbClr r="0" g="0" b="0"/>
+        </a:lnRef>
+        <a:fillRef idx="1">
+          <a:scrgbClr r="0" g="0" b="0"/>
+        </a:fillRef>
+        <a:effectRef idx="0">
+          <a:scrgbClr r="0" g="0" b="0"/>
+        </a:effectRef>
+        <a:fontRef idx="minor"/>
+      </dsp:style>
+      <dsp:txBody>
+        <a:bodyPr spcFirstLastPara="0" vert="horz" wrap="square" lIns="34290" tIns="17145" rIns="34290" bIns="17145" numCol="1" spcCol="1270" anchor="ctr" anchorCtr="0">
+          <a:noAutofit/>
+        </a:bodyPr>
+        <a:lstStyle/>
+        <a:p>
+          <a:pPr marL="57150" lvl="1" indent="-57150" algn="l" defTabSz="400050">
+            <a:lnSpc>
+              <a:spcPct val="90000"/>
+            </a:lnSpc>
+            <a:spcBef>
+              <a:spcPct val="0"/>
+            </a:spcBef>
+            <a:spcAft>
+              <a:spcPct val="15000"/>
+            </a:spcAft>
+            <a:buChar char="•"/>
+          </a:pPr>
+          <a:r>
+            <a:rPr lang="en-US" sz="900" kern="1200"/>
+            <a:t>Determinar la capacidad de tres arquitecturas de IA para distinguir matices emocionales finos (</a:t>
+          </a:r>
+          <a:r>
+            <a:rPr lang="en-US" sz="900" i="1" kern="1200"/>
+            <a:t>Extremo</a:t>
+          </a:r>
+          <a:r>
+            <a:rPr lang="en-US" sz="900" kern="1200"/>
+            <a:t> vs. </a:t>
+          </a:r>
+          <a:r>
+            <a:rPr lang="en-US" sz="900" i="1" kern="1200"/>
+            <a:t>Regular</a:t>
+          </a:r>
+          <a:r>
+            <a:rPr lang="en-US" sz="900" kern="1200"/>
+            <a:t>) en el comportamiento del consumidor.</a:t>
+          </a:r>
+        </a:p>
+      </dsp:txBody>
+      <dsp:txXfrm rot="-5400000">
+        <a:off x="2534717" y="278532"/>
+        <a:ext cx="4427952" cy="1445746"/>
+      </dsp:txXfrm>
+    </dsp:sp>
+    <dsp:sp modelId="{9EBAB14C-AA6A-4E63-903E-FD54981C1118}">
+      <dsp:nvSpPr>
+        <dsp:cNvPr id="0" name=""/>
+        <dsp:cNvSpPr/>
+      </dsp:nvSpPr>
+      <dsp:spPr>
+        <a:xfrm>
+          <a:off x="0" y="50"/>
+          <a:ext cx="2534716" cy="2002710"/>
+        </a:xfrm>
+        <a:prstGeom prst="roundRect">
+          <a:avLst/>
+        </a:prstGeom>
+        <a:solidFill>
+          <a:schemeClr val="accent1">
+            <a:hueOff val="0"/>
+            <a:satOff val="0"/>
+            <a:lumOff val="0"/>
+            <a:alphaOff val="0"/>
+          </a:schemeClr>
+        </a:solidFill>
+        <a:ln w="19050" cap="flat" cmpd="sng" algn="ctr">
+          <a:solidFill>
+            <a:schemeClr val="lt1">
+              <a:hueOff val="0"/>
+              <a:satOff val="0"/>
+              <a:lumOff val="0"/>
+              <a:alphaOff val="0"/>
+            </a:schemeClr>
+          </a:solidFill>
+          <a:prstDash val="solid"/>
+          <a:miter lim="800000"/>
+        </a:ln>
+        <a:effectLst/>
+      </dsp:spPr>
+      <dsp:style>
+        <a:lnRef idx="2">
+          <a:scrgbClr r="0" g="0" b="0"/>
+        </a:lnRef>
+        <a:fillRef idx="1">
+          <a:scrgbClr r="0" g="0" b="0"/>
+        </a:fillRef>
+        <a:effectRef idx="0">
+          <a:scrgbClr r="0" g="0" b="0"/>
+        </a:effectRef>
+        <a:fontRef idx="minor">
+          <a:schemeClr val="lt1"/>
+        </a:fontRef>
+      </dsp:style>
+      <dsp:txBody>
+        <a:bodyPr spcFirstLastPara="0" vert="horz" wrap="square" lIns="95250" tIns="47625" rIns="95250" bIns="47625" numCol="1" spcCol="1270" anchor="ctr" anchorCtr="0">
+          <a:noAutofit/>
+        </a:bodyPr>
+        <a:lstStyle/>
+        <a:p>
+          <a:pPr marL="0" lvl="0" indent="0" algn="ctr" defTabSz="1111250">
+            <a:lnSpc>
+              <a:spcPct val="90000"/>
+            </a:lnSpc>
+            <a:spcBef>
+              <a:spcPct val="0"/>
+            </a:spcBef>
+            <a:spcAft>
+              <a:spcPct val="35000"/>
+            </a:spcAft>
+            <a:buNone/>
+          </a:pPr>
+          <a:r>
+            <a:rPr lang="en-US" sz="2500" b="1" kern="1200"/>
+            <a:t>Objetivo Técnico</a:t>
+          </a:r>
+          <a:endParaRPr lang="en-US" sz="2500" kern="1200"/>
+        </a:p>
+      </dsp:txBody>
+      <dsp:txXfrm>
+        <a:off x="97764" y="97814"/>
+        <a:ext cx="2339188" cy="1807182"/>
+      </dsp:txXfrm>
+    </dsp:sp>
+    <dsp:sp modelId="{741D07AF-A4AD-4AE3-8C30-849217CF8D25}">
+      <dsp:nvSpPr>
+        <dsp:cNvPr id="0" name=""/>
+        <dsp:cNvSpPr/>
+      </dsp:nvSpPr>
+      <dsp:spPr>
+        <a:xfrm rot="5400000">
+          <a:off x="3986714" y="851169"/>
+          <a:ext cx="1602168" cy="4506163"/>
+        </a:xfrm>
+        <a:prstGeom prst="round2SameRect">
+          <a:avLst/>
+        </a:prstGeom>
+        <a:solidFill>
+          <a:schemeClr val="accent1">
+            <a:alpha val="90000"/>
+            <a:tint val="40000"/>
+            <a:hueOff val="0"/>
+            <a:satOff val="0"/>
+            <a:lumOff val="0"/>
+            <a:alphaOff val="0"/>
+          </a:schemeClr>
+        </a:solidFill>
+        <a:ln w="19050" cap="flat" cmpd="sng" algn="ctr">
+          <a:solidFill>
+            <a:schemeClr val="accent1">
+              <a:alpha val="90000"/>
+              <a:tint val="40000"/>
+              <a:hueOff val="0"/>
+              <a:satOff val="0"/>
+              <a:lumOff val="0"/>
+              <a:alphaOff val="0"/>
+            </a:schemeClr>
+          </a:solidFill>
+          <a:prstDash val="solid"/>
+          <a:miter lim="800000"/>
+        </a:ln>
+        <a:effectLst/>
+      </dsp:spPr>
+      <dsp:style>
+        <a:lnRef idx="2">
+          <a:scrgbClr r="0" g="0" b="0"/>
+        </a:lnRef>
+        <a:fillRef idx="1">
+          <a:scrgbClr r="0" g="0" b="0"/>
+        </a:fillRef>
+        <a:effectRef idx="0">
+          <a:scrgbClr r="0" g="0" b="0"/>
+        </a:effectRef>
+        <a:fontRef idx="minor"/>
+      </dsp:style>
+      <dsp:txBody>
+        <a:bodyPr spcFirstLastPara="0" vert="horz" wrap="square" lIns="34290" tIns="17145" rIns="34290" bIns="17145" numCol="1" spcCol="1270" anchor="ctr" anchorCtr="0">
+          <a:noAutofit/>
+        </a:bodyPr>
+        <a:lstStyle/>
+        <a:p>
+          <a:pPr marL="57150" lvl="1" indent="-57150" algn="l" defTabSz="400050">
+            <a:lnSpc>
+              <a:spcPct val="90000"/>
+            </a:lnSpc>
+            <a:spcBef>
+              <a:spcPct val="0"/>
+            </a:spcBef>
+            <a:spcAft>
+              <a:spcPct val="15000"/>
+            </a:spcAft>
+            <a:buChar char="•"/>
+          </a:pPr>
+          <a:r>
+            <a:rPr lang="en-US" sz="900" kern="1200"/>
+            <a:t>Se comparó el desempeño de modelos estadísticos, lineales y de aprendizaje profundo:</a:t>
+          </a:r>
+        </a:p>
+        <a:p>
+          <a:pPr marL="114300" lvl="2" indent="-57150" algn="l" defTabSz="400050">
+            <a:lnSpc>
+              <a:spcPct val="90000"/>
+            </a:lnSpc>
+            <a:spcBef>
+              <a:spcPct val="0"/>
+            </a:spcBef>
+            <a:spcAft>
+              <a:spcPct val="15000"/>
+            </a:spcAft>
+            <a:buChar char="•"/>
+          </a:pPr>
+          <a:r>
+            <a:rPr lang="en-US" sz="900" b="1" kern="1200"/>
+            <a:t>Naïve Bayes (Accuracy 43%):</a:t>
+          </a:r>
+          <a:r>
+            <a:rPr lang="en-US" sz="900" kern="1200"/>
+            <a:t> Funcionó como línea base. Mostró una tendencia conservadora, fallando significativamente en detectar los "Extremos", lo cual es crítico para identificar crisis reales.</a:t>
+          </a:r>
+        </a:p>
+        <a:p>
+          <a:pPr marL="114300" lvl="2" indent="-57150" algn="l" defTabSz="400050">
+            <a:lnSpc>
+              <a:spcPct val="90000"/>
+            </a:lnSpc>
+            <a:spcBef>
+              <a:spcPct val="0"/>
+            </a:spcBef>
+            <a:spcAft>
+              <a:spcPct val="15000"/>
+            </a:spcAft>
+            <a:buChar char="•"/>
+          </a:pPr>
+          <a:r>
+            <a:rPr lang="en-US" sz="900" b="1" kern="1200" dirty="0"/>
+            <a:t>Deep Learning (Accuracy 53%):</a:t>
+          </a:r>
+          <a:r>
+            <a:rPr lang="en-US" sz="900" kern="1200" dirty="0"/>
+            <a:t> La Red Neuronal </a:t>
+          </a:r>
+          <a:r>
+            <a:rPr lang="en-US" sz="900" kern="1200" dirty="0" err="1"/>
+            <a:t>demostró</a:t>
+          </a:r>
+          <a:r>
+            <a:rPr lang="en-US" sz="900" kern="1200" dirty="0"/>
+            <a:t> </a:t>
+          </a:r>
+          <a:r>
+            <a:rPr lang="en-US" sz="900" kern="1200" dirty="0" err="1"/>
+            <a:t>una</a:t>
+          </a:r>
+          <a:r>
+            <a:rPr lang="en-US" sz="900" kern="1200" dirty="0"/>
+            <a:t> </a:t>
+          </a:r>
+          <a:r>
+            <a:rPr lang="en-US" sz="900" kern="1200" dirty="0" err="1"/>
+            <a:t>capacidad</a:t>
+          </a:r>
+          <a:r>
+            <a:rPr lang="en-US" sz="900" kern="1200" dirty="0"/>
+            <a:t> superior para </a:t>
+          </a:r>
+          <a:r>
+            <a:rPr lang="en-US" sz="900" kern="1200" dirty="0" err="1"/>
+            <a:t>captar</a:t>
+          </a:r>
+          <a:r>
+            <a:rPr lang="en-US" sz="900" kern="1200" dirty="0"/>
+            <a:t> </a:t>
+          </a:r>
+          <a:r>
+            <a:rPr lang="en-US" sz="900" kern="1200" dirty="0" err="1"/>
+            <a:t>patrones</a:t>
+          </a:r>
+          <a:r>
+            <a:rPr lang="en-US" sz="900" kern="1200" dirty="0"/>
+            <a:t> </a:t>
+          </a:r>
+          <a:r>
+            <a:rPr lang="en-US" sz="900" kern="1200" dirty="0" err="1"/>
+            <a:t>complejos</a:t>
+          </a:r>
+          <a:r>
+            <a:rPr lang="en-US" sz="900" kern="1200" dirty="0"/>
+            <a:t>, </a:t>
+          </a:r>
+          <a:r>
+            <a:rPr lang="en-US" sz="900" kern="1200" dirty="0" err="1"/>
+            <a:t>superando</a:t>
+          </a:r>
+          <a:r>
+            <a:rPr lang="en-US" sz="900" kern="1200" dirty="0"/>
+            <a:t> al </a:t>
+          </a:r>
+          <a:r>
+            <a:rPr lang="en-US" sz="900" kern="1200" dirty="0" err="1"/>
+            <a:t>modelo</a:t>
+          </a:r>
+          <a:r>
+            <a:rPr lang="en-US" sz="900" kern="1200" dirty="0"/>
+            <a:t> base </a:t>
+          </a:r>
+          <a:r>
+            <a:rPr lang="en-US" sz="900" kern="1200" dirty="0" err="1"/>
+            <a:t>por</a:t>
+          </a:r>
+          <a:r>
+            <a:rPr lang="en-US" sz="900" kern="1200" dirty="0"/>
+            <a:t> un 10%, </a:t>
+          </a:r>
+          <a:r>
+            <a:rPr lang="en-US" sz="900" kern="1200" dirty="0" err="1"/>
+            <a:t>aunque</a:t>
+          </a:r>
+          <a:r>
+            <a:rPr lang="en-US" sz="900" kern="1200" dirty="0"/>
+            <a:t> con un </a:t>
+          </a:r>
+          <a:r>
+            <a:rPr lang="en-US" sz="900" kern="1200" dirty="0" err="1"/>
+            <a:t>costo</a:t>
+          </a:r>
+          <a:r>
+            <a:rPr lang="en-US" sz="900" kern="1200" dirty="0"/>
+            <a:t> </a:t>
+          </a:r>
+          <a:r>
+            <a:rPr lang="en-US" sz="900" kern="1200" dirty="0" err="1"/>
+            <a:t>computacional</a:t>
+          </a:r>
+          <a:r>
+            <a:rPr lang="en-US" sz="900" kern="1200" dirty="0"/>
+            <a:t> mayor.</a:t>
+          </a:r>
+        </a:p>
+        <a:p>
+          <a:pPr marL="114300" lvl="2" indent="-57150" algn="l" defTabSz="400050">
+            <a:lnSpc>
+              <a:spcPct val="90000"/>
+            </a:lnSpc>
+            <a:spcBef>
+              <a:spcPct val="0"/>
+            </a:spcBef>
+            <a:spcAft>
+              <a:spcPct val="15000"/>
+            </a:spcAft>
+            <a:buChar char="•"/>
+          </a:pPr>
+          <a:r>
+            <a:rPr lang="en-US" sz="900" b="1" kern="1200"/>
+            <a:t>SVM - LinearSVC (Accuracy 55%):</a:t>
+          </a:r>
+          <a:r>
+            <a:rPr lang="en-US" sz="900" kern="1200"/>
+            <a:t> Resultó ser el modelo más robusto para esta granularidad, logrando el mejor equilibrio entre precisión y tiempo de respuesta.</a:t>
+          </a:r>
+        </a:p>
+      </dsp:txBody>
+      <dsp:txXfrm rot="-5400000">
+        <a:off x="2534717" y="2381378"/>
+        <a:ext cx="4427952" cy="1445746"/>
+      </dsp:txXfrm>
+    </dsp:sp>
+    <dsp:sp modelId="{FEDCDB1F-A1BD-45A0-8921-04823BF64439}">
+      <dsp:nvSpPr>
+        <dsp:cNvPr id="0" name=""/>
+        <dsp:cNvSpPr/>
+      </dsp:nvSpPr>
+      <dsp:spPr>
+        <a:xfrm>
+          <a:off x="0" y="2102895"/>
+          <a:ext cx="2534716" cy="2002710"/>
+        </a:xfrm>
+        <a:prstGeom prst="roundRect">
+          <a:avLst/>
+        </a:prstGeom>
+        <a:solidFill>
+          <a:schemeClr val="accent1">
+            <a:hueOff val="0"/>
+            <a:satOff val="0"/>
+            <a:lumOff val="0"/>
+            <a:alphaOff val="0"/>
+          </a:schemeClr>
+        </a:solidFill>
+        <a:ln w="19050" cap="flat" cmpd="sng" algn="ctr">
+          <a:solidFill>
+            <a:schemeClr val="lt1">
+              <a:hueOff val="0"/>
+              <a:satOff val="0"/>
+              <a:lumOff val="0"/>
+              <a:alphaOff val="0"/>
+            </a:schemeClr>
+          </a:solidFill>
+          <a:prstDash val="solid"/>
+          <a:miter lim="800000"/>
+        </a:ln>
+        <a:effectLst/>
+      </dsp:spPr>
+      <dsp:style>
+        <a:lnRef idx="2">
+          <a:scrgbClr r="0" g="0" b="0"/>
+        </a:lnRef>
+        <a:fillRef idx="1">
+          <a:scrgbClr r="0" g="0" b="0"/>
+        </a:fillRef>
+        <a:effectRef idx="0">
+          <a:scrgbClr r="0" g="0" b="0"/>
+        </a:effectRef>
+        <a:fontRef idx="minor">
+          <a:schemeClr val="lt1"/>
+        </a:fontRef>
+      </dsp:style>
+      <dsp:txBody>
+        <a:bodyPr spcFirstLastPara="0" vert="horz" wrap="square" lIns="95250" tIns="47625" rIns="95250" bIns="47625" numCol="1" spcCol="1270" anchor="ctr" anchorCtr="0">
+          <a:noAutofit/>
+        </a:bodyPr>
+        <a:lstStyle/>
+        <a:p>
+          <a:pPr marL="0" lvl="0" indent="0" algn="ctr" defTabSz="1111250">
+            <a:lnSpc>
+              <a:spcPct val="90000"/>
+            </a:lnSpc>
+            <a:spcBef>
+              <a:spcPct val="0"/>
+            </a:spcBef>
+            <a:spcAft>
+              <a:spcPct val="35000"/>
+            </a:spcAft>
+            <a:buNone/>
+          </a:pPr>
+          <a:r>
+            <a:rPr lang="en-US" sz="2500" b="1" kern="1200"/>
+            <a:t>Resultados del Benchmarking</a:t>
+          </a:r>
+          <a:endParaRPr lang="en-US" sz="2500" kern="1200"/>
+        </a:p>
+      </dsp:txBody>
+      <dsp:txXfrm>
+        <a:off x="97764" y="2200659"/>
+        <a:ext cx="2339188" cy="1807182"/>
+      </dsp:txXfrm>
+    </dsp:sp>
+  </dsp:spTree>
+</dsp:drawing>
+</file>
+
+<file path=ppt/diagrams/drawing2.xml><?xml version="1.0" encoding="utf-8"?>
+<dsp:drawing xmlns:dgm="http://schemas.openxmlformats.org/drawingml/2006/diagram" xmlns:dsp="http://schemas.microsoft.com/office/drawing/2008/diagram" xmlns:a="http://schemas.openxmlformats.org/drawingml/2006/main">
+  <dsp:spTree>
+    <dsp:nvGrpSpPr>
+      <dsp:cNvPr id="0" name=""/>
+      <dsp:cNvGrpSpPr/>
+    </dsp:nvGrpSpPr>
+    <dsp:grpSpPr/>
+    <dsp:sp modelId="{2FC1D35B-5B6A-4D04-AB30-73EB1C45BB7D}">
+      <dsp:nvSpPr>
+        <dsp:cNvPr id="0" name=""/>
+        <dsp:cNvSpPr/>
+      </dsp:nvSpPr>
+      <dsp:spPr>
+        <a:xfrm rot="5400000">
+          <a:off x="3986714" y="-1251676"/>
+          <a:ext cx="1602168" cy="4506163"/>
+        </a:xfrm>
+        <a:prstGeom prst="round2SameRect">
+          <a:avLst/>
+        </a:prstGeom>
+        <a:solidFill>
+          <a:schemeClr val="accent1">
+            <a:alpha val="90000"/>
+            <a:tint val="40000"/>
+            <a:hueOff val="0"/>
+            <a:satOff val="0"/>
+            <a:lumOff val="0"/>
+            <a:alphaOff val="0"/>
+          </a:schemeClr>
+        </a:solidFill>
+        <a:ln w="19050" cap="flat" cmpd="sng" algn="ctr">
+          <a:solidFill>
+            <a:schemeClr val="accent1">
+              <a:alpha val="90000"/>
+              <a:tint val="40000"/>
+              <a:hueOff val="0"/>
+              <a:satOff val="0"/>
+              <a:lumOff val="0"/>
+              <a:alphaOff val="0"/>
+            </a:schemeClr>
+          </a:solidFill>
+          <a:prstDash val="solid"/>
+          <a:miter lim="800000"/>
+        </a:ln>
+        <a:effectLst/>
+      </dsp:spPr>
+      <dsp:style>
+        <a:lnRef idx="2">
+          <a:scrgbClr r="0" g="0" b="0"/>
+        </a:lnRef>
+        <a:fillRef idx="1">
+          <a:scrgbClr r="0" g="0" b="0"/>
+        </a:fillRef>
+        <a:effectRef idx="0">
+          <a:scrgbClr r="0" g="0" b="0"/>
+        </a:effectRef>
+        <a:fontRef idx="minor"/>
+      </dsp:style>
+      <dsp:txBody>
+        <a:bodyPr spcFirstLastPara="0" vert="horz" wrap="square" lIns="34290" tIns="17145" rIns="34290" bIns="17145" numCol="1" spcCol="1270" anchor="ctr" anchorCtr="0">
+          <a:noAutofit/>
+        </a:bodyPr>
+        <a:lstStyle/>
+        <a:p>
+          <a:pPr marL="57150" lvl="1" indent="-57150" algn="l" defTabSz="400050">
+            <a:lnSpc>
+              <a:spcPct val="90000"/>
+            </a:lnSpc>
+            <a:spcBef>
+              <a:spcPct val="0"/>
+            </a:spcBef>
+            <a:spcAft>
+              <a:spcPct val="15000"/>
+            </a:spcAft>
+            <a:buChar char="•"/>
+          </a:pPr>
+          <a:r>
+            <a:rPr lang="en-US" sz="900" kern="1200"/>
+            <a:t>Determinar la capacidad de tres arquitecturas de IA para distinguir matices emocionales finos (</a:t>
+          </a:r>
+          <a:r>
+            <a:rPr lang="en-US" sz="900" i="1" kern="1200"/>
+            <a:t>Extremo</a:t>
+          </a:r>
+          <a:r>
+            <a:rPr lang="en-US" sz="900" kern="1200"/>
+            <a:t> vs. </a:t>
+          </a:r>
+          <a:r>
+            <a:rPr lang="en-US" sz="900" i="1" kern="1200"/>
+            <a:t>Regular</a:t>
+          </a:r>
+          <a:r>
+            <a:rPr lang="en-US" sz="900" kern="1200"/>
+            <a:t>) en el comportamiento del consumidor.</a:t>
+          </a:r>
+        </a:p>
+      </dsp:txBody>
+      <dsp:txXfrm rot="-5400000">
+        <a:off x="2534717" y="278532"/>
+        <a:ext cx="4427952" cy="1445746"/>
+      </dsp:txXfrm>
+    </dsp:sp>
+    <dsp:sp modelId="{9EBAB14C-AA6A-4E63-903E-FD54981C1118}">
+      <dsp:nvSpPr>
+        <dsp:cNvPr id="0" name=""/>
+        <dsp:cNvSpPr/>
+      </dsp:nvSpPr>
+      <dsp:spPr>
+        <a:xfrm>
+          <a:off x="0" y="50"/>
+          <a:ext cx="2534716" cy="2002710"/>
+        </a:xfrm>
+        <a:prstGeom prst="roundRect">
+          <a:avLst/>
+        </a:prstGeom>
+        <a:solidFill>
+          <a:schemeClr val="accent1">
+            <a:hueOff val="0"/>
+            <a:satOff val="0"/>
+            <a:lumOff val="0"/>
+            <a:alphaOff val="0"/>
+          </a:schemeClr>
+        </a:solidFill>
+        <a:ln w="19050" cap="flat" cmpd="sng" algn="ctr">
+          <a:solidFill>
+            <a:schemeClr val="lt1">
+              <a:hueOff val="0"/>
+              <a:satOff val="0"/>
+              <a:lumOff val="0"/>
+              <a:alphaOff val="0"/>
+            </a:schemeClr>
+          </a:solidFill>
+          <a:prstDash val="solid"/>
+          <a:miter lim="800000"/>
+        </a:ln>
+        <a:effectLst/>
+      </dsp:spPr>
+      <dsp:style>
+        <a:lnRef idx="2">
+          <a:scrgbClr r="0" g="0" b="0"/>
+        </a:lnRef>
+        <a:fillRef idx="1">
+          <a:scrgbClr r="0" g="0" b="0"/>
+        </a:fillRef>
+        <a:effectRef idx="0">
+          <a:scrgbClr r="0" g="0" b="0"/>
+        </a:effectRef>
+        <a:fontRef idx="minor">
+          <a:schemeClr val="lt1"/>
+        </a:fontRef>
+      </dsp:style>
+      <dsp:txBody>
+        <a:bodyPr spcFirstLastPara="0" vert="horz" wrap="square" lIns="95250" tIns="47625" rIns="95250" bIns="47625" numCol="1" spcCol="1270" anchor="ctr" anchorCtr="0">
+          <a:noAutofit/>
+        </a:bodyPr>
+        <a:lstStyle/>
+        <a:p>
+          <a:pPr marL="0" lvl="0" indent="0" algn="ctr" defTabSz="1111250">
+            <a:lnSpc>
+              <a:spcPct val="90000"/>
+            </a:lnSpc>
+            <a:spcBef>
+              <a:spcPct val="0"/>
+            </a:spcBef>
+            <a:spcAft>
+              <a:spcPct val="35000"/>
+            </a:spcAft>
+            <a:buNone/>
+          </a:pPr>
+          <a:r>
+            <a:rPr lang="en-US" sz="2500" b="1" kern="1200"/>
+            <a:t>Objetivo Técnico</a:t>
+          </a:r>
+          <a:endParaRPr lang="en-US" sz="2500" kern="1200"/>
+        </a:p>
+      </dsp:txBody>
+      <dsp:txXfrm>
+        <a:off x="97764" y="97814"/>
+        <a:ext cx="2339188" cy="1807182"/>
+      </dsp:txXfrm>
+    </dsp:sp>
+    <dsp:sp modelId="{741D07AF-A4AD-4AE3-8C30-849217CF8D25}">
+      <dsp:nvSpPr>
+        <dsp:cNvPr id="0" name=""/>
+        <dsp:cNvSpPr/>
+      </dsp:nvSpPr>
+      <dsp:spPr>
+        <a:xfrm rot="5400000">
+          <a:off x="3986714" y="851169"/>
+          <a:ext cx="1602168" cy="4506163"/>
+        </a:xfrm>
+        <a:prstGeom prst="round2SameRect">
+          <a:avLst/>
+        </a:prstGeom>
+        <a:solidFill>
+          <a:schemeClr val="accent1">
+            <a:alpha val="90000"/>
+            <a:tint val="40000"/>
+            <a:hueOff val="0"/>
+            <a:satOff val="0"/>
+            <a:lumOff val="0"/>
+            <a:alphaOff val="0"/>
+          </a:schemeClr>
+        </a:solidFill>
+        <a:ln w="19050" cap="flat" cmpd="sng" algn="ctr">
+          <a:solidFill>
+            <a:schemeClr val="accent1">
+              <a:alpha val="90000"/>
+              <a:tint val="40000"/>
+              <a:hueOff val="0"/>
+              <a:satOff val="0"/>
+              <a:lumOff val="0"/>
+              <a:alphaOff val="0"/>
+            </a:schemeClr>
+          </a:solidFill>
+          <a:prstDash val="solid"/>
+          <a:miter lim="800000"/>
+        </a:ln>
+        <a:effectLst/>
+      </dsp:spPr>
+      <dsp:style>
+        <a:lnRef idx="2">
+          <a:scrgbClr r="0" g="0" b="0"/>
+        </a:lnRef>
+        <a:fillRef idx="1">
+          <a:scrgbClr r="0" g="0" b="0"/>
+        </a:fillRef>
+        <a:effectRef idx="0">
+          <a:scrgbClr r="0" g="0" b="0"/>
+        </a:effectRef>
+        <a:fontRef idx="minor"/>
+      </dsp:style>
+      <dsp:txBody>
+        <a:bodyPr spcFirstLastPara="0" vert="horz" wrap="square" lIns="34290" tIns="17145" rIns="34290" bIns="17145" numCol="1" spcCol="1270" anchor="ctr" anchorCtr="0">
+          <a:noAutofit/>
+        </a:bodyPr>
+        <a:lstStyle/>
+        <a:p>
+          <a:pPr marL="57150" lvl="1" indent="-57150" algn="l" defTabSz="400050">
+            <a:lnSpc>
+              <a:spcPct val="90000"/>
+            </a:lnSpc>
+            <a:spcBef>
+              <a:spcPct val="0"/>
+            </a:spcBef>
+            <a:spcAft>
+              <a:spcPct val="15000"/>
+            </a:spcAft>
+            <a:buChar char="•"/>
+          </a:pPr>
+          <a:r>
+            <a:rPr lang="en-US" sz="900" kern="1200"/>
+            <a:t>Se comparó el desempeño de modelos estadísticos, lineales y de aprendizaje profundo:</a:t>
+          </a:r>
+        </a:p>
+        <a:p>
+          <a:pPr marL="114300" lvl="2" indent="-57150" algn="l" defTabSz="400050">
+            <a:lnSpc>
+              <a:spcPct val="90000"/>
+            </a:lnSpc>
+            <a:spcBef>
+              <a:spcPct val="0"/>
+            </a:spcBef>
+            <a:spcAft>
+              <a:spcPct val="15000"/>
+            </a:spcAft>
+            <a:buChar char="•"/>
+          </a:pPr>
+          <a:r>
+            <a:rPr lang="en-US" sz="900" b="1" kern="1200"/>
+            <a:t>Naïve Bayes (Accuracy 43%):</a:t>
+          </a:r>
+          <a:r>
+            <a:rPr lang="en-US" sz="900" kern="1200"/>
+            <a:t> Funcionó como línea base. Mostró una tendencia conservadora, fallando significativamente en detectar los "Extremos", lo cual es crítico para identificar crisis reales.</a:t>
+          </a:r>
+        </a:p>
+        <a:p>
+          <a:pPr marL="114300" lvl="2" indent="-57150" algn="l" defTabSz="400050">
+            <a:lnSpc>
+              <a:spcPct val="90000"/>
+            </a:lnSpc>
+            <a:spcBef>
+              <a:spcPct val="0"/>
+            </a:spcBef>
+            <a:spcAft>
+              <a:spcPct val="15000"/>
+            </a:spcAft>
+            <a:buChar char="•"/>
+          </a:pPr>
+          <a:r>
+            <a:rPr lang="en-US" sz="900" b="1" kern="1200" dirty="0"/>
+            <a:t>Deep Learning (Accuracy 53%):</a:t>
+          </a:r>
+          <a:r>
+            <a:rPr lang="en-US" sz="900" kern="1200" dirty="0"/>
+            <a:t> La Red Neuronal </a:t>
+          </a:r>
+          <a:r>
+            <a:rPr lang="en-US" sz="900" kern="1200" dirty="0" err="1"/>
+            <a:t>demostró</a:t>
+          </a:r>
+          <a:r>
+            <a:rPr lang="en-US" sz="900" kern="1200" dirty="0"/>
+            <a:t> </a:t>
+          </a:r>
+          <a:r>
+            <a:rPr lang="en-US" sz="900" kern="1200" dirty="0" err="1"/>
+            <a:t>una</a:t>
+          </a:r>
+          <a:r>
+            <a:rPr lang="en-US" sz="900" kern="1200" dirty="0"/>
+            <a:t> </a:t>
+          </a:r>
+          <a:r>
+            <a:rPr lang="en-US" sz="900" kern="1200" dirty="0" err="1"/>
+            <a:t>capacidad</a:t>
+          </a:r>
+          <a:r>
+            <a:rPr lang="en-US" sz="900" kern="1200" dirty="0"/>
+            <a:t> superior para </a:t>
+          </a:r>
+          <a:r>
+            <a:rPr lang="en-US" sz="900" kern="1200" dirty="0" err="1"/>
+            <a:t>captar</a:t>
+          </a:r>
+          <a:r>
+            <a:rPr lang="en-US" sz="900" kern="1200" dirty="0"/>
+            <a:t> </a:t>
+          </a:r>
+          <a:r>
+            <a:rPr lang="en-US" sz="900" kern="1200" dirty="0" err="1"/>
+            <a:t>patrones</a:t>
+          </a:r>
+          <a:r>
+            <a:rPr lang="en-US" sz="900" kern="1200" dirty="0"/>
+            <a:t> </a:t>
+          </a:r>
+          <a:r>
+            <a:rPr lang="en-US" sz="900" kern="1200" dirty="0" err="1"/>
+            <a:t>complejos</a:t>
+          </a:r>
+          <a:r>
+            <a:rPr lang="en-US" sz="900" kern="1200" dirty="0"/>
+            <a:t>, </a:t>
+          </a:r>
+          <a:r>
+            <a:rPr lang="en-US" sz="900" kern="1200" dirty="0" err="1"/>
+            <a:t>superando</a:t>
+          </a:r>
+          <a:r>
+            <a:rPr lang="en-US" sz="900" kern="1200" dirty="0"/>
+            <a:t> al </a:t>
+          </a:r>
+          <a:r>
+            <a:rPr lang="en-US" sz="900" kern="1200" dirty="0" err="1"/>
+            <a:t>modelo</a:t>
+          </a:r>
+          <a:r>
+            <a:rPr lang="en-US" sz="900" kern="1200" dirty="0"/>
+            <a:t> base </a:t>
+          </a:r>
+          <a:r>
+            <a:rPr lang="en-US" sz="900" kern="1200" dirty="0" err="1"/>
+            <a:t>por</a:t>
+          </a:r>
+          <a:r>
+            <a:rPr lang="en-US" sz="900" kern="1200" dirty="0"/>
+            <a:t> un 10%, </a:t>
+          </a:r>
+          <a:r>
+            <a:rPr lang="en-US" sz="900" kern="1200" dirty="0" err="1"/>
+            <a:t>aunque</a:t>
+          </a:r>
+          <a:r>
+            <a:rPr lang="en-US" sz="900" kern="1200" dirty="0"/>
+            <a:t> con un </a:t>
+          </a:r>
+          <a:r>
+            <a:rPr lang="en-US" sz="900" kern="1200" dirty="0" err="1"/>
+            <a:t>costo</a:t>
+          </a:r>
+          <a:r>
+            <a:rPr lang="en-US" sz="900" kern="1200" dirty="0"/>
+            <a:t> </a:t>
+          </a:r>
+          <a:r>
+            <a:rPr lang="en-US" sz="900" kern="1200" dirty="0" err="1"/>
+            <a:t>computacional</a:t>
+          </a:r>
+          <a:r>
+            <a:rPr lang="en-US" sz="900" kern="1200" dirty="0"/>
+            <a:t> mayor.</a:t>
+          </a:r>
+        </a:p>
+        <a:p>
+          <a:pPr marL="114300" lvl="2" indent="-57150" algn="l" defTabSz="400050">
+            <a:lnSpc>
+              <a:spcPct val="90000"/>
+            </a:lnSpc>
+            <a:spcBef>
+              <a:spcPct val="0"/>
+            </a:spcBef>
+            <a:spcAft>
+              <a:spcPct val="15000"/>
+            </a:spcAft>
+            <a:buChar char="•"/>
+          </a:pPr>
+          <a:r>
+            <a:rPr lang="en-US" sz="900" b="1" kern="1200"/>
+            <a:t>SVM - LinearSVC (Accuracy 55%):</a:t>
+          </a:r>
+          <a:r>
+            <a:rPr lang="en-US" sz="900" kern="1200"/>
+            <a:t> Resultó ser el modelo más robusto para esta granularidad, logrando el mejor equilibrio entre precisión y tiempo de respuesta.</a:t>
+          </a:r>
+        </a:p>
+      </dsp:txBody>
+      <dsp:txXfrm rot="-5400000">
+        <a:off x="2534717" y="2381378"/>
+        <a:ext cx="4427952" cy="1445746"/>
+      </dsp:txXfrm>
+    </dsp:sp>
+    <dsp:sp modelId="{FEDCDB1F-A1BD-45A0-8921-04823BF64439}">
+      <dsp:nvSpPr>
+        <dsp:cNvPr id="0" name=""/>
+        <dsp:cNvSpPr/>
+      </dsp:nvSpPr>
+      <dsp:spPr>
+        <a:xfrm>
+          <a:off x="0" y="2102895"/>
+          <a:ext cx="2534716" cy="2002710"/>
+        </a:xfrm>
+        <a:prstGeom prst="roundRect">
+          <a:avLst/>
+        </a:prstGeom>
+        <a:solidFill>
+          <a:schemeClr val="accent1">
+            <a:hueOff val="0"/>
+            <a:satOff val="0"/>
+            <a:lumOff val="0"/>
+            <a:alphaOff val="0"/>
+          </a:schemeClr>
+        </a:solidFill>
+        <a:ln w="19050" cap="flat" cmpd="sng" algn="ctr">
+          <a:solidFill>
+            <a:schemeClr val="lt1">
+              <a:hueOff val="0"/>
+              <a:satOff val="0"/>
+              <a:lumOff val="0"/>
+              <a:alphaOff val="0"/>
+            </a:schemeClr>
+          </a:solidFill>
+          <a:prstDash val="solid"/>
+          <a:miter lim="800000"/>
+        </a:ln>
+        <a:effectLst/>
+      </dsp:spPr>
+      <dsp:style>
+        <a:lnRef idx="2">
+          <a:scrgbClr r="0" g="0" b="0"/>
+        </a:lnRef>
+        <a:fillRef idx="1">
+          <a:scrgbClr r="0" g="0" b="0"/>
+        </a:fillRef>
+        <a:effectRef idx="0">
+          <a:scrgbClr r="0" g="0" b="0"/>
+        </a:effectRef>
+        <a:fontRef idx="minor">
+          <a:schemeClr val="lt1"/>
+        </a:fontRef>
+      </dsp:style>
+      <dsp:txBody>
+        <a:bodyPr spcFirstLastPara="0" vert="horz" wrap="square" lIns="95250" tIns="47625" rIns="95250" bIns="47625" numCol="1" spcCol="1270" anchor="ctr" anchorCtr="0">
+          <a:noAutofit/>
+        </a:bodyPr>
+        <a:lstStyle/>
+        <a:p>
+          <a:pPr marL="0" lvl="0" indent="0" algn="ctr" defTabSz="1111250">
+            <a:lnSpc>
+              <a:spcPct val="90000"/>
+            </a:lnSpc>
+            <a:spcBef>
+              <a:spcPct val="0"/>
+            </a:spcBef>
+            <a:spcAft>
+              <a:spcPct val="35000"/>
+            </a:spcAft>
+            <a:buNone/>
+          </a:pPr>
+          <a:r>
+            <a:rPr lang="en-US" sz="2500" b="1" kern="1200"/>
+            <a:t>Resultados del Benchmarking</a:t>
+          </a:r>
+          <a:endParaRPr lang="en-US" sz="2500" kern="1200"/>
+        </a:p>
+      </dsp:txBody>
+      <dsp:txXfrm>
+        <a:off x="97764" y="2200659"/>
+        <a:ext cx="2339188" cy="1807182"/>
+      </dsp:txXfrm>
+    </dsp:sp>
+  </dsp:spTree>
+</dsp:drawing>
+</file>
+
+<file path=ppt/diagrams/layout1.xml><?xml version="1.0" encoding="utf-8"?>
+<dgm:layoutDef xmlns:dgm="http://schemas.openxmlformats.org/drawingml/2006/diagram" xmlns:a="http://schemas.openxmlformats.org/drawingml/2006/main" uniqueId="urn:microsoft.com/office/officeart/2005/8/layout/vList5">
+  <dgm:title val=""/>
+  <dgm:desc val=""/>
+  <dgm:catLst>
+    <dgm:cat type="list" pri="15000"/>
+    <dgm:cat type="convert" pri="2000"/>
+  </dgm:catLst>
+  <dgm:sampData>
+    <dgm:dataModel>
+      <dgm:ptLst>
+        <dgm:pt modelId="0" type="doc"/>
+        <dgm:pt modelId="1">
+          <dgm:prSet phldr="1"/>
+        </dgm:pt>
+        <dgm:pt modelId="11">
+          <dgm:prSet phldr="1"/>
+        </dgm:pt>
+        <dgm:pt modelId="12">
+          <dgm:prSet phldr="1"/>
+        </dgm:pt>
+        <dgm:pt modelId="2">
+          <dgm:prSet phldr="1"/>
+        </dgm:pt>
+        <dgm:pt modelId="21">
+          <dgm:prSet phldr="1"/>
+        </dgm:pt>
+        <dgm:pt modelId="22">
+          <dgm:prSet phldr="1"/>
+        </dgm:pt>
+        <dgm:pt modelId="3">
+          <dgm:prSet phldr="1"/>
+        </dgm:pt>
+        <dgm:pt modelId="31">
+          <dgm:prSet phldr="1"/>
+        </dgm:pt>
+        <dgm:pt modelId="32">
+          <dgm:prSet phldr="1"/>
+        </dgm:pt>
+      </dgm:ptLst>
+      <dgm:cxnLst>
+        <dgm:cxn modelId="4" srcId="0" destId="1" srcOrd="0" destOrd="0"/>
+        <dgm:cxn modelId="5" srcId="0" destId="2" srcOrd="1" destOrd="0"/>
+        <dgm:cxn modelId="6" srcId="0" destId="3" srcOrd="2" destOrd="0"/>
+        <dgm:cxn modelId="13" srcId="1" destId="11" srcOrd="0" destOrd="0"/>
+        <dgm:cxn modelId="14" srcId="1" destId="12" srcOrd="1" destOrd="0"/>
+        <dgm:cxn modelId="23" srcId="2" destId="21" srcOrd="0" destOrd="0"/>
+        <dgm:cxn modelId="24" srcId="2" destId="22" srcOrd="1" destOrd="0"/>
+        <dgm:cxn modelId="33" srcId="3" destId="31" srcOrd="0" destOrd="0"/>
+        <dgm:cxn modelId="34" srcId="3" destId="32" srcOrd="1" destOrd="0"/>
+      </dgm:cxnLst>
+      <dgm:bg/>
+      <dgm:whole/>
+    </dgm:dataModel>
+  </dgm:sampData>
+  <dgm:styleData>
+    <dgm:dataModel>
+      <dgm:ptLst>
+        <dgm:pt modelId="0" type="doc"/>
+        <dgm:pt modelId="1"/>
+        <dgm:pt modelId="11"/>
+        <dgm:pt modelId="2"/>
+        <dgm:pt modelId="21"/>
+      </dgm:ptLst>
+      <dgm:cxnLst>
+        <dgm:cxn modelId="4" srcId="0" destId="1" srcOrd="0" destOrd="0"/>
+        <dgm:cxn modelId="5" srcId="0" destId="2" srcOrd="1" destOrd="0"/>
+        <dgm:cxn modelId="13" srcId="1" destId="11" srcOrd="0" destOrd="0"/>
+        <dgm:cxn modelId="23" srcId="2" destId="21" srcOrd="0" destOrd="0"/>
+      </dgm:cxnLst>
+      <dgm:bg/>
+      <dgm:whole/>
+    </dgm:dataModel>
+  </dgm:styleData>
+  <dgm:clrData>
+    <dgm:dataModel>
+      <dgm:ptLst>
+        <dgm:pt modelId="0" type="doc"/>
+        <dgm:pt modelId="1"/>
+        <dgm:pt modelId="11"/>
+        <dgm:pt modelId="2"/>
+        <dgm:pt modelId="21"/>
+        <dgm:pt modelId="3"/>
+        <dgm:pt modelId="31"/>
+        <dgm:pt modelId="4"/>
+        <dgm:pt modelId="41"/>
+      </dgm:ptLst>
+      <dgm:cxnLst>
+        <dgm:cxn modelId="5" srcId="0" destId="1" srcOrd="0" destOrd="0"/>
+        <dgm:cxn modelId="6" srcId="0" destId="2" srcOrd="1" destOrd="0"/>
+        <dgm:cxn modelId="7" srcId="0" destId="3" srcOrd="2" destOrd="0"/>
+        <dgm:cxn modelId="8" srcId="0" destId="4" srcOrd="3" destOrd="0"/>
+        <dgm:cxn modelId="13" srcId="1" destId="11" srcOrd="0" destOrd="0"/>
+        <dgm:cxn modelId="23" srcId="2" destId="21" srcOrd="0" destOrd="0"/>
+        <dgm:cxn modelId="33" srcId="3" destId="31" srcOrd="0" destOrd="0"/>
+        <dgm:cxn modelId="43" srcId="4" destId="41" srcOrd="0" destOrd="0"/>
+      </dgm:cxnLst>
+      <dgm:bg/>
+      <dgm:whole/>
+    </dgm:dataModel>
+  </dgm:clrData>
+  <dgm:layoutNode name="Name0">
+    <dgm:varLst>
+      <dgm:dir/>
+      <dgm:animLvl val="lvl"/>
+      <dgm:resizeHandles val="exact"/>
+    </dgm:varLst>
+    <dgm:choose name="Name1">
+      <dgm:if name="Name2" func="var" arg="dir" op="equ" val="norm">
+        <dgm:alg type="lin">
+          <dgm:param type="linDir" val="fromT"/>
+          <dgm:param type="nodeHorzAlign" val="l"/>
+        </dgm:alg>
+      </dgm:if>
+      <dgm:else name="Name3">
+        <dgm:alg type="lin">
+          <dgm:param type="linDir" val="fromT"/>
+          <dgm:param type="nodeHorzAlign" val="r"/>
+        </dgm:alg>
+      </dgm:else>
+    </dgm:choose>
+    <dgm:shape xmlns:r="http://schemas.openxmlformats.org/officeDocument/2006/relationships" r:blip="">
+      <dgm:adjLst/>
+    </dgm:shape>
+    <dgm:presOf/>
+    <dgm:constrLst>
+      <dgm:constr type="h" for="ch" forName="linNode" refType="h"/>
+      <dgm:constr type="w" for="ch" forName="linNode" refType="w"/>
+      <dgm:constr type="h" for="ch" forName="sp" refType="h" fact="0.05"/>
+      <dgm:constr type="primFontSz" for="des" forName="parentText" op="equ" val="65"/>
+      <dgm:constr type="secFontSz" for="des" forName="descendantText" op="equ"/>
+    </dgm:constrLst>
+    <dgm:ruleLst/>
+    <dgm:forEach name="Name4" axis="ch" ptType="node">
+      <dgm:layoutNode name="linNode">
+        <dgm:choose name="Name5">
+          <dgm:if name="Name6" func="var" arg="dir" op="equ" val="norm">
+            <dgm:alg type="lin">
+              <dgm:param type="linDir" val="fromL"/>
+            </dgm:alg>
+          </dgm:if>
+          <dgm:else name="Name7">
+            <dgm:alg type="lin">
+              <dgm:param type="linDir" val="fromR"/>
+            </dgm:alg>
+          </dgm:else>
+        </dgm:choose>
+        <dgm:shape xmlns:r="http://schemas.openxmlformats.org/officeDocument/2006/relationships" r:blip="">
+          <dgm:adjLst/>
+        </dgm:shape>
+        <dgm:presOf/>
+        <dgm:constrLst>
+          <dgm:constr type="w" for="ch" forName="parentText" refType="w" fact="0.36"/>
+          <dgm:constr type="w" for="ch" forName="descendantText" refType="w" fact="0.64"/>
+          <dgm:constr type="h" for="ch" forName="parentText" refType="h"/>
+          <dgm:constr type="h" for="ch" forName="descendantText" refType="h" refFor="ch" refForName="parentText" fact="0.8"/>
+        </dgm:constrLst>
+        <dgm:ruleLst/>
+        <dgm:layoutNode name="parentText">
+          <dgm:varLst>
+            <dgm:chMax val="1"/>
+            <dgm:bulletEnabled val="1"/>
+          </dgm:varLst>
+          <dgm:alg type="tx"/>
+          <dgm:shape xmlns:r="http://schemas.openxmlformats.org/officeDocument/2006/relationships" type="roundRect" r:blip="" zOrderOff="3">
+            <dgm:adjLst/>
+          </dgm:shape>
+          <dgm:presOf axis="self" ptType="node"/>
+          <dgm:constrLst>
+            <dgm:constr type="tMarg" refType="primFontSz" fact="0.15"/>
+            <dgm:constr type="bMarg" refType="primFontSz" fact="0.15"/>
+            <dgm:constr type="lMarg" refType="primFontSz" fact="0.3"/>
+            <dgm:constr type="rMarg" refType="primFontSz" fact="0.3"/>
+          </dgm:constrLst>
+          <dgm:ruleLst>
+            <dgm:rule type="primFontSz" val="5" fact="NaN" max="NaN"/>
+          </dgm:ruleLst>
+        </dgm:layoutNode>
+        <dgm:choose name="Name8">
+          <dgm:if name="Name9" axis="ch" ptType="node" func="cnt" op="gte" val="1">
+            <dgm:layoutNode name="descendantText" styleLbl="alignAccFollowNode1">
+              <dgm:varLst>
+                <dgm:bulletEnabled val="1"/>
+              </dgm:varLst>
+              <dgm:alg type="tx">
+                <dgm:param type="stBulletLvl" val="1"/>
+                <dgm:param type="txAnchorVertCh" val="mid"/>
+              </dgm:alg>
+              <dgm:choose name="Name10">
+                <dgm:if name="Name11" func="var" arg="dir" op="equ" val="norm">
+                  <dgm:shape xmlns:r="http://schemas.openxmlformats.org/officeDocument/2006/relationships" rot="90" type="round2SameRect" r:blip="">
+                    <dgm:adjLst/>
+                  </dgm:shape>
+                </dgm:if>
+                <dgm:else name="Name12">
+                  <dgm:shape xmlns:r="http://schemas.openxmlformats.org/officeDocument/2006/relationships" rot="-90" type="round2SameRect" r:blip="">
+                    <dgm:adjLst/>
+                  </dgm:shape>
+                </dgm:else>
+              </dgm:choose>
+              <dgm:presOf axis="des" ptType="node"/>
+              <dgm:constrLst>
+                <dgm:constr type="secFontSz" val="65"/>
+                <dgm:constr type="primFontSz" refType="secFontSz"/>
+                <dgm:constr type="lMarg" refType="secFontSz" fact="0.3"/>
+                <dgm:constr type="rMarg" refType="secFontSz" fact="0.3"/>
+                <dgm:constr type="tMarg" refType="secFontSz" fact="0.15"/>
+                <dgm:constr type="bMarg" refType="secFontSz" fact="0.15"/>
+              </dgm:constrLst>
+              <dgm:ruleLst>
+                <dgm:rule type="secFontSz" val="5" fact="NaN" max="NaN"/>
+              </dgm:ruleLst>
+            </dgm:layoutNode>
+          </dgm:if>
+          <dgm:else name="Name13"/>
+        </dgm:choose>
+      </dgm:layoutNode>
+      <dgm:forEach name="Name14" axis="followSib" ptType="sibTrans" cnt="1">
+        <dgm:layoutNode name="sp">
+          <dgm:alg type="sp"/>
+          <dgm:shape xmlns:r="http://schemas.openxmlformats.org/officeDocument/2006/relationships" r:blip="">
+            <dgm:adjLst/>
+          </dgm:shape>
+          <dgm:presOf/>
+          <dgm:constrLst/>
+          <dgm:ruleLst/>
+        </dgm:layoutNode>
+      </dgm:forEach>
+    </dgm:forEach>
+  </dgm:layoutNode>
+</dgm:layoutDef>
+</file>
+
+<file path=ppt/diagrams/layout2.xml><?xml version="1.0" encoding="utf-8"?>
+<dgm:layoutDef xmlns:dgm="http://schemas.openxmlformats.org/drawingml/2006/diagram" xmlns:a="http://schemas.openxmlformats.org/drawingml/2006/main" uniqueId="urn:microsoft.com/office/officeart/2005/8/layout/vList5">
+  <dgm:title val=""/>
+  <dgm:desc val=""/>
+  <dgm:catLst>
+    <dgm:cat type="list" pri="15000"/>
+    <dgm:cat type="convert" pri="2000"/>
+  </dgm:catLst>
+  <dgm:sampData>
+    <dgm:dataModel>
+      <dgm:ptLst>
+        <dgm:pt modelId="0" type="doc"/>
+        <dgm:pt modelId="1">
+          <dgm:prSet phldr="1"/>
+        </dgm:pt>
+        <dgm:pt modelId="11">
+          <dgm:prSet phldr="1"/>
+        </dgm:pt>
+        <dgm:pt modelId="12">
+          <dgm:prSet phldr="1"/>
+        </dgm:pt>
+        <dgm:pt modelId="2">
+          <dgm:prSet phldr="1"/>
+        </dgm:pt>
+        <dgm:pt modelId="21">
+          <dgm:prSet phldr="1"/>
+        </dgm:pt>
+        <dgm:pt modelId="22">
+          <dgm:prSet phldr="1"/>
+        </dgm:pt>
+        <dgm:pt modelId="3">
+          <dgm:prSet phldr="1"/>
+        </dgm:pt>
+        <dgm:pt modelId="31">
+          <dgm:prSet phldr="1"/>
+        </dgm:pt>
+        <dgm:pt modelId="32">
+          <dgm:prSet phldr="1"/>
+        </dgm:pt>
+      </dgm:ptLst>
+      <dgm:cxnLst>
+        <dgm:cxn modelId="4" srcId="0" destId="1" srcOrd="0" destOrd="0"/>
+        <dgm:cxn modelId="5" srcId="0" destId="2" srcOrd="1" destOrd="0"/>
+        <dgm:cxn modelId="6" srcId="0" destId="3" srcOrd="2" destOrd="0"/>
+        <dgm:cxn modelId="13" srcId="1" destId="11" srcOrd="0" destOrd="0"/>
+        <dgm:cxn modelId="14" srcId="1" destId="12" srcOrd="1" destOrd="0"/>
+        <dgm:cxn modelId="23" srcId="2" destId="21" srcOrd="0" destOrd="0"/>
+        <dgm:cxn modelId="24" srcId="2" destId="22" srcOrd="1" destOrd="0"/>
+        <dgm:cxn modelId="33" srcId="3" destId="31" srcOrd="0" destOrd="0"/>
+        <dgm:cxn modelId="34" srcId="3" destId="32" srcOrd="1" destOrd="0"/>
+      </dgm:cxnLst>
+      <dgm:bg/>
+      <dgm:whole/>
+    </dgm:dataModel>
+  </dgm:sampData>
+  <dgm:styleData>
+    <dgm:dataModel>
+      <dgm:ptLst>
+        <dgm:pt modelId="0" type="doc"/>
+        <dgm:pt modelId="1"/>
+        <dgm:pt modelId="11"/>
+        <dgm:pt modelId="2"/>
+        <dgm:pt modelId="21"/>
+      </dgm:ptLst>
+      <dgm:cxnLst>
+        <dgm:cxn modelId="4" srcId="0" destId="1" srcOrd="0" destOrd="0"/>
+        <dgm:cxn modelId="5" srcId="0" destId="2" srcOrd="1" destOrd="0"/>
+        <dgm:cxn modelId="13" srcId="1" destId="11" srcOrd="0" destOrd="0"/>
+        <dgm:cxn modelId="23" srcId="2" destId="21" srcOrd="0" destOrd="0"/>
+      </dgm:cxnLst>
+      <dgm:bg/>
+      <dgm:whole/>
+    </dgm:dataModel>
+  </dgm:styleData>
+  <dgm:clrData>
+    <dgm:dataModel>
+      <dgm:ptLst>
+        <dgm:pt modelId="0" type="doc"/>
+        <dgm:pt modelId="1"/>
+        <dgm:pt modelId="11"/>
+        <dgm:pt modelId="2"/>
+        <dgm:pt modelId="21"/>
+        <dgm:pt modelId="3"/>
+        <dgm:pt modelId="31"/>
+        <dgm:pt modelId="4"/>
+        <dgm:pt modelId="41"/>
+      </dgm:ptLst>
+      <dgm:cxnLst>
+        <dgm:cxn modelId="5" srcId="0" destId="1" srcOrd="0" destOrd="0"/>
+        <dgm:cxn modelId="6" srcId="0" destId="2" srcOrd="1" destOrd="0"/>
+        <dgm:cxn modelId="7" srcId="0" destId="3" srcOrd="2" destOrd="0"/>
+        <dgm:cxn modelId="8" srcId="0" destId="4" srcOrd="3" destOrd="0"/>
+        <dgm:cxn modelId="13" srcId="1" destId="11" srcOrd="0" destOrd="0"/>
+        <dgm:cxn modelId="23" srcId="2" destId="21" srcOrd="0" destOrd="0"/>
+        <dgm:cxn modelId="33" srcId="3" destId="31" srcOrd="0" destOrd="0"/>
+        <dgm:cxn modelId="43" srcId="4" destId="41" srcOrd="0" destOrd="0"/>
+      </dgm:cxnLst>
+      <dgm:bg/>
+      <dgm:whole/>
+    </dgm:dataModel>
+  </dgm:clrData>
+  <dgm:layoutNode name="Name0">
+    <dgm:varLst>
+      <dgm:dir/>
+      <dgm:animLvl val="lvl"/>
+      <dgm:resizeHandles val="exact"/>
+    </dgm:varLst>
+    <dgm:choose name="Name1">
+      <dgm:if name="Name2" func="var" arg="dir" op="equ" val="norm">
+        <dgm:alg type="lin">
+          <dgm:param type="linDir" val="fromT"/>
+          <dgm:param type="nodeHorzAlign" val="l"/>
+        </dgm:alg>
+      </dgm:if>
+      <dgm:else name="Name3">
+        <dgm:alg type="lin">
+          <dgm:param type="linDir" val="fromT"/>
+          <dgm:param type="nodeHorzAlign" val="r"/>
+        </dgm:alg>
+      </dgm:else>
+    </dgm:choose>
+    <dgm:shape xmlns:r="http://schemas.openxmlformats.org/officeDocument/2006/relationships" r:blip="">
+      <dgm:adjLst/>
+    </dgm:shape>
+    <dgm:presOf/>
+    <dgm:constrLst>
+      <dgm:constr type="h" for="ch" forName="linNode" refType="h"/>
+      <dgm:constr type="w" for="ch" forName="linNode" refType="w"/>
+      <dgm:constr type="h" for="ch" forName="sp" refType="h" fact="0.05"/>
+      <dgm:constr type="primFontSz" for="des" forName="parentText" op="equ" val="65"/>
+      <dgm:constr type="secFontSz" for="des" forName="descendantText" op="equ"/>
+    </dgm:constrLst>
+    <dgm:ruleLst/>
+    <dgm:forEach name="Name4" axis="ch" ptType="node">
+      <dgm:layoutNode name="linNode">
+        <dgm:choose name="Name5">
+          <dgm:if name="Name6" func="var" arg="dir" op="equ" val="norm">
+            <dgm:alg type="lin">
+              <dgm:param type="linDir" val="fromL"/>
+            </dgm:alg>
+          </dgm:if>
+          <dgm:else name="Name7">
+            <dgm:alg type="lin">
+              <dgm:param type="linDir" val="fromR"/>
+            </dgm:alg>
+          </dgm:else>
+        </dgm:choose>
+        <dgm:shape xmlns:r="http://schemas.openxmlformats.org/officeDocument/2006/relationships" r:blip="">
+          <dgm:adjLst/>
+        </dgm:shape>
+        <dgm:presOf/>
+        <dgm:constrLst>
+          <dgm:constr type="w" for="ch" forName="parentText" refType="w" fact="0.36"/>
+          <dgm:constr type="w" for="ch" forName="descendantText" refType="w" fact="0.64"/>
+          <dgm:constr type="h" for="ch" forName="parentText" refType="h"/>
+          <dgm:constr type="h" for="ch" forName="descendantText" refType="h" refFor="ch" refForName="parentText" fact="0.8"/>
+        </dgm:constrLst>
+        <dgm:ruleLst/>
+        <dgm:layoutNode name="parentText">
+          <dgm:varLst>
+            <dgm:chMax val="1"/>
+            <dgm:bulletEnabled val="1"/>
+          </dgm:varLst>
+          <dgm:alg type="tx"/>
+          <dgm:shape xmlns:r="http://schemas.openxmlformats.org/officeDocument/2006/relationships" type="roundRect" r:blip="" zOrderOff="3">
+            <dgm:adjLst/>
+          </dgm:shape>
+          <dgm:presOf axis="self" ptType="node"/>
+          <dgm:constrLst>
+            <dgm:constr type="tMarg" refType="primFontSz" fact="0.15"/>
+            <dgm:constr type="bMarg" refType="primFontSz" fact="0.15"/>
+            <dgm:constr type="lMarg" refType="primFontSz" fact="0.3"/>
+            <dgm:constr type="rMarg" refType="primFontSz" fact="0.3"/>
+          </dgm:constrLst>
+          <dgm:ruleLst>
+            <dgm:rule type="primFontSz" val="5" fact="NaN" max="NaN"/>
+          </dgm:ruleLst>
+        </dgm:layoutNode>
+        <dgm:choose name="Name8">
+          <dgm:if name="Name9" axis="ch" ptType="node" func="cnt" op="gte" val="1">
+            <dgm:layoutNode name="descendantText" styleLbl="alignAccFollowNode1">
+              <dgm:varLst>
+                <dgm:bulletEnabled val="1"/>
+              </dgm:varLst>
+              <dgm:alg type="tx">
+                <dgm:param type="stBulletLvl" val="1"/>
+                <dgm:param type="txAnchorVertCh" val="mid"/>
+              </dgm:alg>
+              <dgm:choose name="Name10">
+                <dgm:if name="Name11" func="var" arg="dir" op="equ" val="norm">
+                  <dgm:shape xmlns:r="http://schemas.openxmlformats.org/officeDocument/2006/relationships" rot="90" type="round2SameRect" r:blip="">
+                    <dgm:adjLst/>
+                  </dgm:shape>
+                </dgm:if>
+                <dgm:else name="Name12">
+                  <dgm:shape xmlns:r="http://schemas.openxmlformats.org/officeDocument/2006/relationships" rot="-90" type="round2SameRect" r:blip="">
+                    <dgm:adjLst/>
+                  </dgm:shape>
+                </dgm:else>
+              </dgm:choose>
+              <dgm:presOf axis="des" ptType="node"/>
+              <dgm:constrLst>
+                <dgm:constr type="secFontSz" val="65"/>
+                <dgm:constr type="primFontSz" refType="secFontSz"/>
+                <dgm:constr type="lMarg" refType="secFontSz" fact="0.3"/>
+                <dgm:constr type="rMarg" refType="secFontSz" fact="0.3"/>
+                <dgm:constr type="tMarg" refType="secFontSz" fact="0.15"/>
+                <dgm:constr type="bMarg" refType="secFontSz" fact="0.15"/>
+              </dgm:constrLst>
+              <dgm:ruleLst>
+                <dgm:rule type="secFontSz" val="5" fact="NaN" max="NaN"/>
+              </dgm:ruleLst>
+            </dgm:layoutNode>
+          </dgm:if>
+          <dgm:else name="Name13"/>
+        </dgm:choose>
+      </dgm:layoutNode>
+      <dgm:forEach name="Name14" axis="followSib" ptType="sibTrans" cnt="1">
+        <dgm:layoutNode name="sp">
+          <dgm:alg type="sp"/>
+          <dgm:shape xmlns:r="http://schemas.openxmlformats.org/officeDocument/2006/relationships" r:blip="">
+            <dgm:adjLst/>
+          </dgm:shape>
+          <dgm:presOf/>
+          <dgm:constrLst/>
+          <dgm:ruleLst/>
+        </dgm:layoutNode>
+      </dgm:forEach>
+    </dgm:forEach>
+  </dgm:layoutNode>
+</dgm:layoutDef>
+</file>
+
+<file path=ppt/diagrams/quickStyle1.xml><?xml version="1.0" encoding="utf-8"?>
+<dgm:styleDef xmlns:dgm="http://schemas.openxmlformats.org/drawingml/2006/diagram" xmlns:a="http://schemas.openxmlformats.org/drawingml/2006/main" uniqueId="urn:microsoft.com/office/officeart/2005/8/quickstyle/simple1">
+  <dgm:title val=""/>
+  <dgm:desc val=""/>
+  <dgm:catLst>
+    <dgm:cat type="simple" pri="10100"/>
+  </dgm:catLst>
+  <dgm:scene3d>
+    <a:camera prst="orthographicFront"/>
+    <a:lightRig rig="threePt" dir="t"/>
+  </dgm:scene3d>
+  <dgm:styleLbl name="node0">
+    <dgm:scene3d>
+      <a:camera prst="orthographicFront"/>
+      <a:lightRig rig="threePt" dir="t"/>
+    </dgm:scene3d>
+    <dgm:sp3d/>
+    <dgm:txPr/>
+    <dgm:style>
+      <a:lnRef idx="2">
+        <a:scrgbClr r="0" g="0" b="0"/>
+      </a:lnRef>
+      <a:fillRef idx="1">
+        <a:scrgbClr r="0" g="0" b="0"/>
+      </a:fillRef>
+      <a:effectRef idx="0">
+        <a:scrgbClr r="0" g="0" b="0"/>
+      </a:effectRef>
+      <a:fontRef idx="minor">
+        <a:schemeClr val="lt1"/>
+      </a:fontRef>
+    </dgm:style>
+  </dgm:styleLbl>
+  <dgm:styleLbl name="lnNode1">
+    <dgm:scene3d>
+      <a:camera prst="orthographicFront"/>
+      <a:lightRig rig="threePt" dir="t"/>
+    </dgm:scene3d>
+    <dgm:sp3d/>
+    <dgm:txPr/>
+    <dgm:style>
+      <a:lnRef idx="2">
+        <a:scrgbClr r="0" g="0" b="0"/>
+      </a:lnRef>
+      <a:fillRef idx="1">
+        <a:scrgbClr r="0" g="0" b="0"/>
+      </a:fillRef>
+      <a:effectRef idx="0">
+        <a:scrgbClr r="0" g="0" b="0"/>
+      </a:effectRef>
+      <a:fontRef idx="minor">
+        <a:schemeClr val="lt1"/>
+      </a:fontRef>
+    </dgm:style>
+  </dgm:styleLbl>
+  <dgm:styleLbl name="vennNode1">
+    <dgm:scene3d>
+      <a:camera prst="orthographicFront"/>
+      <a:lightRig rig="threePt" dir="t"/>
+    </dgm:scene3d>
+    <dgm:sp3d/>
+    <dgm:txPr/>
+    <dgm:style>
+      <a:lnRef idx="2">
+        <a:scrgbClr r="0" g="0" b="0"/>
+      </a:lnRef>
+      <a:fillRef idx="1">
+        <a:scrgbClr r="0" g="0" b="0"/>
+      </a:fillRef>
+      <a:effectRef idx="0">
+        <a:scrgbClr r="0" g="0" b="0"/>
+      </a:effectRef>
+      <a:fontRef idx="minor">
+        <a:schemeClr val="tx1"/>
+      </a:fontRef>
+    </dgm:style>
+  </dgm:styleLbl>
+  <dgm:styleLbl name="alignNode1">
+    <dgm:scene3d>
+      <a:camera prst="orthographicFront"/>
+      <a:lightRig rig="threePt" dir="t"/>
+    </dgm:scene3d>
+    <dgm:sp3d/>
+    <dgm:txPr/>
+    <dgm:style>
+      <a:lnRef idx="2">
+        <a:scrgbClr r="0" g="0" b="0"/>
+      </a:lnRef>
+      <a:fillRef idx="1">
+        <a:scrgbClr r="0" g="0" b="0"/>
+      </a:fillRef>
+      <a:effectRef idx="0">
+        <a:scrgbClr r="0" g="0" b="0"/>
+      </a:effectRef>
+      <a:fontRef idx="minor">
+        <a:schemeClr val="lt1"/>
+      </a:fontRef>
+    </dgm:style>
+  </dgm:styleLbl>
+  <dgm:styleLbl name="node1">
+    <dgm:scene3d>
+      <a:camera prst="orthographicFront"/>
+      <a:lightRig rig="threePt" dir="t"/>
+    </dgm:scene3d>
+    <dgm:sp3d/>
+    <dgm:txPr/>
+    <dgm:style>
+      <a:lnRef idx="2">
+        <a:scrgbClr r="0" g="0" b="0"/>
+      </a:lnRef>
+      <a:fillRef idx="1">
+        <a:scrgbClr r="0" g="0" b="0"/>
+      </a:fillRef>
+      <a:effectRef idx="0">
+        <a:scrgbClr r="0" g="0" b="0"/>
+      </a:effectRef>
+      <a:fontRef idx="minor">
+        <a:schemeClr val="lt1"/>
+      </a:fontRef>
+    </dgm:style>
+  </dgm:styleLbl>
+  <dgm:styleLbl name="node2">
+    <dgm:scene3d>
+      <a:camera prst="orthographicFront"/>
+      <a:lightRig rig="threePt" dir="t"/>
+    </dgm:scene3d>
+    <dgm:sp3d/>
+    <dgm:txPr/>
+    <dgm:style>
+      <a:lnRef idx="2">
+        <a:scrgbClr r="0" g="0" b="0"/>
+      </a:lnRef>
+      <a:fillRef idx="1">
+        <a:scrgbClr r="0" g="0" b="0"/>
+      </a:fillRef>
+      <a:effectRef idx="0">
+        <a:scrgbClr r="0" g="0" b="0"/>
+      </a:effectRef>
+      <a:fontRef idx="minor">
+        <a:schemeClr val="lt1"/>
+      </a:fontRef>
+    </dgm:style>
+  </dgm:styleLbl>
+  <dgm:styleLbl name="node3">
+    <dgm:scene3d>
+      <a:camera prst="orthographicFront"/>
+      <a:lightRig rig="threePt" dir="t"/>
+    </dgm:scene3d>
+    <dgm:sp3d/>
+    <dgm:txPr/>
+    <dgm:style>
+      <a:lnRef idx="2">
+        <a:scrgbClr r="0" g="0" b="0"/>
+      </a:lnRef>
+      <a:fillRef idx="1">
+        <a:scrgbClr r="0" g="0" b="0"/>
+      </a:fillRef>
+      <a:effectRef idx="0">
+        <a:scrgbClr r="0" g="0" b="0"/>
+      </a:effectRef>
+      <a:fontRef idx="minor">
+        <a:schemeClr val="lt1"/>
+      </a:fontRef>
+    </dgm:style>
+  </dgm:styleLbl>
+  <dgm:styleLbl name="node4">
+    <dgm:scene3d>
+      <a:camera prst="orthographicFront"/>
+      <a:lightRig rig="threePt" dir="t"/>
+    </dgm:scene3d>
+    <dgm:sp3d/>
+    <dgm:txPr/>
+    <dgm:style>
+      <a:lnRef idx="2">
+        <a:scrgbClr r="0" g="0" b="0"/>
+      </a:lnRef>
+      <a:fillRef idx="1">
+        <a:scrgbClr r="0" g="0" b="0"/>
+      </a:fillRef>
+      <a:effectRef idx="0">
+        <a:scrgbClr r="0" g="0" b="0"/>
+      </a:effectRef>
+      <a:fontRef idx="minor">
+        <a:schemeClr val="lt1"/>
+      </a:fontRef>
+    </dgm:style>
+  </dgm:styleLbl>
+  <dgm:styleLbl name="fgImgPlace1">
+    <dgm:scene3d>
+      <a:camera prst="orthographicFront"/>
+      <a:lightRig rig="threePt" dir="t"/>
+    </dgm:scene3d>
+    <dgm:sp3d/>
+    <dgm:txPr/>
+    <dgm:style>
+      <a:lnRef idx="2">
+        <a:scrgbClr r="0" g="0" b="0"/>
+      </a:lnRef>
+      <a:fillRef idx="1">
+        <a:scrgbClr r="0" g="0" b="0"/>
+      </a:fillRef>
+      <a:effectRef idx="0">
+        <a:scrgbClr r="0" g="0" b="0"/>
+      </a:effectRef>
+      <a:fontRef idx="minor"/>
+    </dgm:style>
+  </dgm:styleLbl>
+  <dgm:styleLbl name="alignImgPlace1">
+    <dgm:scene3d>
+      <a:camera prst="orthographicFront"/>
+      <a:lightRig rig="threePt" dir="t"/>
+    </dgm:scene3d>
+    <dgm:sp3d/>
+    <dgm:txPr/>
+    <dgm:style>
+      <a:lnRef idx="2">
+        <a:scrgbClr r="0" g="0" b="0"/>
+      </a:lnRef>
+      <a:fillRef idx="1">
+        <a:scrgbClr r="0" g="0" b="0"/>
+      </a:fillRef>
+      <a:effectRef idx="0">
+        <a:scrgbClr r="0" g="0" b="0"/>
+      </a:effectRef>
+      <a:fontRef idx="minor"/>
+    </dgm:style>
+  </dgm:styleLbl>
+  <dgm:styleLbl name="bgImgPlace1">
+    <dgm:scene3d>
+      <a:camera prst="orthographicFront"/>
+      <a:lightRig rig="threePt" dir="t"/>
+    </dgm:scene3d>
+    <dgm:sp3d/>
+    <dgm:txPr/>
+    <dgm:style>
+      <a:lnRef idx="2">
+        <a:scrgbClr r="0" g="0" b="0"/>
+      </a:lnRef>
+      <a:fillRef idx="1">
+        <a:scrgbClr r="0" g="0" b="0"/>
+      </a:fillRef>
+      <a:effectRef idx="0">
+        <a:scrgbClr r="0" g="0" b="0"/>
+      </a:effectRef>
+      <a:fontRef idx="minor"/>
+    </dgm:style>
+  </dgm:styleLbl>
+  <dgm:styleLbl name="sibTrans2D1">
+    <dgm:scene3d>
+      <a:camera prst="orthographicFront"/>
+      <a:lightRig rig="threePt" dir="t"/>
+    </dgm:scene3d>
+    <dgm:sp3d/>
+    <dgm:txPr/>
+    <dgm:style>
+      <a:lnRef idx="0">
+        <a:scrgbClr r="0" g="0" b="0"/>
+      </a:lnRef>
+      <a:fillRef idx="1">
+        <a:scrgbClr r="0" g="0" b="0"/>
+      </a:fillRef>
+      <a:effectRef idx="0">
+        <a:scrgbClr r="0" g="0" b="0"/>
+      </a:effectRef>
+      <a:fontRef idx="minor">
+        <a:schemeClr val="lt1"/>
+      </a:fontRef>
+    </dgm:style>
+  </dgm:styleLbl>
+  <dgm:styleLbl name="fgSibTrans2D1">
+    <dgm:scene3d>
+      <a:camera prst="orthographicFront"/>
+      <a:lightRig rig="threePt" dir="t"/>
+    </dgm:scene3d>
+    <dgm:sp3d/>
+    <dgm:txPr/>
+    <dgm:style>
+      <a:lnRef idx="0">
+        <a:scrgbClr r="0" g="0" b="0"/>
+      </a:lnRef>
+      <a:fillRef idx="1">
+        <a:scrgbClr r="0" g="0" b="0"/>
+      </a:fillRef>
+      <a:effectRef idx="0">
+        <a:scrgbClr r="0" g="0" b="0"/>
+      </a:effectRef>
+      <a:fontRef idx="minor">
+        <a:schemeClr val="lt1"/>
+      </a:fontRef>
+    </dgm:style>
+  </dgm:styleLbl>
+  <dgm:styleLbl name="bgSibTrans2D1">
+    <dgm:scene3d>
+      <a:camera prst="orthographicFront"/>
+      <a:lightRig rig="threePt" dir="t"/>
+    </dgm:scene3d>
+    <dgm:sp3d/>
+    <dgm:txPr/>
+    <dgm:style>
+      <a:lnRef idx="0">
+        <a:scrgbClr r="0" g="0" b="0"/>
+      </a:lnRef>
+      <a:fillRef idx="1">
+        <a:scrgbClr r="0" g="0" b="0"/>
+      </a:fillRef>
+      <a:effectRef idx="0">
+        <a:scrgbClr r="0" g="0" b="0"/>
+      </a:effectRef>
+      <a:fontRef idx="minor">
+        <a:schemeClr val="lt1"/>
+      </a:fontRef>
+    </dgm:style>
+  </dgm:styleLbl>
+  <dgm:styleLbl name="sibTrans1D1">
+    <dgm:scene3d>
+      <a:camera prst="orthographicFront"/>
+      <a:lightRig rig="threePt" dir="t"/>
+    </dgm:scene3d>
+    <dgm:sp3d/>
+    <dgm:txPr/>
+    <dgm:style>
+      <a:lnRef idx="1">
+        <a:scrgbClr r="0" g="0" b="0"/>
+      </a:lnRef>
+      <a:fillRef idx="0">
+        <a:scrgbClr r="0" g="0" b="0"/>
+      </a:fillRef>
+      <a:effectRef idx="0">
+        <a:scrgbClr r="0" g="0" b="0"/>
+      </a:effectRef>
+      <a:fontRef idx="minor"/>
+    </dgm:style>
+  </dgm:styleLbl>
+  <dgm:styleLbl name="callout">
+    <dgm:scene3d>
+      <a:camera prst="orthographicFront"/>
+      <a:lightRig rig="threePt" dir="t"/>
+    </dgm:scene3d>
+    <dgm:sp3d/>
+    <dgm:txPr/>
+    <dgm:style>
+      <a:lnRef idx="2">
+        <a:scrgbClr r="0" g="0" b="0"/>
+      </a:lnRef>
+      <a:fillRef idx="1">
+        <a:scrgbClr r="0" g="0" b="0"/>
+      </a:fillRef>
+      <a:effectRef idx="0">
+        <a:scrgbClr r="0" g="0" b="0"/>
+      </a:effectRef>
+      <a:fontRef idx="minor"/>
+    </dgm:style>
+  </dgm:styleLbl>
+  <dgm:styleLbl name="asst0">
+    <dgm:scene3d>
+      <a:camera prst="orthographicFront"/>
+      <a:lightRig rig="threePt" dir="t"/>
+    </dgm:scene3d>
+    <dgm:sp3d/>
+    <dgm:txPr/>
+    <dgm:style>
+      <a:lnRef idx="2">
+        <a:scrgbClr r="0" g="0" b="0"/>
+      </a:lnRef>
+      <a:fillRef idx="1">
+        <a:scrgbClr r="0" g="0" b="0"/>
+      </a:fillRef>
+      <a:effectRef idx="0">
+        <a:scrgbClr r="0" g="0" b="0"/>
+      </a:effectRef>
+      <a:fontRef idx="minor">
+        <a:schemeClr val="lt1"/>
+      </a:fontRef>
+    </dgm:style>
+  </dgm:styleLbl>
+  <dgm:styleLbl name="asst1">
+    <dgm:scene3d>
+      <a:camera prst="orthographicFront"/>
+      <a:lightRig rig="threePt" dir="t"/>
+    </dgm:scene3d>
+    <dgm:sp3d/>
+    <dgm:txPr/>
+    <dgm:style>
+      <a:lnRef idx="2">
+        <a:scrgbClr r="0" g="0" b="0"/>
+      </a:lnRef>
+      <a:fillRef idx="1">
+        <a:scrgbClr r="0" g="0" b="0"/>
+      </a:fillRef>
+      <a:effectRef idx="0">
+        <a:scrgbClr r="0" g="0" b="0"/>
+      </a:effectRef>
+      <a:fontRef idx="minor">
+        <a:schemeClr val="lt1"/>
+      </a:fontRef>
+    </dgm:style>
+  </dgm:styleLbl>
+  <dgm:styleLbl name="asst2">
+    <dgm:scene3d>
+      <a:camera prst="orthographicFront"/>
+      <a:lightRig rig="threePt" dir="t"/>
+    </dgm:scene3d>
+    <dgm:sp3d/>
+    <dgm:txPr/>
+    <dgm:style>
+      <a:lnRef idx="2">
+        <a:scrgbClr r="0" g="0" b="0"/>
+      </a:lnRef>
+      <a:fillRef idx="1">
+        <a:scrgbClr r="0" g="0" b="0"/>
+      </a:fillRef>
+      <a:effectRef idx="0">
+        <a:scrgbClr r="0" g="0" b="0"/>
+      </a:effectRef>
+      <a:fontRef idx="minor">
+        <a:schemeClr val="lt1"/>
+      </a:fontRef>
+    </dgm:style>
+  </dgm:styleLbl>
+  <dgm:styleLbl name="asst3">
+    <dgm:scene3d>
+      <a:camera prst="orthographicFront"/>
+      <a:lightRig rig="threePt" dir="t"/>
+    </dgm:scene3d>
+    <dgm:sp3d/>
+    <dgm:txPr/>
+    <dgm:style>
+      <a:lnRef idx="2">
+        <a:scrgbClr r="0" g="0" b="0"/>
+      </a:lnRef>
+      <a:fillRef idx="1">
+        <a:scrgbClr r="0" g="0" b="0"/>
+      </a:fillRef>
+      <a:effectRef idx="0">
+        <a:scrgbClr r="0" g="0" b="0"/>
+      </a:effectRef>
+      <a:fontRef idx="minor">
+        <a:schemeClr val="lt1"/>
+      </a:fontRef>
+    </dgm:style>
+  </dgm:styleLbl>
+  <dgm:styleLbl name="asst4">
+    <dgm:scene3d>
+      <a:camera prst="orthographicFront"/>
+      <a:lightRig rig="threePt" dir="t"/>
+    </dgm:scene3d>
+    <dgm:sp3d/>
+    <dgm:txPr/>
+    <dgm:style>
+      <a:lnRef idx="2">
+        <a:scrgbClr r="0" g="0" b="0"/>
+      </a:lnRef>
+      <a:fillRef idx="1">
+        <a:scrgbClr r="0" g="0" b="0"/>
+      </a:fillRef>
+      <a:effectRef idx="0">
+        <a:scrgbClr r="0" g="0" b="0"/>
+      </a:effectRef>
+      <a:fontRef idx="minor">
+        <a:schemeClr val="lt1"/>
+      </a:fontRef>
+    </dgm:style>
+  </dgm:styleLbl>
+  <dgm:styleLbl name="parChTrans2D1">
+    <dgm:scene3d>
+      <a:camera prst="orthographicFront"/>
+      <a:lightRig rig="threePt" dir="t"/>
+    </dgm:scene3d>
+    <dgm:sp3d/>
+    <dgm:txPr/>
+    <dgm:style>
+      <a:lnRef idx="2">
+        <a:scrgbClr r="0" g="0" b="0"/>
+      </a:lnRef>
+      <a:fillRef idx="1">
+        <a:scrgbClr r="0" g="0" b="0"/>
+      </a:fillRef>
+      <a:effectRef idx="0">
+        <a:scrgbClr r="0" g="0" b="0"/>
+      </a:effectRef>
+      <a:fontRef idx="minor">
+        <a:schemeClr val="lt1"/>
+      </a:fontRef>
+    </dgm:style>
+  </dgm:styleLbl>
+  <dgm:styleLbl name="parChTrans2D2">
+    <dgm:scene3d>
+      <a:camera prst="orthographicFront"/>
+      <a:lightRig rig="threePt" dir="t"/>
+    </dgm:scene3d>
+    <dgm:sp3d/>
+    <dgm:txPr/>
+    <dgm:style>
+      <a:lnRef idx="2">
+        <a:scrgbClr r="0" g="0" b="0"/>
+      </a:lnRef>
+      <a:fillRef idx="1">
+        <a:scrgbClr r="0" g="0" b="0"/>
+      </a:fillRef>
+      <a:effectRef idx="0">
+        <a:scrgbClr r="0" g="0" b="0"/>
+      </a:effectRef>
+      <a:fontRef idx="minor">
+        <a:schemeClr val="lt1"/>
+      </a:fontRef>
+    </dgm:style>
+  </dgm:styleLbl>
+  <dgm:styleLbl name="parChTrans2D3">
+    <dgm:scene3d>
+      <a:camera prst="orthographicFront"/>
+      <a:lightRig rig="threePt" dir="t"/>
+    </dgm:scene3d>
+    <dgm:sp3d/>
+    <dgm:txPr/>
+    <dgm:style>
+      <a:lnRef idx="2">
+        <a:scrgbClr r="0" g="0" b="0"/>
+      </a:lnRef>
+      <a:fillRef idx="1">
+        <a:scrgbClr r="0" g="0" b="0"/>
+      </a:fillRef>
+      <a:effectRef idx="0">
+        <a:scrgbClr r="0" g="0" b="0"/>
+      </a:effectRef>
+      <a:fontRef idx="minor">
+        <a:schemeClr val="lt1"/>
+      </a:fontRef>
+    </dgm:style>
+  </dgm:styleLbl>
+  <dgm:styleLbl name="parChTrans2D4">
+    <dgm:scene3d>
+      <a:camera prst="orthographicFront"/>
+      <a:lightRig rig="threePt" dir="t"/>
+    </dgm:scene3d>
+    <dgm:sp3d/>
+    <dgm:txPr/>
+    <dgm:style>
+      <a:lnRef idx="2">
+        <a:scrgbClr r="0" g="0" b="0"/>
+      </a:lnRef>
+      <a:fillRef idx="1">
+        <a:scrgbClr r="0" g="0" b="0"/>
+      </a:fillRef>
+      <a:effectRef idx="0">
+        <a:scrgbClr r="0" g="0" b="0"/>
+      </a:effectRef>
+      <a:fontRef idx="minor">
+        <a:schemeClr val="lt1"/>
+      </a:fontRef>
+    </dgm:style>
+  </dgm:styleLbl>
+  <dgm:styleLbl name="parChTrans1D1">
+    <dgm:scene3d>
+      <a:camera prst="orthographicFront"/>
+      <a:lightRig rig="threePt" dir="t"/>
+    </dgm:scene3d>
+    <dgm:sp3d/>
+    <dgm:txPr/>
+    <dgm:style>
+      <a:lnRef idx="2">
+        <a:scrgbClr r="0" g="0" b="0"/>
+      </a:lnRef>
+      <a:fillRef idx="0">
+        <a:scrgbClr r="0" g="0" b="0"/>
+      </a:fillRef>
+      <a:effectRef idx="0">
+        <a:scrgbClr r="0" g="0" b="0"/>
+      </a:effectRef>
+      <a:fontRef idx="minor"/>
+    </dgm:style>
+  </dgm:styleLbl>
+  <dgm:styleLbl name="parChTrans1D2">
+    <dgm:scene3d>
+      <a:camera prst="orthographicFront"/>
+      <a:lightRig rig="threePt" dir="t"/>
+    </dgm:scene3d>
+    <dgm:sp3d/>
+    <dgm:txPr/>
+    <dgm:style>
+      <a:lnRef idx="2">
+        <a:scrgbClr r="0" g="0" b="0"/>
+      </a:lnRef>
+      <a:fillRef idx="0">
+        <a:scrgbClr r="0" g="0" b="0"/>
+      </a:fillRef>
+      <a:effectRef idx="0">
+        <a:scrgbClr r="0" g="0" b="0"/>
+      </a:effectRef>
+      <a:fontRef idx="minor"/>
+    </dgm:style>
+  </dgm:styleLbl>
+  <dgm:styleLbl name="parChTrans1D3">
+    <dgm:scene3d>
+      <a:camera prst="orthographicFront"/>
+      <a:lightRig rig="threePt" dir="t"/>
+    </dgm:scene3d>
+    <dgm:sp3d/>
+    <dgm:txPr/>
+    <dgm:style>
+      <a:lnRef idx="2">
+        <a:scrgbClr r="0" g="0" b="0"/>
+      </a:lnRef>
+      <a:fillRef idx="0">
+        <a:scrgbClr r="0" g="0" b="0"/>
+      </a:fillRef>
+      <a:effectRef idx="0">
+        <a:scrgbClr r="0" g="0" b="0"/>
+      </a:effectRef>
+      <a:fontRef idx="minor"/>
+    </dgm:style>
+  </dgm:styleLbl>
+  <dgm:styleLbl name="parChTrans1D4">
+    <dgm:scene3d>
+      <a:camera prst="orthographicFront"/>
+      <a:lightRig rig="threePt" dir="t"/>
+    </dgm:scene3d>
+    <dgm:sp3d/>
+    <dgm:txPr/>
+    <dgm:style>
+      <a:lnRef idx="2">
+        <a:scrgbClr r="0" g="0" b="0"/>
+      </a:lnRef>
+      <a:fillRef idx="0">
+        <a:scrgbClr r="0" g="0" b="0"/>
+      </a:fillRef>
+      <a:effectRef idx="0">
+        <a:scrgbClr r="0" g="0" b="0"/>
+      </a:effectRef>
+      <a:fontRef idx="minor"/>
+    </dgm:style>
+  </dgm:styleLbl>
+  <dgm:styleLbl name="fgAcc1">
+    <dgm:scene3d>
+      <a:camera prst="orthographicFront"/>
+      <a:lightRig rig="threePt" dir="t"/>
+    </dgm:scene3d>
+    <dgm:sp3d/>
+    <dgm:txPr/>
+    <dgm:style>
+      <a:lnRef idx="2">
+        <a:scrgbClr r="0" g="0" b="0"/>
+      </a:lnRef>
+      <a:fillRef idx="1">
+        <a:scrgbClr r="0" g="0" b="0"/>
+      </a:fillRef>
+      <a:effectRef idx="0">
+        <a:scrgbClr r="0" g="0" b="0"/>
+      </a:effectRef>
+      <a:fontRef idx="minor"/>
+    </dgm:style>
+  </dgm:styleLbl>
+  <dgm:styleLbl name="conFgAcc1">
+    <dgm:scene3d>
+      <a:camera prst="orthographicFront"/>
+      <a:lightRig rig="threePt" dir="t"/>
+    </dgm:scene3d>
+    <dgm:sp3d/>
+    <dgm:txPr/>
+    <dgm:style>
+      <a:lnRef idx="2">
+        <a:scrgbClr r="0" g="0" b="0"/>
+      </a:lnRef>
+      <a:fillRef idx="1">
+        <a:scrgbClr r="0" g="0" b="0"/>
+      </a:fillRef>
+      <a:effectRef idx="0">
+        <a:scrgbClr r="0" g="0" b="0"/>
+      </a:effectRef>
+      <a:fontRef idx="minor"/>
+    </dgm:style>
+  </dgm:styleLbl>
+  <dgm:styleLbl name="alignAcc1">
+    <dgm:scene3d>
+      <a:camera prst="orthographicFront"/>
+      <a:lightRig rig="threePt" dir="t"/>
+    </dgm:scene3d>
+    <dgm:sp3d/>
+    <dgm:txPr/>
+    <dgm:style>
+      <a:lnRef idx="2">
+        <a:scrgbClr r="0" g="0" b="0"/>
+      </a:lnRef>
+      <a:fillRef idx="1">
+        <a:scrgbClr r="0" g="0" b="0"/>
+      </a:fillRef>
+      <a:effectRef idx="0">
+        <a:scrgbClr r="0" g="0" b="0"/>
+      </a:effectRef>
+      <a:fontRef idx="minor"/>
+    </dgm:style>
+  </dgm:styleLbl>
+  <dgm:styleLbl name="trAlignAcc1">
+    <dgm:scene3d>
+      <a:camera prst="orthographicFront"/>
+      <a:lightRig rig="threePt" dir="t"/>
+    </dgm:scene3d>
+    <dgm:sp3d/>
+    <dgm:txPr/>
+    <dgm:style>
+      <a:lnRef idx="1">
+        <a:scrgbClr r="0" g="0" b="0"/>
+      </a:lnRef>
+      <a:fillRef idx="1">
+        <a:scrgbClr r="0" g="0" b="0"/>
+      </a:fillRef>
+      <a:effectRef idx="0">
+        <a:scrgbClr r="0" g="0" b="0"/>
+      </a:effectRef>
+      <a:fontRef idx="minor"/>
+    </dgm:style>
+  </dgm:styleLbl>
+  <dgm:styleLbl name="bgAcc1">
+    <dgm:scene3d>
+      <a:camera prst="orthographicFront"/>
+      <a:lightRig rig="threePt" dir="t"/>
+    </dgm:scene3d>
+    <dgm:sp3d/>
+    <dgm:txPr/>
+    <dgm:style>
+      <a:lnRef idx="2">
+        <a:scrgbClr r="0" g="0" b="0"/>
+      </a:lnRef>
+      <a:fillRef idx="1">
+        <a:scrgbClr r="0" g="0" b="0"/>
+      </a:fillRef>
+      <a:effectRef idx="0">
+        <a:scrgbClr r="0" g="0" b="0"/>
+      </a:effectRef>
+      <a:fontRef idx="minor"/>
+    </dgm:style>
+  </dgm:styleLbl>
+  <dgm:styleLbl name="solidFgAcc1">
+    <dgm:scene3d>
+      <a:camera prst="orthographicFront"/>
+      <a:lightRig rig="threePt" dir="t"/>
+    </dgm:scene3d>
+    <dgm:sp3d/>
+    <dgm:txPr/>
+    <dgm:style>
+      <a:lnRef idx="2">
+        <a:scrgbClr r="0" g="0" b="0"/>
+      </a:lnRef>
+      <a:fillRef idx="1">
+        <a:scrgbClr r="0" g="0" b="0"/>
+      </a:fillRef>
+      <a:effectRef idx="0">
+        <a:scrgbClr r="0" g="0" b="0"/>
+      </a:effectRef>
+      <a:fontRef idx="minor"/>
+    </dgm:style>
+  </dgm:styleLbl>
+  <dgm:styleLbl name="solidAlignAcc1">
+    <dgm:scene3d>
+      <a:camera prst="orthographicFront"/>
+      <a:lightRig rig="threePt" dir="t"/>
+    </dgm:scene3d>
+    <dgm:sp3d/>
+    <dgm:txPr/>
+    <dgm:style>
+      <a:lnRef idx="2">
+        <a:scrgbClr r="0" g="0" b="0"/>
+      </a:lnRef>
+      <a:fillRef idx="1">
+        <a:scrgbClr r="0" g="0" b="0"/>
+      </a:fillRef>
+      <a:effectRef idx="0">
+        <a:scrgbClr r="0" g="0" b="0"/>
+      </a:effectRef>
+      <a:fontRef idx="minor"/>
+    </dgm:style>
+  </dgm:styleLbl>
+  <dgm:styleLbl name="solidBgAcc1">
+    <dgm:scene3d>
+      <a:camera prst="orthographicFront"/>
+      <a:lightRig rig="threePt" dir="t"/>
+    </dgm:scene3d>
+    <dgm:sp3d/>
+    <dgm:txPr/>
+    <dgm:style>
+      <a:lnRef idx="2">
+        <a:scrgbClr r="0" g="0" b="0"/>
+      </a:lnRef>
+      <a:fillRef idx="1">
+        <a:scrgbClr r="0" g="0" b="0"/>
+      </a:fillRef>
+      <a:effectRef idx="0">
+        <a:scrgbClr r="0" g="0" b="0"/>
+      </a:effectRef>
+      <a:fontRef idx="minor"/>
+    </dgm:style>
+  </dgm:styleLbl>
+  <dgm:styleLbl name="fgAccFollowNode1">
+    <dgm:scene3d>
+      <a:camera prst="orthographicFront"/>
+      <a:lightRig rig="threePt" dir="t"/>
+    </dgm:scene3d>
+    <dgm:sp3d/>
+    <dgm:txPr/>
+    <dgm:style>
+      <a:lnRef idx="2">
+        <a:scrgbClr r="0" g="0" b="0"/>
+      </a:lnRef>
+      <a:fillRef idx="1">
+        <a:scrgbClr r="0" g="0" b="0"/>
+      </a:fillRef>
+      <a:effectRef idx="0">
+        <a:scrgbClr r="0" g="0" b="0"/>
+      </a:effectRef>
+      <a:fontRef idx="minor"/>
+    </dgm:style>
+  </dgm:styleLbl>
+  <dgm:styleLbl name="alignAccFollowNode1">
+    <dgm:scene3d>
+      <a:camera prst="orthographicFront"/>
+      <a:lightRig rig="threePt" dir="t"/>
+    </dgm:scene3d>
+    <dgm:sp3d/>
+    <dgm:txPr/>
+    <dgm:style>
+      <a:lnRef idx="2">
+        <a:scrgbClr r="0" g="0" b="0"/>
+      </a:lnRef>
+      <a:fillRef idx="1">
+        <a:scrgbClr r="0" g="0" b="0"/>
+      </a:fillRef>
+      <a:effectRef idx="0">
+        <a:scrgbClr r="0" g="0" b="0"/>
+      </a:effectRef>
+      <a:fontRef idx="minor"/>
+    </dgm:style>
+  </dgm:styleLbl>
+  <dgm:styleLbl name="bgAccFollowNode1">
+    <dgm:scene3d>
+      <a:camera prst="orthographicFront"/>
+      <a:lightRig rig="threePt" dir="t"/>
+    </dgm:scene3d>
+    <dgm:sp3d/>
+    <dgm:txPr/>
+    <dgm:style>
+      <a:lnRef idx="2">
+        <a:scrgbClr r="0" g="0" b="0"/>
+      </a:lnRef>
+      <a:fillRef idx="1">
+        <a:scrgbClr r="0" g="0" b="0"/>
+      </a:fillRef>
+      <a:effectRef idx="0">
+        <a:scrgbClr r="0" g="0" b="0"/>
+      </a:effectRef>
+      <a:fontRef idx="minor"/>
+    </dgm:style>
+  </dgm:styleLbl>
+  <dgm:styleLbl name="fgAcc0">
+    <dgm:scene3d>
+      <a:camera prst="orthographicFront"/>
+      <a:lightRig rig="threePt" dir="t"/>
+    </dgm:scene3d>
+    <dgm:sp3d/>
+    <dgm:txPr/>
+    <dgm:style>
+      <a:lnRef idx="2">
+        <a:scrgbClr r="0" g="0" b="0"/>
+      </a:lnRef>
+      <a:fillRef idx="1">
+        <a:scrgbClr r="0" g="0" b="0"/>
+      </a:fillRef>
+      <a:effectRef idx="0">
+        <a:scrgbClr r="0" g="0" b="0"/>
+      </a:effectRef>
+      <a:fontRef idx="minor"/>
+    </dgm:style>
+  </dgm:styleLbl>
+  <dgm:styleLbl name="fgAcc2">
+    <dgm:scene3d>
+      <a:camera prst="orthographicFront"/>
+      <a:lightRig rig="threePt" dir="t"/>
+    </dgm:scene3d>
+    <dgm:sp3d/>
+    <dgm:txPr/>
+    <dgm:style>
+      <a:lnRef idx="2">
+        <a:scrgbClr r="0" g="0" b="0"/>
+      </a:lnRef>
+      <a:fillRef idx="1">
+        <a:scrgbClr r="0" g="0" b="0"/>
+      </a:fillRef>
+      <a:effectRef idx="0">
+        <a:scrgbClr r="0" g="0" b="0"/>
+      </a:effectRef>
+      <a:fontRef idx="minor"/>
+    </dgm:style>
+  </dgm:styleLbl>
+  <dgm:styleLbl name="fgAcc3">
+    <dgm:scene3d>
+      <a:camera prst="orthographicFront"/>
+      <a:lightRig rig="threePt" dir="t"/>
+    </dgm:scene3d>
+    <dgm:sp3d/>
+    <dgm:txPr/>
+    <dgm:style>
+      <a:lnRef idx="2">
+        <a:scrgbClr r="0" g="0" b="0"/>
+      </a:lnRef>
+      <a:fillRef idx="1">
+        <a:scrgbClr r="0" g="0" b="0"/>
+      </a:fillRef>
+      <a:effectRef idx="0">
+        <a:scrgbClr r="0" g="0" b="0"/>
+      </a:effectRef>
+      <a:fontRef idx="minor"/>
+    </dgm:style>
+  </dgm:styleLbl>
+  <dgm:styleLbl name="fgAcc4">
+    <dgm:scene3d>
+      <a:camera prst="orthographicFront"/>
+      <a:lightRig rig="threePt" dir="t"/>
+    </dgm:scene3d>
+    <dgm:sp3d/>
+    <dgm:txPr/>
+    <dgm:style>
+      <a:lnRef idx="2">
+        <a:scrgbClr r="0" g="0" b="0"/>
+      </a:lnRef>
+      <a:fillRef idx="1">
+        <a:scrgbClr r="0" g="0" b="0"/>
+      </a:fillRef>
+      <a:effectRef idx="0">
+        <a:scrgbClr r="0" g="0" b="0"/>
+      </a:effectRef>
+      <a:fontRef idx="minor"/>
+    </dgm:style>
+  </dgm:styleLbl>
+  <dgm:styleLbl name="bgShp">
+    <dgm:scene3d>
+      <a:camera prst="orthographicFront"/>
+      <a:lightRig rig="threePt" dir="t"/>
+    </dgm:scene3d>
+    <dgm:sp3d/>
+    <dgm:txPr/>
+    <dgm:style>
+      <a:lnRef idx="0">
+        <a:scrgbClr r="0" g="0" b="0"/>
+      </a:lnRef>
+      <a:fillRef idx="1">
+        <a:scrgbClr r="0" g="0" b="0"/>
+      </a:fillRef>
+      <a:effectRef idx="0">
+        <a:scrgbClr r="0" g="0" b="0"/>
+      </a:effectRef>
+      <a:fontRef idx="minor"/>
+    </dgm:style>
+  </dgm:styleLbl>
+  <dgm:styleLbl name="dkBgShp">
+    <dgm:scene3d>
+      <a:camera prst="orthographicFront"/>
+      <a:lightRig rig="threePt" dir="t"/>
+    </dgm:scene3d>
+    <dgm:sp3d/>
+    <dgm:txPr/>
+    <dgm:style>
+      <a:lnRef idx="0">
+        <a:scrgbClr r="0" g="0" b="0"/>
+      </a:lnRef>
+      <a:fillRef idx="1">
+        <a:scrgbClr r="0" g="0" b="0"/>
+      </a:fillRef>
+      <a:effectRef idx="0">
+        <a:scrgbClr r="0" g="0" b="0"/>
+      </a:effectRef>
+      <a:fontRef idx="minor"/>
+    </dgm:style>
+  </dgm:styleLbl>
+  <dgm:styleLbl name="trBgShp">
+    <dgm:scene3d>
+      <a:camera prst="orthographicFront"/>
+      <a:lightRig rig="threePt" dir="t"/>
+    </dgm:scene3d>
+    <dgm:sp3d/>
+    <dgm:txPr/>
+    <dgm:style>
+      <a:lnRef idx="0">
+        <a:scrgbClr r="0" g="0" b="0"/>
+      </a:lnRef>
+      <a:fillRef idx="1">
+        <a:scrgbClr r="0" g="0" b="0"/>
+      </a:fillRef>
+      <a:effectRef idx="0">
+        <a:scrgbClr r="0" g="0" b="0"/>
+      </a:effectRef>
+      <a:fontRef idx="minor"/>
+    </dgm:style>
+  </dgm:styleLbl>
+  <dgm:styleLbl name="fgShp">
+    <dgm:scene3d>
+      <a:camera prst="orthographicFront"/>
+      <a:lightRig rig="threePt" dir="t"/>
+    </dgm:scene3d>
+    <dgm:sp3d/>
+    <dgm:txPr/>
+    <dgm:style>
+      <a:lnRef idx="2">
+        <a:scrgbClr r="0" g="0" b="0"/>
+      </a:lnRef>
+      <a:fillRef idx="1">
+        <a:scrgbClr r="0" g="0" b="0"/>
+      </a:fillRef>
+      <a:effectRef idx="0">
+        <a:scrgbClr r="0" g="0" b="0"/>
+      </a:effectRef>
+      <a:fontRef idx="minor"/>
+    </dgm:style>
+  </dgm:styleLbl>
+  <dgm:styleLbl name="revTx">
+    <dgm:scene3d>
+      <a:camera prst="orthographicFront"/>
+      <a:lightRig rig="threePt" dir="t"/>
+    </dgm:scene3d>
+    <dgm:sp3d/>
+    <dgm:txPr/>
+    <dgm:style>
+      <a:lnRef idx="0">
+        <a:scrgbClr r="0" g="0" b="0"/>
+      </a:lnRef>
+      <a:fillRef idx="0">
+        <a:scrgbClr r="0" g="0" b="0"/>
+      </a:fillRef>
+      <a:effectRef idx="0">
+        <a:scrgbClr r="0" g="0" b="0"/>
+      </a:effectRef>
+      <a:fontRef idx="minor"/>
+    </dgm:style>
+  </dgm:styleLbl>
+</dgm:styleDef>
+</file>
+
+<file path=ppt/diagrams/quickStyle2.xml><?xml version="1.0" encoding="utf-8"?>
+<dgm:styleDef xmlns:dgm="http://schemas.openxmlformats.org/drawingml/2006/diagram" xmlns:a="http://schemas.openxmlformats.org/drawingml/2006/main" uniqueId="urn:microsoft.com/office/officeart/2005/8/quickstyle/simple1">
+  <dgm:title val=""/>
+  <dgm:desc val=""/>
+  <dgm:catLst>
+    <dgm:cat type="simple" pri="10100"/>
+  </dgm:catLst>
+  <dgm:scene3d>
+    <a:camera prst="orthographicFront"/>
+    <a:lightRig rig="threePt" dir="t"/>
+  </dgm:scene3d>
+  <dgm:styleLbl name="node0">
+    <dgm:scene3d>
+      <a:camera prst="orthographicFront"/>
+      <a:lightRig rig="threePt" dir="t"/>
+    </dgm:scene3d>
+    <dgm:sp3d/>
+    <dgm:txPr/>
+    <dgm:style>
+      <a:lnRef idx="2">
+        <a:scrgbClr r="0" g="0" b="0"/>
+      </a:lnRef>
+      <a:fillRef idx="1">
+        <a:scrgbClr r="0" g="0" b="0"/>
+      </a:fillRef>
+      <a:effectRef idx="0">
+        <a:scrgbClr r="0" g="0" b="0"/>
+      </a:effectRef>
+      <a:fontRef idx="minor">
+        <a:schemeClr val="lt1"/>
+      </a:fontRef>
+    </dgm:style>
+  </dgm:styleLbl>
+  <dgm:styleLbl name="lnNode1">
+    <dgm:scene3d>
+      <a:camera prst="orthographicFront"/>
+      <a:lightRig rig="threePt" dir="t"/>
+    </dgm:scene3d>
+    <dgm:sp3d/>
+    <dgm:txPr/>
+    <dgm:style>
+      <a:lnRef idx="2">
+        <a:scrgbClr r="0" g="0" b="0"/>
+      </a:lnRef>
+      <a:fillRef idx="1">
+        <a:scrgbClr r="0" g="0" b="0"/>
+      </a:fillRef>
+      <a:effectRef idx="0">
+        <a:scrgbClr r="0" g="0" b="0"/>
+      </a:effectRef>
+      <a:fontRef idx="minor">
+        <a:schemeClr val="lt1"/>
+      </a:fontRef>
+    </dgm:style>
+  </dgm:styleLbl>
+  <dgm:styleLbl name="vennNode1">
+    <dgm:scene3d>
+      <a:camera prst="orthographicFront"/>
+      <a:lightRig rig="threePt" dir="t"/>
+    </dgm:scene3d>
+    <dgm:sp3d/>
+    <dgm:txPr/>
+    <dgm:style>
+      <a:lnRef idx="2">
+        <a:scrgbClr r="0" g="0" b="0"/>
+      </a:lnRef>
+      <a:fillRef idx="1">
+        <a:scrgbClr r="0" g="0" b="0"/>
+      </a:fillRef>
+      <a:effectRef idx="0">
+        <a:scrgbClr r="0" g="0" b="0"/>
+      </a:effectRef>
+      <a:fontRef idx="minor">
+        <a:schemeClr val="tx1"/>
+      </a:fontRef>
+    </dgm:style>
+  </dgm:styleLbl>
+  <dgm:styleLbl name="alignNode1">
+    <dgm:scene3d>
+      <a:camera prst="orthographicFront"/>
+      <a:lightRig rig="threePt" dir="t"/>
+    </dgm:scene3d>
+    <dgm:sp3d/>
+    <dgm:txPr/>
+    <dgm:style>
+      <a:lnRef idx="2">
+        <a:scrgbClr r="0" g="0" b="0"/>
+      </a:lnRef>
+      <a:fillRef idx="1">
+        <a:scrgbClr r="0" g="0" b="0"/>
+      </a:fillRef>
+      <a:effectRef idx="0">
+        <a:scrgbClr r="0" g="0" b="0"/>
+      </a:effectRef>
+      <a:fontRef idx="minor">
+        <a:schemeClr val="lt1"/>
+      </a:fontRef>
+    </dgm:style>
+  </dgm:styleLbl>
+  <dgm:styleLbl name="node1">
+    <dgm:scene3d>
+      <a:camera prst="orthographicFront"/>
+      <a:lightRig rig="threePt" dir="t"/>
+    </dgm:scene3d>
+    <dgm:sp3d/>
+    <dgm:txPr/>
+    <dgm:style>
+      <a:lnRef idx="2">
+        <a:scrgbClr r="0" g="0" b="0"/>
+      </a:lnRef>
+      <a:fillRef idx="1">
+        <a:scrgbClr r="0" g="0" b="0"/>
+      </a:fillRef>
+      <a:effectRef idx="0">
+        <a:scrgbClr r="0" g="0" b="0"/>
+      </a:effectRef>
+      <a:fontRef idx="minor">
+        <a:schemeClr val="lt1"/>
+      </a:fontRef>
+    </dgm:style>
+  </dgm:styleLbl>
+  <dgm:styleLbl name="node2">
+    <dgm:scene3d>
+      <a:camera prst="orthographicFront"/>
+      <a:lightRig rig="threePt" dir="t"/>
+    </dgm:scene3d>
+    <dgm:sp3d/>
+    <dgm:txPr/>
+    <dgm:style>
+      <a:lnRef idx="2">
+        <a:scrgbClr r="0" g="0" b="0"/>
+      </a:lnRef>
+      <a:fillRef idx="1">
+        <a:scrgbClr r="0" g="0" b="0"/>
+      </a:fillRef>
+      <a:effectRef idx="0">
+        <a:scrgbClr r="0" g="0" b="0"/>
+      </a:effectRef>
+      <a:fontRef idx="minor">
+        <a:schemeClr val="lt1"/>
+      </a:fontRef>
+    </dgm:style>
+  </dgm:styleLbl>
+  <dgm:styleLbl name="node3">
+    <dgm:scene3d>
+      <a:camera prst="orthographicFront"/>
+      <a:lightRig rig="threePt" dir="t"/>
+    </dgm:scene3d>
+    <dgm:sp3d/>
+    <dgm:txPr/>
+    <dgm:style>
+      <a:lnRef idx="2">
+        <a:scrgbClr r="0" g="0" b="0"/>
+      </a:lnRef>
+      <a:fillRef idx="1">
+        <a:scrgbClr r="0" g="0" b="0"/>
+      </a:fillRef>
+      <a:effectRef idx="0">
+        <a:scrgbClr r="0" g="0" b="0"/>
+      </a:effectRef>
+      <a:fontRef idx="minor">
+        <a:schemeClr val="lt1"/>
+      </a:fontRef>
+    </dgm:style>
+  </dgm:styleLbl>
+  <dgm:styleLbl name="node4">
+    <dgm:scene3d>
+      <a:camera prst="orthographicFront"/>
+      <a:lightRig rig="threePt" dir="t"/>
+    </dgm:scene3d>
+    <dgm:sp3d/>
+    <dgm:txPr/>
+    <dgm:style>
+      <a:lnRef idx="2">
+        <a:scrgbClr r="0" g="0" b="0"/>
+      </a:lnRef>
+      <a:fillRef idx="1">
+        <a:scrgbClr r="0" g="0" b="0"/>
+      </a:fillRef>
+      <a:effectRef idx="0">
+        <a:scrgbClr r="0" g="0" b="0"/>
+      </a:effectRef>
+      <a:fontRef idx="minor">
+        <a:schemeClr val="lt1"/>
+      </a:fontRef>
+    </dgm:style>
+  </dgm:styleLbl>
+  <dgm:styleLbl name="fgImgPlace1">
+    <dgm:scene3d>
+      <a:camera prst="orthographicFront"/>
+      <a:lightRig rig="threePt" dir="t"/>
+    </dgm:scene3d>
+    <dgm:sp3d/>
+    <dgm:txPr/>
+    <dgm:style>
+      <a:lnRef idx="2">
+        <a:scrgbClr r="0" g="0" b="0"/>
+      </a:lnRef>
+      <a:fillRef idx="1">
+        <a:scrgbClr r="0" g="0" b="0"/>
+      </a:fillRef>
+      <a:effectRef idx="0">
+        <a:scrgbClr r="0" g="0" b="0"/>
+      </a:effectRef>
+      <a:fontRef idx="minor"/>
+    </dgm:style>
+  </dgm:styleLbl>
+  <dgm:styleLbl name="alignImgPlace1">
+    <dgm:scene3d>
+      <a:camera prst="orthographicFront"/>
+      <a:lightRig rig="threePt" dir="t"/>
+    </dgm:scene3d>
+    <dgm:sp3d/>
+    <dgm:txPr/>
+    <dgm:style>
+      <a:lnRef idx="2">
+        <a:scrgbClr r="0" g="0" b="0"/>
+      </a:lnRef>
+      <a:fillRef idx="1">
+        <a:scrgbClr r="0" g="0" b="0"/>
+      </a:fillRef>
+      <a:effectRef idx="0">
+        <a:scrgbClr r="0" g="0" b="0"/>
+      </a:effectRef>
+      <a:fontRef idx="minor"/>
+    </dgm:style>
+  </dgm:styleLbl>
+  <dgm:styleLbl name="bgImgPlace1">
+    <dgm:scene3d>
+      <a:camera prst="orthographicFront"/>
+      <a:lightRig rig="threePt" dir="t"/>
+    </dgm:scene3d>
+    <dgm:sp3d/>
+    <dgm:txPr/>
+    <dgm:style>
+      <a:lnRef idx="2">
+        <a:scrgbClr r="0" g="0" b="0"/>
+      </a:lnRef>
+      <a:fillRef idx="1">
+        <a:scrgbClr r="0" g="0" b="0"/>
+      </a:fillRef>
+      <a:effectRef idx="0">
+        <a:scrgbClr r="0" g="0" b="0"/>
+      </a:effectRef>
+      <a:fontRef idx="minor"/>
+    </dgm:style>
+  </dgm:styleLbl>
+  <dgm:styleLbl name="sibTrans2D1">
+    <dgm:scene3d>
+      <a:camera prst="orthographicFront"/>
+      <a:lightRig rig="threePt" dir="t"/>
+    </dgm:scene3d>
+    <dgm:sp3d/>
+    <dgm:txPr/>
+    <dgm:style>
+      <a:lnRef idx="0">
+        <a:scrgbClr r="0" g="0" b="0"/>
+      </a:lnRef>
+      <a:fillRef idx="1">
+        <a:scrgbClr r="0" g="0" b="0"/>
+      </a:fillRef>
+      <a:effectRef idx="0">
+        <a:scrgbClr r="0" g="0" b="0"/>
+      </a:effectRef>
+      <a:fontRef idx="minor">
+        <a:schemeClr val="lt1"/>
+      </a:fontRef>
+    </dgm:style>
+  </dgm:styleLbl>
+  <dgm:styleLbl name="fgSibTrans2D1">
+    <dgm:scene3d>
+      <a:camera prst="orthographicFront"/>
+      <a:lightRig rig="threePt" dir="t"/>
+    </dgm:scene3d>
+    <dgm:sp3d/>
+    <dgm:txPr/>
+    <dgm:style>
+      <a:lnRef idx="0">
+        <a:scrgbClr r="0" g="0" b="0"/>
+      </a:lnRef>
+      <a:fillRef idx="1">
+        <a:scrgbClr r="0" g="0" b="0"/>
+      </a:fillRef>
+      <a:effectRef idx="0">
+        <a:scrgbClr r="0" g="0" b="0"/>
+      </a:effectRef>
+      <a:fontRef idx="minor">
+        <a:schemeClr val="lt1"/>
+      </a:fontRef>
+    </dgm:style>
+  </dgm:styleLbl>
+  <dgm:styleLbl name="bgSibTrans2D1">
+    <dgm:scene3d>
+      <a:camera prst="orthographicFront"/>
+      <a:lightRig rig="threePt" dir="t"/>
+    </dgm:scene3d>
+    <dgm:sp3d/>
+    <dgm:txPr/>
+    <dgm:style>
+      <a:lnRef idx="0">
+        <a:scrgbClr r="0" g="0" b="0"/>
+      </a:lnRef>
+      <a:fillRef idx="1">
+        <a:scrgbClr r="0" g="0" b="0"/>
+      </a:fillRef>
+      <a:effectRef idx="0">
+        <a:scrgbClr r="0" g="0" b="0"/>
+      </a:effectRef>
+      <a:fontRef idx="minor">
+        <a:schemeClr val="lt1"/>
+      </a:fontRef>
+    </dgm:style>
+  </dgm:styleLbl>
+  <dgm:styleLbl name="sibTrans1D1">
+    <dgm:scene3d>
+      <a:camera prst="orthographicFront"/>
+      <a:lightRig rig="threePt" dir="t"/>
+    </dgm:scene3d>
+    <dgm:sp3d/>
+    <dgm:txPr/>
+    <dgm:style>
+      <a:lnRef idx="1">
+        <a:scrgbClr r="0" g="0" b="0"/>
+      </a:lnRef>
+      <a:fillRef idx="0">
+        <a:scrgbClr r="0" g="0" b="0"/>
+      </a:fillRef>
+      <a:effectRef idx="0">
+        <a:scrgbClr r="0" g="0" b="0"/>
+      </a:effectRef>
+      <a:fontRef idx="minor"/>
+    </dgm:style>
+  </dgm:styleLbl>
+  <dgm:styleLbl name="callout">
+    <dgm:scene3d>
+      <a:camera prst="orthographicFront"/>
+      <a:lightRig rig="threePt" dir="t"/>
+    </dgm:scene3d>
+    <dgm:sp3d/>
+    <dgm:txPr/>
+    <dgm:style>
+      <a:lnRef idx="2">
+        <a:scrgbClr r="0" g="0" b="0"/>
+      </a:lnRef>
+      <a:fillRef idx="1">
+        <a:scrgbClr r="0" g="0" b="0"/>
+      </a:fillRef>
+      <a:effectRef idx="0">
+        <a:scrgbClr r="0" g="0" b="0"/>
+      </a:effectRef>
+      <a:fontRef idx="minor"/>
+    </dgm:style>
+  </dgm:styleLbl>
+  <dgm:styleLbl name="asst0">
+    <dgm:scene3d>
+      <a:camera prst="orthographicFront"/>
+      <a:lightRig rig="threePt" dir="t"/>
+    </dgm:scene3d>
+    <dgm:sp3d/>
+    <dgm:txPr/>
+    <dgm:style>
+      <a:lnRef idx="2">
+        <a:scrgbClr r="0" g="0" b="0"/>
+      </a:lnRef>
+      <a:fillRef idx="1">
+        <a:scrgbClr r="0" g="0" b="0"/>
+      </a:fillRef>
+      <a:effectRef idx="0">
+        <a:scrgbClr r="0" g="0" b="0"/>
+      </a:effectRef>
+      <a:fontRef idx="minor">
+        <a:schemeClr val="lt1"/>
+      </a:fontRef>
+    </dgm:style>
+  </dgm:styleLbl>
+  <dgm:styleLbl name="asst1">
+    <dgm:scene3d>
+      <a:camera prst="orthographicFront"/>
+      <a:lightRig rig="threePt" dir="t"/>
+    </dgm:scene3d>
+    <dgm:sp3d/>
+    <dgm:txPr/>
+    <dgm:style>
+      <a:lnRef idx="2">
+        <a:scrgbClr r="0" g="0" b="0"/>
+      </a:lnRef>
+      <a:fillRef idx="1">
+        <a:scrgbClr r="0" g="0" b="0"/>
+      </a:fillRef>
+      <a:effectRef idx="0">
+        <a:scrgbClr r="0" g="0" b="0"/>
+      </a:effectRef>
+      <a:fontRef idx="minor">
+        <a:schemeClr val="lt1"/>
+      </a:fontRef>
+    </dgm:style>
+  </dgm:styleLbl>
+  <dgm:styleLbl name="asst2">
+    <dgm:scene3d>
+      <a:camera prst="orthographicFront"/>
+      <a:lightRig rig="threePt" dir="t"/>
+    </dgm:scene3d>
+    <dgm:sp3d/>
+    <dgm:txPr/>
+    <dgm:style>
+      <a:lnRef idx="2">
+        <a:scrgbClr r="0" g="0" b="0"/>
+      </a:lnRef>
+      <a:fillRef idx="1">
+        <a:scrgbClr r="0" g="0" b="0"/>
+      </a:fillRef>
+      <a:effectRef idx="0">
+        <a:scrgbClr r="0" g="0" b="0"/>
+      </a:effectRef>
+      <a:fontRef idx="minor">
+        <a:schemeClr val="lt1"/>
+      </a:fontRef>
+    </dgm:style>
+  </dgm:styleLbl>
+  <dgm:styleLbl name="asst3">
+    <dgm:scene3d>
+      <a:camera prst="orthographicFront"/>
+      <a:lightRig rig="threePt" dir="t"/>
+    </dgm:scene3d>
+    <dgm:sp3d/>
+    <dgm:txPr/>
+    <dgm:style>
+      <a:lnRef idx="2">
+        <a:scrgbClr r="0" g="0" b="0"/>
+      </a:lnRef>
+      <a:fillRef idx="1">
+        <a:scrgbClr r="0" g="0" b="0"/>
+      </a:fillRef>
+      <a:effectRef idx="0">
+        <a:scrgbClr r="0" g="0" b="0"/>
+      </a:effectRef>
+      <a:fontRef idx="minor">
+        <a:schemeClr val="lt1"/>
+      </a:fontRef>
+    </dgm:style>
+  </dgm:styleLbl>
+  <dgm:styleLbl name="asst4">
+    <dgm:scene3d>
+      <a:camera prst="orthographicFront"/>
+      <a:lightRig rig="threePt" dir="t"/>
+    </dgm:scene3d>
+    <dgm:sp3d/>
+    <dgm:txPr/>
+    <dgm:style>
+      <a:lnRef idx="2">
+        <a:scrgbClr r="0" g="0" b="0"/>
+      </a:lnRef>
+      <a:fillRef idx="1">
+        <a:scrgbClr r="0" g="0" b="0"/>
+      </a:fillRef>
+      <a:effectRef idx="0">
+        <a:scrgbClr r="0" g="0" b="0"/>
+      </a:effectRef>
+      <a:fontRef idx="minor">
+        <a:schemeClr val="lt1"/>
+      </a:fontRef>
+    </dgm:style>
+  </dgm:styleLbl>
+  <dgm:styleLbl name="parChTrans2D1">
+    <dgm:scene3d>
+      <a:camera prst="orthographicFront"/>
+      <a:lightRig rig="threePt" dir="t"/>
+    </dgm:scene3d>
+    <dgm:sp3d/>
+    <dgm:txPr/>
+    <dgm:style>
+      <a:lnRef idx="2">
+        <a:scrgbClr r="0" g="0" b="0"/>
+      </a:lnRef>
+      <a:fillRef idx="1">
+        <a:scrgbClr r="0" g="0" b="0"/>
+      </a:fillRef>
+      <a:effectRef idx="0">
+        <a:scrgbClr r="0" g="0" b="0"/>
+      </a:effectRef>
+      <a:fontRef idx="minor">
+        <a:schemeClr val="lt1"/>
+      </a:fontRef>
+    </dgm:style>
+  </dgm:styleLbl>
+  <dgm:styleLbl name="parChTrans2D2">
+    <dgm:scene3d>
+      <a:camera prst="orthographicFront"/>
+      <a:lightRig rig="threePt" dir="t"/>
+    </dgm:scene3d>
+    <dgm:sp3d/>
+    <dgm:txPr/>
+    <dgm:style>
+      <a:lnRef idx="2">
+        <a:scrgbClr r="0" g="0" b="0"/>
+      </a:lnRef>
+      <a:fillRef idx="1">
+        <a:scrgbClr r="0" g="0" b="0"/>
+      </a:fillRef>
+      <a:effectRef idx="0">
+        <a:scrgbClr r="0" g="0" b="0"/>
+      </a:effectRef>
+      <a:fontRef idx="minor">
+        <a:schemeClr val="lt1"/>
+      </a:fontRef>
+    </dgm:style>
+  </dgm:styleLbl>
+  <dgm:styleLbl name="parChTrans2D3">
+    <dgm:scene3d>
+      <a:camera prst="orthographicFront"/>
+      <a:lightRig rig="threePt" dir="t"/>
+    </dgm:scene3d>
+    <dgm:sp3d/>
+    <dgm:txPr/>
+    <dgm:style>
+      <a:lnRef idx="2">
+        <a:scrgbClr r="0" g="0" b="0"/>
+      </a:lnRef>
+      <a:fillRef idx="1">
+        <a:scrgbClr r="0" g="0" b="0"/>
+      </a:fillRef>
+      <a:effectRef idx="0">
+        <a:scrgbClr r="0" g="0" b="0"/>
+      </a:effectRef>
+      <a:fontRef idx="minor">
+        <a:schemeClr val="lt1"/>
+      </a:fontRef>
+    </dgm:style>
+  </dgm:styleLbl>
+  <dgm:styleLbl name="parChTrans2D4">
+    <dgm:scene3d>
+      <a:camera prst="orthographicFront"/>
+      <a:lightRig rig="threePt" dir="t"/>
+    </dgm:scene3d>
+    <dgm:sp3d/>
+    <dgm:txPr/>
+    <dgm:style>
+      <a:lnRef idx="2">
+        <a:scrgbClr r="0" g="0" b="0"/>
+      </a:lnRef>
+      <a:fillRef idx="1">
+        <a:scrgbClr r="0" g="0" b="0"/>
+      </a:fillRef>
+      <a:effectRef idx="0">
+        <a:scrgbClr r="0" g="0" b="0"/>
+      </a:effectRef>
+      <a:fontRef idx="minor">
+        <a:schemeClr val="lt1"/>
+      </a:fontRef>
+    </dgm:style>
+  </dgm:styleLbl>
+  <dgm:styleLbl name="parChTrans1D1">
+    <dgm:scene3d>
+      <a:camera prst="orthographicFront"/>
+      <a:lightRig rig="threePt" dir="t"/>
+    </dgm:scene3d>
+    <dgm:sp3d/>
+    <dgm:txPr/>
+    <dgm:style>
+      <a:lnRef idx="2">
+        <a:scrgbClr r="0" g="0" b="0"/>
+      </a:lnRef>
+      <a:fillRef idx="0">
+        <a:scrgbClr r="0" g="0" b="0"/>
+      </a:fillRef>
+      <a:effectRef idx="0">
+        <a:scrgbClr r="0" g="0" b="0"/>
+      </a:effectRef>
+      <a:fontRef idx="minor"/>
+    </dgm:style>
+  </dgm:styleLbl>
+  <dgm:styleLbl name="parChTrans1D2">
+    <dgm:scene3d>
+      <a:camera prst="orthographicFront"/>
+      <a:lightRig rig="threePt" dir="t"/>
+    </dgm:scene3d>
+    <dgm:sp3d/>
+    <dgm:txPr/>
+    <dgm:style>
+      <a:lnRef idx="2">
+        <a:scrgbClr r="0" g="0" b="0"/>
+      </a:lnRef>
+      <a:fillRef idx="0">
+        <a:scrgbClr r="0" g="0" b="0"/>
+      </a:fillRef>
+      <a:effectRef idx="0">
+        <a:scrgbClr r="0" g="0" b="0"/>
+      </a:effectRef>
+      <a:fontRef idx="minor"/>
+    </dgm:style>
+  </dgm:styleLbl>
+  <dgm:styleLbl name="parChTrans1D3">
+    <dgm:scene3d>
+      <a:camera prst="orthographicFront"/>
+      <a:lightRig rig="threePt" dir="t"/>
+    </dgm:scene3d>
+    <dgm:sp3d/>
+    <dgm:txPr/>
+    <dgm:style>
+      <a:lnRef idx="2">
+        <a:scrgbClr r="0" g="0" b="0"/>
+      </a:lnRef>
+      <a:fillRef idx="0">
+        <a:scrgbClr r="0" g="0" b="0"/>
+      </a:fillRef>
+      <a:effectRef idx="0">
+        <a:scrgbClr r="0" g="0" b="0"/>
+      </a:effectRef>
+      <a:fontRef idx="minor"/>
+    </dgm:style>
+  </dgm:styleLbl>
+  <dgm:styleLbl name="parChTrans1D4">
+    <dgm:scene3d>
+      <a:camera prst="orthographicFront"/>
+      <a:lightRig rig="threePt" dir="t"/>
+    </dgm:scene3d>
+    <dgm:sp3d/>
+    <dgm:txPr/>
+    <dgm:style>
+      <a:lnRef idx="2">
+        <a:scrgbClr r="0" g="0" b="0"/>
+      </a:lnRef>
+      <a:fillRef idx="0">
+        <a:scrgbClr r="0" g="0" b="0"/>
+      </a:fillRef>
+      <a:effectRef idx="0">
+        <a:scrgbClr r="0" g="0" b="0"/>
+      </a:effectRef>
+      <a:fontRef idx="minor"/>
+    </dgm:style>
+  </dgm:styleLbl>
+  <dgm:styleLbl name="fgAcc1">
+    <dgm:scene3d>
+      <a:camera prst="orthographicFront"/>
+      <a:lightRig rig="threePt" dir="t"/>
+    </dgm:scene3d>
+    <dgm:sp3d/>
+    <dgm:txPr/>
+    <dgm:style>
+      <a:lnRef idx="2">
+        <a:scrgbClr r="0" g="0" b="0"/>
+      </a:lnRef>
+      <a:fillRef idx="1">
+        <a:scrgbClr r="0" g="0" b="0"/>
+      </a:fillRef>
+      <a:effectRef idx="0">
+        <a:scrgbClr r="0" g="0" b="0"/>
+      </a:effectRef>
+      <a:fontRef idx="minor"/>
+    </dgm:style>
+  </dgm:styleLbl>
+  <dgm:styleLbl name="conFgAcc1">
+    <dgm:scene3d>
+      <a:camera prst="orthographicFront"/>
+      <a:lightRig rig="threePt" dir="t"/>
+    </dgm:scene3d>
+    <dgm:sp3d/>
+    <dgm:txPr/>
+    <dgm:style>
+      <a:lnRef idx="2">
+        <a:scrgbClr r="0" g="0" b="0"/>
+      </a:lnRef>
+      <a:fillRef idx="1">
+        <a:scrgbClr r="0" g="0" b="0"/>
+      </a:fillRef>
+      <a:effectRef idx="0">
+        <a:scrgbClr r="0" g="0" b="0"/>
+      </a:effectRef>
+      <a:fontRef idx="minor"/>
+    </dgm:style>
+  </dgm:styleLbl>
+  <dgm:styleLbl name="alignAcc1">
+    <dgm:scene3d>
+      <a:camera prst="orthographicFront"/>
+      <a:lightRig rig="threePt" dir="t"/>
+    </dgm:scene3d>
+    <dgm:sp3d/>
+    <dgm:txPr/>
+    <dgm:style>
+      <a:lnRef idx="2">
+        <a:scrgbClr r="0" g="0" b="0"/>
+      </a:lnRef>
+      <a:fillRef idx="1">
+        <a:scrgbClr r="0" g="0" b="0"/>
+      </a:fillRef>
+      <a:effectRef idx="0">
+        <a:scrgbClr r="0" g="0" b="0"/>
+      </a:effectRef>
+      <a:fontRef idx="minor"/>
+    </dgm:style>
+  </dgm:styleLbl>
+  <dgm:styleLbl name="trAlignAcc1">
+    <dgm:scene3d>
+      <a:camera prst="orthographicFront"/>
+      <a:lightRig rig="threePt" dir="t"/>
+    </dgm:scene3d>
+    <dgm:sp3d/>
+    <dgm:txPr/>
+    <dgm:style>
+      <a:lnRef idx="1">
+        <a:scrgbClr r="0" g="0" b="0"/>
+      </a:lnRef>
+      <a:fillRef idx="1">
+        <a:scrgbClr r="0" g="0" b="0"/>
+      </a:fillRef>
+      <a:effectRef idx="0">
+        <a:scrgbClr r="0" g="0" b="0"/>
+      </a:effectRef>
+      <a:fontRef idx="minor"/>
+    </dgm:style>
+  </dgm:styleLbl>
+  <dgm:styleLbl name="bgAcc1">
+    <dgm:scene3d>
+      <a:camera prst="orthographicFront"/>
+      <a:lightRig rig="threePt" dir="t"/>
+    </dgm:scene3d>
+    <dgm:sp3d/>
+    <dgm:txPr/>
+    <dgm:style>
+      <a:lnRef idx="2">
+        <a:scrgbClr r="0" g="0" b="0"/>
+      </a:lnRef>
+      <a:fillRef idx="1">
+        <a:scrgbClr r="0" g="0" b="0"/>
+      </a:fillRef>
+      <a:effectRef idx="0">
+        <a:scrgbClr r="0" g="0" b="0"/>
+      </a:effectRef>
+      <a:fontRef idx="minor"/>
+    </dgm:style>
+  </dgm:styleLbl>
+  <dgm:styleLbl name="solidFgAcc1">
+    <dgm:scene3d>
+      <a:camera prst="orthographicFront"/>
+      <a:lightRig rig="threePt" dir="t"/>
+    </dgm:scene3d>
+    <dgm:sp3d/>
+    <dgm:txPr/>
+    <dgm:style>
+      <a:lnRef idx="2">
+        <a:scrgbClr r="0" g="0" b="0"/>
+      </a:lnRef>
+      <a:fillRef idx="1">
+        <a:scrgbClr r="0" g="0" b="0"/>
+      </a:fillRef>
+      <a:effectRef idx="0">
+        <a:scrgbClr r="0" g="0" b="0"/>
+      </a:effectRef>
+      <a:fontRef idx="minor"/>
+    </dgm:style>
+  </dgm:styleLbl>
+  <dgm:styleLbl name="solidAlignAcc1">
+    <dgm:scene3d>
+      <a:camera prst="orthographicFront"/>
+      <a:lightRig rig="threePt" dir="t"/>
+    </dgm:scene3d>
+    <dgm:sp3d/>
+    <dgm:txPr/>
+    <dgm:style>
+      <a:lnRef idx="2">
+        <a:scrgbClr r="0" g="0" b="0"/>
+      </a:lnRef>
+      <a:fillRef idx="1">
+        <a:scrgbClr r="0" g="0" b="0"/>
+      </a:fillRef>
+      <a:effectRef idx="0">
+        <a:scrgbClr r="0" g="0" b="0"/>
+      </a:effectRef>
+      <a:fontRef idx="minor"/>
+    </dgm:style>
+  </dgm:styleLbl>
+  <dgm:styleLbl name="solidBgAcc1">
+    <dgm:scene3d>
+      <a:camera prst="orthographicFront"/>
+      <a:lightRig rig="threePt" dir="t"/>
+    </dgm:scene3d>
+    <dgm:sp3d/>
+    <dgm:txPr/>
+    <dgm:style>
+      <a:lnRef idx="2">
+        <a:scrgbClr r="0" g="0" b="0"/>
+      </a:lnRef>
+      <a:fillRef idx="1">
+        <a:scrgbClr r="0" g="0" b="0"/>
+      </a:fillRef>
+      <a:effectRef idx="0">
+        <a:scrgbClr r="0" g="0" b="0"/>
+      </a:effectRef>
+      <a:fontRef idx="minor"/>
+    </dgm:style>
+  </dgm:styleLbl>
+  <dgm:styleLbl name="fgAccFollowNode1">
+    <dgm:scene3d>
+      <a:camera prst="orthographicFront"/>
+      <a:lightRig rig="threePt" dir="t"/>
+    </dgm:scene3d>
+    <dgm:sp3d/>
+    <dgm:txPr/>
+    <dgm:style>
+      <a:lnRef idx="2">
+        <a:scrgbClr r="0" g="0" b="0"/>
+      </a:lnRef>
+      <a:fillRef idx="1">
+        <a:scrgbClr r="0" g="0" b="0"/>
+      </a:fillRef>
+      <a:effectRef idx="0">
+        <a:scrgbClr r="0" g="0" b="0"/>
+      </a:effectRef>
+      <a:fontRef idx="minor"/>
+    </dgm:style>
+  </dgm:styleLbl>
+  <dgm:styleLbl name="alignAccFollowNode1">
+    <dgm:scene3d>
+      <a:camera prst="orthographicFront"/>
+      <a:lightRig rig="threePt" dir="t"/>
+    </dgm:scene3d>
+    <dgm:sp3d/>
+    <dgm:txPr/>
+    <dgm:style>
+      <a:lnRef idx="2">
+        <a:scrgbClr r="0" g="0" b="0"/>
+      </a:lnRef>
+      <a:fillRef idx="1">
+        <a:scrgbClr r="0" g="0" b="0"/>
+      </a:fillRef>
+      <a:effectRef idx="0">
+        <a:scrgbClr r="0" g="0" b="0"/>
+      </a:effectRef>
+      <a:fontRef idx="minor"/>
+    </dgm:style>
+  </dgm:styleLbl>
+  <dgm:styleLbl name="bgAccFollowNode1">
+    <dgm:scene3d>
+      <a:camera prst="orthographicFront"/>
+      <a:lightRig rig="threePt" dir="t"/>
+    </dgm:scene3d>
+    <dgm:sp3d/>
+    <dgm:txPr/>
+    <dgm:style>
+      <a:lnRef idx="2">
+        <a:scrgbClr r="0" g="0" b="0"/>
+      </a:lnRef>
+      <a:fillRef idx="1">
+        <a:scrgbClr r="0" g="0" b="0"/>
+      </a:fillRef>
+      <a:effectRef idx="0">
+        <a:scrgbClr r="0" g="0" b="0"/>
+      </a:effectRef>
+      <a:fontRef idx="minor"/>
+    </dgm:style>
+  </dgm:styleLbl>
+  <dgm:styleLbl name="fgAcc0">
+    <dgm:scene3d>
+      <a:camera prst="orthographicFront"/>
+      <a:lightRig rig="threePt" dir="t"/>
+    </dgm:scene3d>
+    <dgm:sp3d/>
+    <dgm:txPr/>
+    <dgm:style>
+      <a:lnRef idx="2">
+        <a:scrgbClr r="0" g="0" b="0"/>
+      </a:lnRef>
+      <a:fillRef idx="1">
+        <a:scrgbClr r="0" g="0" b="0"/>
+      </a:fillRef>
+      <a:effectRef idx="0">
+        <a:scrgbClr r="0" g="0" b="0"/>
+      </a:effectRef>
+      <a:fontRef idx="minor"/>
+    </dgm:style>
+  </dgm:styleLbl>
+  <dgm:styleLbl name="fgAcc2">
+    <dgm:scene3d>
+      <a:camera prst="orthographicFront"/>
+      <a:lightRig rig="threePt" dir="t"/>
+    </dgm:scene3d>
+    <dgm:sp3d/>
+    <dgm:txPr/>
+    <dgm:style>
+      <a:lnRef idx="2">
+        <a:scrgbClr r="0" g="0" b="0"/>
+      </a:lnRef>
+      <a:fillRef idx="1">
+        <a:scrgbClr r="0" g="0" b="0"/>
+      </a:fillRef>
+      <a:effectRef idx="0">
+        <a:scrgbClr r="0" g="0" b="0"/>
+      </a:effectRef>
+      <a:fontRef idx="minor"/>
+    </dgm:style>
+  </dgm:styleLbl>
+  <dgm:styleLbl name="fgAcc3">
+    <dgm:scene3d>
+      <a:camera prst="orthographicFront"/>
+      <a:lightRig rig="threePt" dir="t"/>
+    </dgm:scene3d>
+    <dgm:sp3d/>
+    <dgm:txPr/>
+    <dgm:style>
+      <a:lnRef idx="2">
+        <a:scrgbClr r="0" g="0" b="0"/>
+      </a:lnRef>
+      <a:fillRef idx="1">
+        <a:scrgbClr r="0" g="0" b="0"/>
+      </a:fillRef>
+      <a:effectRef idx="0">
+        <a:scrgbClr r="0" g="0" b="0"/>
+      </a:effectRef>
+      <a:fontRef idx="minor"/>
+    </dgm:style>
+  </dgm:styleLbl>
+  <dgm:styleLbl name="fgAcc4">
+    <dgm:scene3d>
+      <a:camera prst="orthographicFront"/>
+      <a:lightRig rig="threePt" dir="t"/>
+    </dgm:scene3d>
+    <dgm:sp3d/>
+    <dgm:txPr/>
+    <dgm:style>
+      <a:lnRef idx="2">
+        <a:scrgbClr r="0" g="0" b="0"/>
+      </a:lnRef>
+      <a:fillRef idx="1">
+        <a:scrgbClr r="0" g="0" b="0"/>
+      </a:fillRef>
+      <a:effectRef idx="0">
+        <a:scrgbClr r="0" g="0" b="0"/>
+      </a:effectRef>
+      <a:fontRef idx="minor"/>
+    </dgm:style>
+  </dgm:styleLbl>
+  <dgm:styleLbl name="bgShp">
+    <dgm:scene3d>
+      <a:camera prst="orthographicFront"/>
+      <a:lightRig rig="threePt" dir="t"/>
+    </dgm:scene3d>
+    <dgm:sp3d/>
+    <dgm:txPr/>
+    <dgm:style>
+      <a:lnRef idx="0">
+        <a:scrgbClr r="0" g="0" b="0"/>
+      </a:lnRef>
+      <a:fillRef idx="1">
+        <a:scrgbClr r="0" g="0" b="0"/>
+      </a:fillRef>
+      <a:effectRef idx="0">
+        <a:scrgbClr r="0" g="0" b="0"/>
+      </a:effectRef>
+      <a:fontRef idx="minor"/>
+    </dgm:style>
+  </dgm:styleLbl>
+  <dgm:styleLbl name="dkBgShp">
+    <dgm:scene3d>
+      <a:camera prst="orthographicFront"/>
+      <a:lightRig rig="threePt" dir="t"/>
+    </dgm:scene3d>
+    <dgm:sp3d/>
+    <dgm:txPr/>
+    <dgm:style>
+      <a:lnRef idx="0">
+        <a:scrgbClr r="0" g="0" b="0"/>
+      </a:lnRef>
+      <a:fillRef idx="1">
+        <a:scrgbClr r="0" g="0" b="0"/>
+      </a:fillRef>
+      <a:effectRef idx="0">
+        <a:scrgbClr r="0" g="0" b="0"/>
+      </a:effectRef>
+      <a:fontRef idx="minor"/>
+    </dgm:style>
+  </dgm:styleLbl>
+  <dgm:styleLbl name="trBgShp">
+    <dgm:scene3d>
+      <a:camera prst="orthographicFront"/>
+      <a:lightRig rig="threePt" dir="t"/>
+    </dgm:scene3d>
+    <dgm:sp3d/>
+    <dgm:txPr/>
+    <dgm:style>
+      <a:lnRef idx="0">
+        <a:scrgbClr r="0" g="0" b="0"/>
+      </a:lnRef>
+      <a:fillRef idx="1">
+        <a:scrgbClr r="0" g="0" b="0"/>
+      </a:fillRef>
+      <a:effectRef idx="0">
+        <a:scrgbClr r="0" g="0" b="0"/>
+      </a:effectRef>
+      <a:fontRef idx="minor"/>
+    </dgm:style>
+  </dgm:styleLbl>
+  <dgm:styleLbl name="fgShp">
+    <dgm:scene3d>
+      <a:camera prst="orthographicFront"/>
+      <a:lightRig rig="threePt" dir="t"/>
+    </dgm:scene3d>
+    <dgm:sp3d/>
+    <dgm:txPr/>
+    <dgm:style>
+      <a:lnRef idx="2">
+        <a:scrgbClr r="0" g="0" b="0"/>
+      </a:lnRef>
+      <a:fillRef idx="1">
+        <a:scrgbClr r="0" g="0" b="0"/>
+      </a:fillRef>
+      <a:effectRef idx="0">
+        <a:scrgbClr r="0" g="0" b="0"/>
+      </a:effectRef>
+      <a:fontRef idx="minor"/>
+    </dgm:style>
+  </dgm:styleLbl>
+  <dgm:styleLbl name="revTx">
+    <dgm:scene3d>
+      <a:camera prst="orthographicFront"/>
+      <a:lightRig rig="threePt" dir="t"/>
+    </dgm:scene3d>
+    <dgm:sp3d/>
+    <dgm:txPr/>
+    <dgm:style>
+      <a:lnRef idx="0">
+        <a:scrgbClr r="0" g="0" b="0"/>
+      </a:lnRef>
+      <a:fillRef idx="0">
+        <a:scrgbClr r="0" g="0" b="0"/>
+      </a:fillRef>
+      <a:effectRef idx="0">
+        <a:scrgbClr r="0" g="0" b="0"/>
+      </a:effectRef>
+      <a:fontRef idx="minor"/>
+    </dgm:style>
+  </dgm:styleLbl>
+</dgm:styleDef>
 </file>
 
 <file path=ppt/slideLayouts/slideLayout1.xml><?xml version="1.0" encoding="utf-8"?>
@@ -4894,10 +10909,1630 @@
           </a:prstGeom>
         </p:spPr>
       </p:pic>
+      <p:sp>
+        <p:nvSpPr>
+          <p:cNvPr id="10" name="TextBox 9">
+            <a:extLst>
+              <a:ext uri="{FF2B5EF4-FFF2-40B4-BE49-F238E27FC236}">
+                <a16:creationId xmlns:a16="http://schemas.microsoft.com/office/drawing/2014/main" id="{9FAFD75E-559A-9EFB-1A46-4EF9BE059EE0}"/>
+              </a:ext>
+            </a:extLst>
+          </p:cNvPr>
+          <p:cNvSpPr txBox="1"/>
+          <p:nvPr/>
+        </p:nvSpPr>
+        <p:spPr>
+          <a:xfrm>
+            <a:off x="330691" y="3428997"/>
+            <a:ext cx="6096000" cy="2031325"/>
+          </a:xfrm>
+          <a:prstGeom prst="rect">
+            <a:avLst/>
+          </a:prstGeom>
+          <a:noFill/>
+        </p:spPr>
+        <p:txBody>
+          <a:bodyPr wrap="square">
+            <a:spAutoFit/>
+          </a:bodyPr>
+          <a:lstStyle/>
+          <a:p>
+            <a:pPr algn="just"/>
+            <a:r>
+              <a:rPr lang="es-MX" dirty="0"/>
+              <a:t>El EDA confirma que el </a:t>
+            </a:r>
+            <a:r>
+              <a:rPr lang="es-MX" dirty="0" err="1"/>
+              <a:t>dataset</a:t>
+            </a:r>
+            <a:r>
+              <a:rPr lang="es-MX" dirty="0"/>
+              <a:t> seleccionado captura perfectamente el desabasto logístico y la volatilidad del consumidor guatemalteco. Las palabras clave son operativos y el sentimiento negativo es lo suficientemente fuerte para ser detectado. La calidad del texto es alta, validando la viabilidad técnica para pasar inmediatamente a la fase de modelado de IA.</a:t>
+            </a:r>
+            <a:endParaRPr lang="es-GT" dirty="0"/>
+          </a:p>
+        </p:txBody>
+      </p:sp>
     </p:spTree>
     <p:extLst>
       <p:ext uri="{BB962C8B-B14F-4D97-AF65-F5344CB8AC3E}">
         <p14:creationId xmlns:p14="http://schemas.microsoft.com/office/powerpoint/2010/main" val="1880770791"/>
+      </p:ext>
+    </p:extLst>
+  </p:cSld>
+  <p:clrMapOvr>
+    <a:masterClrMapping/>
+  </p:clrMapOvr>
+  <p:timing>
+    <p:tnLst>
+      <p:par>
+        <p:cTn id="1" dur="indefinite" restart="never" nodeType="tmRoot">
+          <p:childTnLst>
+            <p:seq concurrent="1" nextAc="seek">
+              <p:cTn id="2" dur="indefinite" nodeType="mainSeq">
+                <p:childTnLst>
+                  <p:par>
+                    <p:cTn id="3" fill="hold">
+                      <p:stCondLst>
+                        <p:cond delay="indefinite"/>
+                        <p:cond evt="onBegin" delay="0">
+                          <p:tn val="2"/>
+                        </p:cond>
+                      </p:stCondLst>
+                      <p:childTnLst>
+                        <p:par>
+                          <p:cTn id="4" fill="hold">
+                            <p:stCondLst>
+                              <p:cond delay="0"/>
+                            </p:stCondLst>
+                            <p:childTnLst>
+                              <p:par>
+                                <p:cTn id="5" presetID="10" presetClass="entr" presetSubtype="0" fill="hold" grpId="0" nodeType="withEffect">
+                                  <p:stCondLst>
+                                    <p:cond delay="1000"/>
+                                  </p:stCondLst>
+                                  <p:iterate type="lt">
+                                    <p:tmPct val="10000"/>
+                                  </p:iterate>
+                                  <p:childTnLst>
+                                    <p:set>
+                                      <p:cBhvr>
+                                        <p:cTn id="6" dur="1" fill="hold">
+                                          <p:stCondLst>
+                                            <p:cond delay="0"/>
+                                          </p:stCondLst>
+                                        </p:cTn>
+                                        <p:tgtEl>
+                                          <p:spTgt spid="2"/>
+                                        </p:tgtEl>
+                                        <p:attrNameLst>
+                                          <p:attrName>style.visibility</p:attrName>
+                                        </p:attrNameLst>
+                                      </p:cBhvr>
+                                      <p:to>
+                                        <p:strVal val="visible"/>
+                                      </p:to>
+                                    </p:set>
+                                    <p:animEffect transition="in" filter="fade">
+                                      <p:cBhvr>
+                                        <p:cTn id="7" dur="400"/>
+                                        <p:tgtEl>
+                                          <p:spTgt spid="2"/>
+                                        </p:tgtEl>
+                                      </p:cBhvr>
+                                    </p:animEffect>
+                                  </p:childTnLst>
+                                </p:cTn>
+                              </p:par>
+                            </p:childTnLst>
+                          </p:cTn>
+                        </p:par>
+                      </p:childTnLst>
+                    </p:cTn>
+                  </p:par>
+                </p:childTnLst>
+              </p:cTn>
+              <p:prevCondLst>
+                <p:cond evt="onPrev" delay="0">
+                  <p:tgtEl>
+                    <p:sldTgt/>
+                  </p:tgtEl>
+                </p:cond>
+              </p:prevCondLst>
+              <p:nextCondLst>
+                <p:cond evt="onNext" delay="0">
+                  <p:tgtEl>
+                    <p:sldTgt/>
+                  </p:tgtEl>
+                </p:cond>
+              </p:nextCondLst>
+            </p:seq>
+          </p:childTnLst>
+        </p:cTn>
+      </p:par>
+    </p:tnLst>
+    <p:bldLst>
+      <p:bldP spid="2" grpId="0"/>
+    </p:bldLst>
+  </p:timing>
+</p:sld>
+</file>
+
+<file path=ppt/slides/slide5.xml><?xml version="1.0" encoding="utf-8"?>
+<p:sld xmlns:a="http://schemas.openxmlformats.org/drawingml/2006/main" xmlns:r="http://schemas.openxmlformats.org/officeDocument/2006/relationships" xmlns:p="http://schemas.openxmlformats.org/presentationml/2006/main">
+  <p:cSld>
+    <p:spTree>
+      <p:nvGrpSpPr>
+        <p:cNvPr id="1" name="">
+          <a:extLst>
+            <a:ext uri="{FF2B5EF4-FFF2-40B4-BE49-F238E27FC236}">
+              <a16:creationId xmlns:a16="http://schemas.microsoft.com/office/drawing/2014/main" id="{584B9335-84CA-A6D3-448C-E99658B63CB1}"/>
+            </a:ext>
+          </a:extLst>
+        </p:cNvPr>
+        <p:cNvGrpSpPr/>
+        <p:nvPr/>
+      </p:nvGrpSpPr>
+      <p:grpSpPr>
+        <a:xfrm>
+          <a:off x="0" y="0"/>
+          <a:ext cx="0" cy="0"/>
+          <a:chOff x="0" y="0"/>
+          <a:chExt cx="0" cy="0"/>
+        </a:xfrm>
+      </p:grpSpPr>
+      <p:sp>
+        <p:nvSpPr>
+          <p:cNvPr id="2" name="Title 1">
+            <a:extLst>
+              <a:ext uri="{FF2B5EF4-FFF2-40B4-BE49-F238E27FC236}">
+                <a16:creationId xmlns:a16="http://schemas.microsoft.com/office/drawing/2014/main" id="{1C93E4BF-CD4D-9334-5A52-3EA737CB0267}"/>
+              </a:ext>
+            </a:extLst>
+          </p:cNvPr>
+          <p:cNvSpPr>
+            <a:spLocks noGrp="1"/>
+          </p:cNvSpPr>
+          <p:nvPr>
+            <p:ph type="title"/>
+          </p:nvPr>
+        </p:nvSpPr>
+        <p:spPr>
+          <a:xfrm>
+            <a:off x="521208" y="978408"/>
+            <a:ext cx="5019419" cy="3031530"/>
+          </a:xfrm>
+        </p:spPr>
+        <p:txBody>
+          <a:bodyPr vert="horz" lIns="91440" tIns="45720" rIns="91440" bIns="45720" rtlCol="0" anchor="t">
+            <a:normAutofit/>
+          </a:bodyPr>
+          <a:lstStyle/>
+          <a:p>
+            <a:r>
+              <a:rPr lang="en-US" sz="6600"/>
+              <a:t>Insights importantes</a:t>
+            </a:r>
+          </a:p>
+        </p:txBody>
+      </p:sp>
+      <p:pic>
+        <p:nvPicPr>
+          <p:cNvPr id="6" name="Picture 5">
+            <a:extLst>
+              <a:ext uri="{FF2B5EF4-FFF2-40B4-BE49-F238E27FC236}">
+                <a16:creationId xmlns:a16="http://schemas.microsoft.com/office/drawing/2014/main" id="{E9240443-7B14-BEB9-A470-92ED41DB7ADB}"/>
+              </a:ext>
+            </a:extLst>
+          </p:cNvPr>
+          <p:cNvPicPr>
+            <a:picLocks noChangeAspect="1"/>
+          </p:cNvPicPr>
+          <p:nvPr/>
+        </p:nvPicPr>
+        <p:blipFill>
+          <a:blip r:embed="rId2"/>
+          <a:srcRect t="3134" r="3" b="3"/>
+          <a:stretch>
+            <a:fillRect/>
+          </a:stretch>
+        </p:blipFill>
+        <p:spPr>
+          <a:xfrm>
+            <a:off x="6749578" y="508088"/>
+            <a:ext cx="4850266" cy="2807208"/>
+          </a:xfrm>
+          <a:prstGeom prst="rect">
+            <a:avLst/>
+          </a:prstGeom>
+        </p:spPr>
+      </p:pic>
+      <p:pic>
+        <p:nvPicPr>
+          <p:cNvPr id="4" name="Picture 3">
+            <a:extLst>
+              <a:ext uri="{FF2B5EF4-FFF2-40B4-BE49-F238E27FC236}">
+                <a16:creationId xmlns:a16="http://schemas.microsoft.com/office/drawing/2014/main" id="{B3D95471-CF8E-29FF-C0B3-0137F555F6CF}"/>
+              </a:ext>
+            </a:extLst>
+          </p:cNvPr>
+          <p:cNvPicPr>
+            <a:picLocks noChangeAspect="1"/>
+          </p:cNvPicPr>
+          <p:nvPr/>
+        </p:nvPicPr>
+        <p:blipFill>
+          <a:blip r:embed="rId3"/>
+          <a:srcRect r="14476" b="2"/>
+          <a:stretch>
+            <a:fillRect/>
+          </a:stretch>
+        </p:blipFill>
+        <p:spPr>
+          <a:xfrm>
+            <a:off x="6757382" y="3532493"/>
+            <a:ext cx="4850272" cy="2807208"/>
+          </a:xfrm>
+          <a:prstGeom prst="rect">
+            <a:avLst/>
+          </a:prstGeom>
+        </p:spPr>
+      </p:pic>
+      <p:sp>
+        <p:nvSpPr>
+          <p:cNvPr id="10" name="TextBox 9">
+            <a:extLst>
+              <a:ext uri="{FF2B5EF4-FFF2-40B4-BE49-F238E27FC236}">
+                <a16:creationId xmlns:a16="http://schemas.microsoft.com/office/drawing/2014/main" id="{E5DE8AC5-AF5D-234B-6610-91EF83BA205D}"/>
+              </a:ext>
+            </a:extLst>
+          </p:cNvPr>
+          <p:cNvSpPr txBox="1"/>
+          <p:nvPr/>
+        </p:nvSpPr>
+        <p:spPr>
+          <a:xfrm>
+            <a:off x="330691" y="3428997"/>
+            <a:ext cx="6096000" cy="2031325"/>
+          </a:xfrm>
+          <a:prstGeom prst="rect">
+            <a:avLst/>
+          </a:prstGeom>
+          <a:noFill/>
+        </p:spPr>
+        <p:txBody>
+          <a:bodyPr wrap="square">
+            <a:spAutoFit/>
+          </a:bodyPr>
+          <a:lstStyle/>
+          <a:p>
+            <a:pPr algn="just"/>
+            <a:r>
+              <a:rPr lang="es-MX" dirty="0"/>
+              <a:t>El EDA confirma que el </a:t>
+            </a:r>
+            <a:r>
+              <a:rPr lang="es-MX" dirty="0" err="1"/>
+              <a:t>dataset</a:t>
+            </a:r>
+            <a:r>
+              <a:rPr lang="es-MX" dirty="0"/>
+              <a:t> seleccionado captura perfectamente el desabasto logístico y la volatilidad del consumidor guatemalteco. Las palabras clave son operativos y el sentimiento negativo es lo suficientemente fuerte para ser detectado. La calidad del texto es alta, validando la viabilidad técnica para pasar inmediatamente a la fase de modelado de IA.</a:t>
+            </a:r>
+            <a:endParaRPr lang="es-GT" dirty="0"/>
+          </a:p>
+        </p:txBody>
+      </p:sp>
+    </p:spTree>
+    <p:extLst>
+      <p:ext uri="{BB962C8B-B14F-4D97-AF65-F5344CB8AC3E}">
+        <p14:creationId xmlns:p14="http://schemas.microsoft.com/office/powerpoint/2010/main" val="2150758844"/>
+      </p:ext>
+    </p:extLst>
+  </p:cSld>
+  <p:clrMapOvr>
+    <a:masterClrMapping/>
+  </p:clrMapOvr>
+  <p:timing>
+    <p:tnLst>
+      <p:par>
+        <p:cTn id="1" dur="indefinite" restart="never" nodeType="tmRoot">
+          <p:childTnLst>
+            <p:seq concurrent="1" nextAc="seek">
+              <p:cTn id="2" dur="indefinite" nodeType="mainSeq">
+                <p:childTnLst>
+                  <p:par>
+                    <p:cTn id="3" fill="hold">
+                      <p:stCondLst>
+                        <p:cond delay="indefinite"/>
+                        <p:cond evt="onBegin" delay="0">
+                          <p:tn val="2"/>
+                        </p:cond>
+                      </p:stCondLst>
+                      <p:childTnLst>
+                        <p:par>
+                          <p:cTn id="4" fill="hold">
+                            <p:stCondLst>
+                              <p:cond delay="0"/>
+                            </p:stCondLst>
+                            <p:childTnLst>
+                              <p:par>
+                                <p:cTn id="5" presetID="10" presetClass="entr" presetSubtype="0" fill="hold" grpId="0" nodeType="withEffect">
+                                  <p:stCondLst>
+                                    <p:cond delay="1000"/>
+                                  </p:stCondLst>
+                                  <p:iterate type="lt">
+                                    <p:tmPct val="10000"/>
+                                  </p:iterate>
+                                  <p:childTnLst>
+                                    <p:set>
+                                      <p:cBhvr>
+                                        <p:cTn id="6" dur="1" fill="hold">
+                                          <p:stCondLst>
+                                            <p:cond delay="0"/>
+                                          </p:stCondLst>
+                                        </p:cTn>
+                                        <p:tgtEl>
+                                          <p:spTgt spid="2"/>
+                                        </p:tgtEl>
+                                        <p:attrNameLst>
+                                          <p:attrName>style.visibility</p:attrName>
+                                        </p:attrNameLst>
+                                      </p:cBhvr>
+                                      <p:to>
+                                        <p:strVal val="visible"/>
+                                      </p:to>
+                                    </p:set>
+                                    <p:animEffect transition="in" filter="fade">
+                                      <p:cBhvr>
+                                        <p:cTn id="7" dur="400"/>
+                                        <p:tgtEl>
+                                          <p:spTgt spid="2"/>
+                                        </p:tgtEl>
+                                      </p:cBhvr>
+                                    </p:animEffect>
+                                  </p:childTnLst>
+                                </p:cTn>
+                              </p:par>
+                            </p:childTnLst>
+                          </p:cTn>
+                        </p:par>
+                      </p:childTnLst>
+                    </p:cTn>
+                  </p:par>
+                </p:childTnLst>
+              </p:cTn>
+              <p:prevCondLst>
+                <p:cond evt="onPrev" delay="0">
+                  <p:tgtEl>
+                    <p:sldTgt/>
+                  </p:tgtEl>
+                </p:cond>
+              </p:prevCondLst>
+              <p:nextCondLst>
+                <p:cond evt="onNext" delay="0">
+                  <p:tgtEl>
+                    <p:sldTgt/>
+                  </p:tgtEl>
+                </p:cond>
+              </p:nextCondLst>
+            </p:seq>
+          </p:childTnLst>
+        </p:cTn>
+      </p:par>
+    </p:tnLst>
+    <p:bldLst>
+      <p:bldP spid="2" grpId="0"/>
+    </p:bldLst>
+  </p:timing>
+</p:sld>
+</file>
+
+<file path=ppt/slides/slide6.xml><?xml version="1.0" encoding="utf-8"?>
+<p:sld xmlns:a="http://schemas.openxmlformats.org/drawingml/2006/main" xmlns:r="http://schemas.openxmlformats.org/officeDocument/2006/relationships" xmlns:p="http://schemas.openxmlformats.org/presentationml/2006/main">
+  <p:cSld>
+    <p:bg>
+      <p:bgPr>
+        <a:solidFill>
+          <a:schemeClr val="bg1"/>
+        </a:solidFill>
+        <a:effectLst/>
+      </p:bgPr>
+    </p:bg>
+    <p:spTree>
+      <p:nvGrpSpPr>
+        <p:cNvPr id="1" name="">
+          <a:extLst>
+            <a:ext uri="{FF2B5EF4-FFF2-40B4-BE49-F238E27FC236}">
+              <a16:creationId xmlns:a16="http://schemas.microsoft.com/office/drawing/2014/main" id="{595D3342-6BD4-62BA-8923-ED7E82DCB45D}"/>
+            </a:ext>
+          </a:extLst>
+        </p:cNvPr>
+        <p:cNvGrpSpPr/>
+        <p:nvPr/>
+      </p:nvGrpSpPr>
+      <p:grpSpPr>
+        <a:xfrm>
+          <a:off x="0" y="0"/>
+          <a:ext cx="0" cy="0"/>
+          <a:chOff x="0" y="0"/>
+          <a:chExt cx="0" cy="0"/>
+        </a:xfrm>
+      </p:grpSpPr>
+      <p:sp useBgFill="1">
+        <p:nvSpPr>
+          <p:cNvPr id="67" name="Rectangle 66">
+            <a:extLst>
+              <a:ext uri="{FF2B5EF4-FFF2-40B4-BE49-F238E27FC236}">
+                <a16:creationId xmlns:a16="http://schemas.microsoft.com/office/drawing/2014/main" id="{9EE42DCE-4A4F-44C4-84E5-261B3BEEF1DA}"/>
+              </a:ext>
+              <a:ext uri="{C183D7F6-B498-43B3-948B-1728B52AA6E4}">
+                <adec:decorative xmlns:adec="http://schemas.microsoft.com/office/drawing/2017/decorative" val="1"/>
+              </a:ext>
+            </a:extLst>
+          </p:cNvPr>
+          <p:cNvSpPr>
+            <a:spLocks noGrp="1" noRot="1" noChangeAspect="1" noMove="1" noResize="1" noEditPoints="1" noAdjustHandles="1" noChangeArrowheads="1" noChangeShapeType="1" noTextEdit="1"/>
+          </p:cNvSpPr>
+          <p:nvPr>
+            <p:extLst>
+              <p:ext uri="{386F3935-93C4-4BCD-93E2-E3B085C9AB24}">
+                <p16:designElem xmlns:p16="http://schemas.microsoft.com/office/powerpoint/2015/main" val="1"/>
+              </p:ext>
+            </p:extLst>
+          </p:nvPr>
+        </p:nvSpPr>
+        <p:spPr>
+          <a:xfrm>
+            <a:off x="0" y="0"/>
+            <a:ext cx="12188952" cy="6857995"/>
+          </a:xfrm>
+          <a:prstGeom prst="rect">
+            <a:avLst/>
+          </a:prstGeom>
+          <a:ln>
+            <a:noFill/>
+          </a:ln>
+        </p:spPr>
+        <p:style>
+          <a:lnRef idx="2">
+            <a:schemeClr val="accent1">
+              <a:shade val="50000"/>
+            </a:schemeClr>
+          </a:lnRef>
+          <a:fillRef idx="1">
+            <a:schemeClr val="accent1"/>
+          </a:fillRef>
+          <a:effectRef idx="0">
+            <a:schemeClr val="accent1"/>
+          </a:effectRef>
+          <a:fontRef idx="minor">
+            <a:schemeClr val="lt1"/>
+          </a:fontRef>
+        </p:style>
+        <p:txBody>
+          <a:bodyPr rtlCol="0" anchor="ctr"/>
+          <a:lstStyle/>
+          <a:p>
+            <a:pPr algn="ctr"/>
+            <a:endParaRPr lang="en-US"/>
+          </a:p>
+        </p:txBody>
+      </p:sp>
+      <p:sp>
+        <p:nvSpPr>
+          <p:cNvPr id="2" name="Title 1">
+            <a:extLst>
+              <a:ext uri="{FF2B5EF4-FFF2-40B4-BE49-F238E27FC236}">
+                <a16:creationId xmlns:a16="http://schemas.microsoft.com/office/drawing/2014/main" id="{23DF0F68-63E5-F08A-3B98-1F5FC65E063A}"/>
+              </a:ext>
+            </a:extLst>
+          </p:cNvPr>
+          <p:cNvSpPr>
+            <a:spLocks noGrp="1"/>
+          </p:cNvSpPr>
+          <p:nvPr>
+            <p:ph type="title"/>
+          </p:nvPr>
+        </p:nvSpPr>
+        <p:spPr>
+          <a:xfrm>
+            <a:off x="521208" y="978408"/>
+            <a:ext cx="11155680" cy="1069848"/>
+          </a:xfrm>
+        </p:spPr>
+        <p:txBody>
+          <a:bodyPr vert="horz" lIns="91440" tIns="45720" rIns="91440" bIns="45720" rtlCol="0" anchor="t">
+            <a:normAutofit/>
+          </a:bodyPr>
+          <a:lstStyle/>
+          <a:p>
+            <a:r>
+              <a:rPr lang="en-US" b="1" kern="1200">
+                <a:solidFill>
+                  <a:schemeClr val="tx1"/>
+                </a:solidFill>
+                <a:latin typeface="+mj-lt"/>
+                <a:ea typeface="+mj-ea"/>
+                <a:cs typeface="+mj-cs"/>
+              </a:rPr>
+              <a:t>Modelado con 5 sentimientos</a:t>
+            </a:r>
+          </a:p>
+        </p:txBody>
+      </p:sp>
+      <p:sp>
+        <p:nvSpPr>
+          <p:cNvPr id="68" name="Rectangle 67">
+            <a:extLst>
+              <a:ext uri="{FF2B5EF4-FFF2-40B4-BE49-F238E27FC236}">
+                <a16:creationId xmlns:a16="http://schemas.microsoft.com/office/drawing/2014/main" id="{E0F94F4B-6F7A-4270-95A8-469411C14A86}"/>
+              </a:ext>
+              <a:ext uri="{C183D7F6-B498-43B3-948B-1728B52AA6E4}">
+                <adec:decorative xmlns:adec="http://schemas.microsoft.com/office/drawing/2017/decorative" val="1"/>
+              </a:ext>
+            </a:extLst>
+          </p:cNvPr>
+          <p:cNvSpPr>
+            <a:spLocks noGrp="1" noRot="1" noChangeAspect="1" noMove="1" noResize="1" noEditPoints="1" noAdjustHandles="1" noChangeArrowheads="1" noChangeShapeType="1" noTextEdit="1"/>
+          </p:cNvSpPr>
+          <p:nvPr>
+            <p:extLst>
+              <p:ext uri="{386F3935-93C4-4BCD-93E2-E3B085C9AB24}">
+                <p16:designElem xmlns:p16="http://schemas.microsoft.com/office/powerpoint/2015/main" val="1"/>
+              </p:ext>
+            </p:extLst>
+          </p:nvPr>
+        </p:nvSpPr>
+        <p:spPr>
+          <a:xfrm>
+            <a:off x="517870" y="508090"/>
+            <a:ext cx="11164824" cy="149279"/>
+          </a:xfrm>
+          <a:prstGeom prst="rect">
+            <a:avLst/>
+          </a:prstGeom>
+          <a:solidFill>
+            <a:schemeClr val="tx1"/>
+          </a:solidFill>
+          <a:ln>
+            <a:noFill/>
+          </a:ln>
+        </p:spPr>
+        <p:style>
+          <a:lnRef idx="2">
+            <a:schemeClr val="accent1">
+              <a:shade val="50000"/>
+            </a:schemeClr>
+          </a:lnRef>
+          <a:fillRef idx="1">
+            <a:schemeClr val="accent1"/>
+          </a:fillRef>
+          <a:effectRef idx="0">
+            <a:schemeClr val="accent1"/>
+          </a:effectRef>
+          <a:fontRef idx="minor">
+            <a:schemeClr val="lt1"/>
+          </a:fontRef>
+        </p:style>
+        <p:txBody>
+          <a:bodyPr rtlCol="0" anchor="ctr"/>
+          <a:lstStyle/>
+          <a:p>
+            <a:pPr algn="ctr"/>
+            <a:endParaRPr lang="en-US"/>
+          </a:p>
+        </p:txBody>
+      </p:sp>
+      <p:graphicFrame>
+        <p:nvGraphicFramePr>
+          <p:cNvPr id="60" name="TextBox 18">
+            <a:extLst>
+              <a:ext uri="{FF2B5EF4-FFF2-40B4-BE49-F238E27FC236}">
+                <a16:creationId xmlns:a16="http://schemas.microsoft.com/office/drawing/2014/main" id="{418C5C83-61AD-1021-E31B-DB4BCA023284}"/>
+              </a:ext>
+            </a:extLst>
+          </p:cNvPr>
+          <p:cNvGraphicFramePr/>
+          <p:nvPr/>
+        </p:nvGraphicFramePr>
+        <p:xfrm>
+          <a:off x="4636008" y="2240280"/>
+          <a:ext cx="7040880" cy="4105656"/>
+        </p:xfrm>
+        <a:graphic>
+          <a:graphicData uri="http://schemas.openxmlformats.org/drawingml/2006/diagram">
+            <dgm:relIds xmlns:dgm="http://schemas.openxmlformats.org/drawingml/2006/diagram" xmlns:r="http://schemas.openxmlformats.org/officeDocument/2006/relationships" r:dm="rId2" r:lo="rId3" r:qs="rId4" r:cs="rId5"/>
+          </a:graphicData>
+        </a:graphic>
+      </p:graphicFrame>
+    </p:spTree>
+    <p:extLst>
+      <p:ext uri="{BB962C8B-B14F-4D97-AF65-F5344CB8AC3E}">
+        <p14:creationId xmlns:p14="http://schemas.microsoft.com/office/powerpoint/2010/main" val="582643099"/>
+      </p:ext>
+    </p:extLst>
+  </p:cSld>
+  <p:clrMapOvr>
+    <a:masterClrMapping/>
+  </p:clrMapOvr>
+  <p:timing>
+    <p:tnLst>
+      <p:par>
+        <p:cTn id="1" dur="indefinite" restart="never" nodeType="tmRoot">
+          <p:childTnLst>
+            <p:seq concurrent="1" nextAc="seek">
+              <p:cTn id="2" dur="indefinite" nodeType="mainSeq">
+                <p:childTnLst>
+                  <p:par>
+                    <p:cTn id="3" fill="hold">
+                      <p:stCondLst>
+                        <p:cond delay="indefinite"/>
+                        <p:cond evt="onBegin" delay="0">
+                          <p:tn val="2"/>
+                        </p:cond>
+                      </p:stCondLst>
+                      <p:childTnLst>
+                        <p:par>
+                          <p:cTn id="4" fill="hold">
+                            <p:stCondLst>
+                              <p:cond delay="0"/>
+                            </p:stCondLst>
+                            <p:childTnLst>
+                              <p:par>
+                                <p:cTn id="5" presetID="10" presetClass="entr" presetSubtype="0" fill="hold" grpId="0" nodeType="withEffect">
+                                  <p:stCondLst>
+                                    <p:cond delay="1000"/>
+                                  </p:stCondLst>
+                                  <p:iterate type="lt">
+                                    <p:tmPct val="10000"/>
+                                  </p:iterate>
+                                  <p:childTnLst>
+                                    <p:set>
+                                      <p:cBhvr>
+                                        <p:cTn id="6" dur="1" fill="hold">
+                                          <p:stCondLst>
+                                            <p:cond delay="0"/>
+                                          </p:stCondLst>
+                                        </p:cTn>
+                                        <p:tgtEl>
+                                          <p:spTgt spid="2"/>
+                                        </p:tgtEl>
+                                        <p:attrNameLst>
+                                          <p:attrName>style.visibility</p:attrName>
+                                        </p:attrNameLst>
+                                      </p:cBhvr>
+                                      <p:to>
+                                        <p:strVal val="visible"/>
+                                      </p:to>
+                                    </p:set>
+                                    <p:animEffect transition="in" filter="fade">
+                                      <p:cBhvr>
+                                        <p:cTn id="7" dur="400"/>
+                                        <p:tgtEl>
+                                          <p:spTgt spid="2"/>
+                                        </p:tgtEl>
+                                      </p:cBhvr>
+                                    </p:animEffect>
+                                  </p:childTnLst>
+                                </p:cTn>
+                              </p:par>
+                            </p:childTnLst>
+                          </p:cTn>
+                        </p:par>
+                      </p:childTnLst>
+                    </p:cTn>
+                  </p:par>
+                </p:childTnLst>
+              </p:cTn>
+              <p:prevCondLst>
+                <p:cond evt="onPrev" delay="0">
+                  <p:tgtEl>
+                    <p:sldTgt/>
+                  </p:tgtEl>
+                </p:cond>
+              </p:prevCondLst>
+              <p:nextCondLst>
+                <p:cond evt="onNext" delay="0">
+                  <p:tgtEl>
+                    <p:sldTgt/>
+                  </p:tgtEl>
+                </p:cond>
+              </p:nextCondLst>
+            </p:seq>
+          </p:childTnLst>
+        </p:cTn>
+      </p:par>
+    </p:tnLst>
+    <p:bldLst>
+      <p:bldP spid="2" grpId="0"/>
+    </p:bldLst>
+  </p:timing>
+</p:sld>
+</file>
+
+<file path=ppt/slides/slide7.xml><?xml version="1.0" encoding="utf-8"?>
+<p:sld xmlns:a="http://schemas.openxmlformats.org/drawingml/2006/main" xmlns:r="http://schemas.openxmlformats.org/officeDocument/2006/relationships" xmlns:p="http://schemas.openxmlformats.org/presentationml/2006/main">
+  <p:cSld>
+    <p:spTree>
+      <p:nvGrpSpPr>
+        <p:cNvPr id="1" name="">
+          <a:extLst>
+            <a:ext uri="{FF2B5EF4-FFF2-40B4-BE49-F238E27FC236}">
+              <a16:creationId xmlns:a16="http://schemas.microsoft.com/office/drawing/2014/main" id="{134EF842-9782-4874-62A6-AC5DA53160AA}"/>
+            </a:ext>
+          </a:extLst>
+        </p:cNvPr>
+        <p:cNvGrpSpPr/>
+        <p:nvPr/>
+      </p:nvGrpSpPr>
+      <p:grpSpPr>
+        <a:xfrm>
+          <a:off x="0" y="0"/>
+          <a:ext cx="0" cy="0"/>
+          <a:chOff x="0" y="0"/>
+          <a:chExt cx="0" cy="0"/>
+        </a:xfrm>
+      </p:grpSpPr>
+      <p:sp>
+        <p:nvSpPr>
+          <p:cNvPr id="2" name="Title 1">
+            <a:extLst>
+              <a:ext uri="{FF2B5EF4-FFF2-40B4-BE49-F238E27FC236}">
+                <a16:creationId xmlns:a16="http://schemas.microsoft.com/office/drawing/2014/main" id="{80A40085-2D63-96DD-4FBE-C40A79666DDF}"/>
+              </a:ext>
+            </a:extLst>
+          </p:cNvPr>
+          <p:cNvSpPr>
+            <a:spLocks noGrp="1"/>
+          </p:cNvSpPr>
+          <p:nvPr>
+            <p:ph type="title"/>
+          </p:nvPr>
+        </p:nvSpPr>
+        <p:spPr>
+          <a:xfrm>
+            <a:off x="521208" y="978408"/>
+            <a:ext cx="11155680" cy="1069848"/>
+          </a:xfrm>
+        </p:spPr>
+        <p:txBody>
+          <a:bodyPr vert="horz" lIns="91440" tIns="45720" rIns="91440" bIns="45720" rtlCol="0" anchor="t">
+            <a:normAutofit/>
+          </a:bodyPr>
+          <a:lstStyle/>
+          <a:p>
+            <a:r>
+              <a:rPr lang="en-US" b="1" kern="1200" dirty="0" err="1">
+                <a:solidFill>
+                  <a:schemeClr val="tx1"/>
+                </a:solidFill>
+                <a:latin typeface="+mj-lt"/>
+                <a:ea typeface="+mj-ea"/>
+                <a:cs typeface="+mj-cs"/>
+              </a:rPr>
+              <a:t>Modelado</a:t>
+            </a:r>
+            <a:r>
+              <a:rPr lang="en-US" b="1" kern="1200" dirty="0">
+                <a:solidFill>
+                  <a:schemeClr val="tx1"/>
+                </a:solidFill>
+                <a:latin typeface="+mj-lt"/>
+                <a:ea typeface="+mj-ea"/>
+                <a:cs typeface="+mj-cs"/>
+              </a:rPr>
+              <a:t> con 5 </a:t>
+            </a:r>
+            <a:r>
+              <a:rPr lang="en-US" b="1" kern="1200" dirty="0" err="1">
+                <a:solidFill>
+                  <a:schemeClr val="tx1"/>
+                </a:solidFill>
+                <a:latin typeface="+mj-lt"/>
+                <a:ea typeface="+mj-ea"/>
+                <a:cs typeface="+mj-cs"/>
+              </a:rPr>
+              <a:t>sentimientos</a:t>
+            </a:r>
+            <a:endParaRPr lang="en-US" b="1" kern="1200" dirty="0">
+              <a:solidFill>
+                <a:schemeClr val="tx1"/>
+              </a:solidFill>
+              <a:latin typeface="+mj-lt"/>
+              <a:ea typeface="+mj-ea"/>
+              <a:cs typeface="+mj-cs"/>
+            </a:endParaRPr>
+          </a:p>
+        </p:txBody>
+      </p:sp>
+      <p:pic>
+        <p:nvPicPr>
+          <p:cNvPr id="26" name="Picture 25">
+            <a:extLst>
+              <a:ext uri="{FF2B5EF4-FFF2-40B4-BE49-F238E27FC236}">
+                <a16:creationId xmlns:a16="http://schemas.microsoft.com/office/drawing/2014/main" id="{488BCA2A-88E5-CBD8-D7C9-3BF5C113CD5F}"/>
+              </a:ext>
+            </a:extLst>
+          </p:cNvPr>
+          <p:cNvPicPr>
+            <a:picLocks noChangeAspect="1"/>
+          </p:cNvPicPr>
+          <p:nvPr/>
+        </p:nvPicPr>
+        <p:blipFill>
+          <a:blip r:embed="rId2"/>
+          <a:stretch>
+            <a:fillRect/>
+          </a:stretch>
+        </p:blipFill>
+        <p:spPr>
+          <a:xfrm>
+            <a:off x="4676579" y="2048256"/>
+            <a:ext cx="3145793" cy="1798504"/>
+          </a:xfrm>
+          <a:prstGeom prst="rect">
+            <a:avLst/>
+          </a:prstGeom>
+        </p:spPr>
+      </p:pic>
+      <p:pic>
+        <p:nvPicPr>
+          <p:cNvPr id="28" name="Picture 27">
+            <a:extLst>
+              <a:ext uri="{FF2B5EF4-FFF2-40B4-BE49-F238E27FC236}">
+                <a16:creationId xmlns:a16="http://schemas.microsoft.com/office/drawing/2014/main" id="{59379C77-7ED4-EDC9-F161-9CEBB99D776B}"/>
+              </a:ext>
+            </a:extLst>
+          </p:cNvPr>
+          <p:cNvPicPr>
+            <a:picLocks noChangeAspect="1"/>
+          </p:cNvPicPr>
+          <p:nvPr/>
+        </p:nvPicPr>
+        <p:blipFill>
+          <a:blip r:embed="rId3"/>
+          <a:stretch>
+            <a:fillRect/>
+          </a:stretch>
+        </p:blipFill>
+        <p:spPr>
+          <a:xfrm>
+            <a:off x="4676579" y="4002472"/>
+            <a:ext cx="3145794" cy="1877120"/>
+          </a:xfrm>
+          <a:prstGeom prst="rect">
+            <a:avLst/>
+          </a:prstGeom>
+        </p:spPr>
+      </p:pic>
+      <p:pic>
+        <p:nvPicPr>
+          <p:cNvPr id="32" name="Picture 31">
+            <a:extLst>
+              <a:ext uri="{FF2B5EF4-FFF2-40B4-BE49-F238E27FC236}">
+                <a16:creationId xmlns:a16="http://schemas.microsoft.com/office/drawing/2014/main" id="{9B293B4E-67DA-D1AE-BDD8-D1826C5F5EE5}"/>
+              </a:ext>
+            </a:extLst>
+          </p:cNvPr>
+          <p:cNvPicPr>
+            <a:picLocks noChangeAspect="1"/>
+          </p:cNvPicPr>
+          <p:nvPr/>
+        </p:nvPicPr>
+        <p:blipFill>
+          <a:blip r:embed="rId4"/>
+          <a:stretch>
+            <a:fillRect/>
+          </a:stretch>
+        </p:blipFill>
+        <p:spPr>
+          <a:xfrm>
+            <a:off x="8242715" y="2048256"/>
+            <a:ext cx="3013830" cy="1758068"/>
+          </a:xfrm>
+          <a:prstGeom prst="rect">
+            <a:avLst/>
+          </a:prstGeom>
+        </p:spPr>
+      </p:pic>
+      <p:pic>
+        <p:nvPicPr>
+          <p:cNvPr id="36" name="Picture 35">
+            <a:extLst>
+              <a:ext uri="{FF2B5EF4-FFF2-40B4-BE49-F238E27FC236}">
+                <a16:creationId xmlns:a16="http://schemas.microsoft.com/office/drawing/2014/main" id="{1915CDA0-0B45-1B34-60BB-0F56CF77469A}"/>
+              </a:ext>
+            </a:extLst>
+          </p:cNvPr>
+          <p:cNvPicPr>
+            <a:picLocks noChangeAspect="1"/>
+          </p:cNvPicPr>
+          <p:nvPr/>
+        </p:nvPicPr>
+        <p:blipFill>
+          <a:blip r:embed="rId5"/>
+          <a:stretch>
+            <a:fillRect/>
+          </a:stretch>
+        </p:blipFill>
+        <p:spPr>
+          <a:xfrm>
+            <a:off x="8083123" y="4002472"/>
+            <a:ext cx="3593265" cy="2144129"/>
+          </a:xfrm>
+          <a:prstGeom prst="rect">
+            <a:avLst/>
+          </a:prstGeom>
+        </p:spPr>
+      </p:pic>
+      <p:pic>
+        <p:nvPicPr>
+          <p:cNvPr id="45" name="Picture 44">
+            <a:extLst>
+              <a:ext uri="{FF2B5EF4-FFF2-40B4-BE49-F238E27FC236}">
+                <a16:creationId xmlns:a16="http://schemas.microsoft.com/office/drawing/2014/main" id="{3E481458-9B59-337B-81AE-9E9A564CF035}"/>
+              </a:ext>
+            </a:extLst>
+          </p:cNvPr>
+          <p:cNvPicPr>
+            <a:picLocks noChangeAspect="1"/>
+          </p:cNvPicPr>
+          <p:nvPr/>
+        </p:nvPicPr>
+        <p:blipFill>
+          <a:blip r:embed="rId6"/>
+          <a:stretch>
+            <a:fillRect/>
+          </a:stretch>
+        </p:blipFill>
+        <p:spPr>
+          <a:xfrm>
+            <a:off x="371688" y="2048256"/>
+            <a:ext cx="3737191" cy="1578066"/>
+          </a:xfrm>
+          <a:prstGeom prst="rect">
+            <a:avLst/>
+          </a:prstGeom>
+        </p:spPr>
+      </p:pic>
+      <p:pic>
+        <p:nvPicPr>
+          <p:cNvPr id="4" name="Picture 3">
+            <a:extLst>
+              <a:ext uri="{FF2B5EF4-FFF2-40B4-BE49-F238E27FC236}">
+                <a16:creationId xmlns:a16="http://schemas.microsoft.com/office/drawing/2014/main" id="{02ADD5B5-2141-3814-6826-366B103CFA2F}"/>
+              </a:ext>
+            </a:extLst>
+          </p:cNvPr>
+          <p:cNvPicPr>
+            <a:picLocks noChangeAspect="1"/>
+          </p:cNvPicPr>
+          <p:nvPr/>
+        </p:nvPicPr>
+        <p:blipFill>
+          <a:blip r:embed="rId7"/>
+          <a:stretch>
+            <a:fillRect/>
+          </a:stretch>
+        </p:blipFill>
+        <p:spPr>
+          <a:xfrm>
+            <a:off x="331981" y="3806324"/>
+            <a:ext cx="4083848" cy="2397401"/>
+          </a:xfrm>
+          <a:prstGeom prst="rect">
+            <a:avLst/>
+          </a:prstGeom>
+        </p:spPr>
+      </p:pic>
+    </p:spTree>
+    <p:extLst>
+      <p:ext uri="{BB962C8B-B14F-4D97-AF65-F5344CB8AC3E}">
+        <p14:creationId xmlns:p14="http://schemas.microsoft.com/office/powerpoint/2010/main" val="40091393"/>
+      </p:ext>
+    </p:extLst>
+  </p:cSld>
+  <p:clrMapOvr>
+    <a:masterClrMapping/>
+  </p:clrMapOvr>
+  <p:timing>
+    <p:tnLst>
+      <p:par>
+        <p:cTn id="1" dur="indefinite" restart="never" nodeType="tmRoot">
+          <p:childTnLst>
+            <p:seq concurrent="1" nextAc="seek">
+              <p:cTn id="2" dur="indefinite" nodeType="mainSeq">
+                <p:childTnLst>
+                  <p:par>
+                    <p:cTn id="3" fill="hold">
+                      <p:stCondLst>
+                        <p:cond delay="indefinite"/>
+                        <p:cond evt="onBegin" delay="0">
+                          <p:tn val="2"/>
+                        </p:cond>
+                      </p:stCondLst>
+                      <p:childTnLst>
+                        <p:par>
+                          <p:cTn id="4" fill="hold">
+                            <p:stCondLst>
+                              <p:cond delay="0"/>
+                            </p:stCondLst>
+                            <p:childTnLst>
+                              <p:par>
+                                <p:cTn id="5" presetID="10" presetClass="entr" presetSubtype="0" fill="hold" grpId="0" nodeType="withEffect">
+                                  <p:stCondLst>
+                                    <p:cond delay="1000"/>
+                                  </p:stCondLst>
+                                  <p:iterate type="lt">
+                                    <p:tmPct val="10000"/>
+                                  </p:iterate>
+                                  <p:childTnLst>
+                                    <p:set>
+                                      <p:cBhvr>
+                                        <p:cTn id="6" dur="1" fill="hold">
+                                          <p:stCondLst>
+                                            <p:cond delay="0"/>
+                                          </p:stCondLst>
+                                        </p:cTn>
+                                        <p:tgtEl>
+                                          <p:spTgt spid="2"/>
+                                        </p:tgtEl>
+                                        <p:attrNameLst>
+                                          <p:attrName>style.visibility</p:attrName>
+                                        </p:attrNameLst>
+                                      </p:cBhvr>
+                                      <p:to>
+                                        <p:strVal val="visible"/>
+                                      </p:to>
+                                    </p:set>
+                                    <p:animEffect transition="in" filter="fade">
+                                      <p:cBhvr>
+                                        <p:cTn id="7" dur="400"/>
+                                        <p:tgtEl>
+                                          <p:spTgt spid="2"/>
+                                        </p:tgtEl>
+                                      </p:cBhvr>
+                                    </p:animEffect>
+                                  </p:childTnLst>
+                                </p:cTn>
+                              </p:par>
+                            </p:childTnLst>
+                          </p:cTn>
+                        </p:par>
+                      </p:childTnLst>
+                    </p:cTn>
+                  </p:par>
+                </p:childTnLst>
+              </p:cTn>
+              <p:prevCondLst>
+                <p:cond evt="onPrev" delay="0">
+                  <p:tgtEl>
+                    <p:sldTgt/>
+                  </p:tgtEl>
+                </p:cond>
+              </p:prevCondLst>
+              <p:nextCondLst>
+                <p:cond evt="onNext" delay="0">
+                  <p:tgtEl>
+                    <p:sldTgt/>
+                  </p:tgtEl>
+                </p:cond>
+              </p:nextCondLst>
+            </p:seq>
+          </p:childTnLst>
+        </p:cTn>
+      </p:par>
+    </p:tnLst>
+    <p:bldLst>
+      <p:bldP spid="2" grpId="0"/>
+    </p:bldLst>
+  </p:timing>
+</p:sld>
+</file>
+
+<file path=ppt/slides/slide8.xml><?xml version="1.0" encoding="utf-8"?>
+<p:sld xmlns:a="http://schemas.openxmlformats.org/drawingml/2006/main" xmlns:r="http://schemas.openxmlformats.org/officeDocument/2006/relationships" xmlns:p="http://schemas.openxmlformats.org/presentationml/2006/main">
+  <p:cSld>
+    <p:spTree>
+      <p:nvGrpSpPr>
+        <p:cNvPr id="1" name="">
+          <a:extLst>
+            <a:ext uri="{FF2B5EF4-FFF2-40B4-BE49-F238E27FC236}">
+              <a16:creationId xmlns:a16="http://schemas.microsoft.com/office/drawing/2014/main" id="{1B0A331E-F4C3-342F-21B1-25A9A34CAF96}"/>
+            </a:ext>
+          </a:extLst>
+        </p:cNvPr>
+        <p:cNvGrpSpPr/>
+        <p:nvPr/>
+      </p:nvGrpSpPr>
+      <p:grpSpPr>
+        <a:xfrm>
+          <a:off x="0" y="0"/>
+          <a:ext cx="0" cy="0"/>
+          <a:chOff x="0" y="0"/>
+          <a:chExt cx="0" cy="0"/>
+        </a:xfrm>
+      </p:grpSpPr>
+      <p:sp>
+        <p:nvSpPr>
+          <p:cNvPr id="2" name="Title 1">
+            <a:extLst>
+              <a:ext uri="{FF2B5EF4-FFF2-40B4-BE49-F238E27FC236}">
+                <a16:creationId xmlns:a16="http://schemas.microsoft.com/office/drawing/2014/main" id="{48A5A884-6D36-3434-DA8F-2DB8B6923BF0}"/>
+              </a:ext>
+            </a:extLst>
+          </p:cNvPr>
+          <p:cNvSpPr>
+            <a:spLocks noGrp="1"/>
+          </p:cNvSpPr>
+          <p:nvPr>
+            <p:ph type="title"/>
+          </p:nvPr>
+        </p:nvSpPr>
+        <p:spPr>
+          <a:xfrm>
+            <a:off x="521208" y="978408"/>
+            <a:ext cx="11155680" cy="1069848"/>
+          </a:xfrm>
+        </p:spPr>
+        <p:txBody>
+          <a:bodyPr vert="horz" lIns="91440" tIns="45720" rIns="91440" bIns="45720" rtlCol="0" anchor="t">
+            <a:normAutofit/>
+          </a:bodyPr>
+          <a:lstStyle/>
+          <a:p>
+            <a:r>
+              <a:rPr lang="en-US" b="1" kern="1200" dirty="0" err="1">
+                <a:solidFill>
+                  <a:schemeClr val="tx1"/>
+                </a:solidFill>
+                <a:latin typeface="+mj-lt"/>
+                <a:ea typeface="+mj-ea"/>
+                <a:cs typeface="+mj-cs"/>
+              </a:rPr>
+              <a:t>Modelado</a:t>
+            </a:r>
+            <a:r>
+              <a:rPr lang="en-US" b="1" kern="1200" dirty="0">
+                <a:solidFill>
+                  <a:schemeClr val="tx1"/>
+                </a:solidFill>
+                <a:latin typeface="+mj-lt"/>
+                <a:ea typeface="+mj-ea"/>
+                <a:cs typeface="+mj-cs"/>
+              </a:rPr>
+              <a:t> con 3 </a:t>
+            </a:r>
+            <a:r>
+              <a:rPr lang="en-US" b="1" kern="1200" dirty="0" err="1">
+                <a:solidFill>
+                  <a:schemeClr val="tx1"/>
+                </a:solidFill>
+                <a:latin typeface="+mj-lt"/>
+                <a:ea typeface="+mj-ea"/>
+                <a:cs typeface="+mj-cs"/>
+              </a:rPr>
+              <a:t>sentimientos</a:t>
+            </a:r>
+            <a:endParaRPr lang="en-US" b="1" kern="1200" dirty="0">
+              <a:solidFill>
+                <a:schemeClr val="tx1"/>
+              </a:solidFill>
+              <a:latin typeface="+mj-lt"/>
+              <a:ea typeface="+mj-ea"/>
+              <a:cs typeface="+mj-cs"/>
+            </a:endParaRPr>
+          </a:p>
+        </p:txBody>
+      </p:sp>
+      <p:graphicFrame>
+        <p:nvGraphicFramePr>
+          <p:cNvPr id="60" name="TextBox 18">
+            <a:extLst>
+              <a:ext uri="{FF2B5EF4-FFF2-40B4-BE49-F238E27FC236}">
+                <a16:creationId xmlns:a16="http://schemas.microsoft.com/office/drawing/2014/main" id="{A8035BAA-CE92-653C-EA38-B9B05167871A}"/>
+              </a:ext>
+            </a:extLst>
+          </p:cNvPr>
+          <p:cNvGraphicFramePr/>
+          <p:nvPr/>
+        </p:nvGraphicFramePr>
+        <p:xfrm>
+          <a:off x="4636008" y="2240280"/>
+          <a:ext cx="7040880" cy="4105656"/>
+        </p:xfrm>
+        <a:graphic>
+          <a:graphicData uri="http://schemas.openxmlformats.org/drawingml/2006/diagram">
+            <dgm:relIds xmlns:dgm="http://schemas.openxmlformats.org/drawingml/2006/diagram" xmlns:r="http://schemas.openxmlformats.org/officeDocument/2006/relationships" r:dm="rId2" r:lo="rId3" r:qs="rId4" r:cs="rId5"/>
+          </a:graphicData>
+        </a:graphic>
+      </p:graphicFrame>
+    </p:spTree>
+    <p:extLst>
+      <p:ext uri="{BB962C8B-B14F-4D97-AF65-F5344CB8AC3E}">
+        <p14:creationId xmlns:p14="http://schemas.microsoft.com/office/powerpoint/2010/main" val="3909367950"/>
+      </p:ext>
+    </p:extLst>
+  </p:cSld>
+  <p:clrMapOvr>
+    <a:masterClrMapping/>
+  </p:clrMapOvr>
+  <p:timing>
+    <p:tnLst>
+      <p:par>
+        <p:cTn id="1" dur="indefinite" restart="never" nodeType="tmRoot">
+          <p:childTnLst>
+            <p:seq concurrent="1" nextAc="seek">
+              <p:cTn id="2" dur="indefinite" nodeType="mainSeq">
+                <p:childTnLst>
+                  <p:par>
+                    <p:cTn id="3" fill="hold">
+                      <p:stCondLst>
+                        <p:cond delay="indefinite"/>
+                        <p:cond evt="onBegin" delay="0">
+                          <p:tn val="2"/>
+                        </p:cond>
+                      </p:stCondLst>
+                      <p:childTnLst>
+                        <p:par>
+                          <p:cTn id="4" fill="hold">
+                            <p:stCondLst>
+                              <p:cond delay="0"/>
+                            </p:stCondLst>
+                            <p:childTnLst>
+                              <p:par>
+                                <p:cTn id="5" presetID="10" presetClass="entr" presetSubtype="0" fill="hold" grpId="0" nodeType="withEffect">
+                                  <p:stCondLst>
+                                    <p:cond delay="1000"/>
+                                  </p:stCondLst>
+                                  <p:iterate type="lt">
+                                    <p:tmPct val="10000"/>
+                                  </p:iterate>
+                                  <p:childTnLst>
+                                    <p:set>
+                                      <p:cBhvr>
+                                        <p:cTn id="6" dur="1" fill="hold">
+                                          <p:stCondLst>
+                                            <p:cond delay="0"/>
+                                          </p:stCondLst>
+                                        </p:cTn>
+                                        <p:tgtEl>
+                                          <p:spTgt spid="2"/>
+                                        </p:tgtEl>
+                                        <p:attrNameLst>
+                                          <p:attrName>style.visibility</p:attrName>
+                                        </p:attrNameLst>
+                                      </p:cBhvr>
+                                      <p:to>
+                                        <p:strVal val="visible"/>
+                                      </p:to>
+                                    </p:set>
+                                    <p:animEffect transition="in" filter="fade">
+                                      <p:cBhvr>
+                                        <p:cTn id="7" dur="400"/>
+                                        <p:tgtEl>
+                                          <p:spTgt spid="2"/>
+                                        </p:tgtEl>
+                                      </p:cBhvr>
+                                    </p:animEffect>
+                                  </p:childTnLst>
+                                </p:cTn>
+                              </p:par>
+                            </p:childTnLst>
+                          </p:cTn>
+                        </p:par>
+                      </p:childTnLst>
+                    </p:cTn>
+                  </p:par>
+                </p:childTnLst>
+              </p:cTn>
+              <p:prevCondLst>
+                <p:cond evt="onPrev" delay="0">
+                  <p:tgtEl>
+                    <p:sldTgt/>
+                  </p:tgtEl>
+                </p:cond>
+              </p:prevCondLst>
+              <p:nextCondLst>
+                <p:cond evt="onNext" delay="0">
+                  <p:tgtEl>
+                    <p:sldTgt/>
+                  </p:tgtEl>
+                </p:cond>
+              </p:nextCondLst>
+            </p:seq>
+          </p:childTnLst>
+        </p:cTn>
+      </p:par>
+    </p:tnLst>
+    <p:bldLst>
+      <p:bldP spid="2" grpId="0"/>
+    </p:bldLst>
+  </p:timing>
+</p:sld>
+</file>
+
+<file path=ppt/slides/slide9.xml><?xml version="1.0" encoding="utf-8"?>
+<p:sld xmlns:a="http://schemas.openxmlformats.org/drawingml/2006/main" xmlns:r="http://schemas.openxmlformats.org/officeDocument/2006/relationships" xmlns:p="http://schemas.openxmlformats.org/presentationml/2006/main">
+  <p:cSld>
+    <p:spTree>
+      <p:nvGrpSpPr>
+        <p:cNvPr id="1" name="">
+          <a:extLst>
+            <a:ext uri="{FF2B5EF4-FFF2-40B4-BE49-F238E27FC236}">
+              <a16:creationId xmlns:a16="http://schemas.microsoft.com/office/drawing/2014/main" id="{3C61B6EF-F54D-6A34-5807-753D956A5D2E}"/>
+            </a:ext>
+          </a:extLst>
+        </p:cNvPr>
+        <p:cNvGrpSpPr/>
+        <p:nvPr/>
+      </p:nvGrpSpPr>
+      <p:grpSpPr>
+        <a:xfrm>
+          <a:off x="0" y="0"/>
+          <a:ext cx="0" cy="0"/>
+          <a:chOff x="0" y="0"/>
+          <a:chExt cx="0" cy="0"/>
+        </a:xfrm>
+      </p:grpSpPr>
+      <p:sp>
+        <p:nvSpPr>
+          <p:cNvPr id="2" name="Title 1">
+            <a:extLst>
+              <a:ext uri="{FF2B5EF4-FFF2-40B4-BE49-F238E27FC236}">
+                <a16:creationId xmlns:a16="http://schemas.microsoft.com/office/drawing/2014/main" id="{0DED9BD1-FCAB-9875-A8DD-9F36480D4E9B}"/>
+              </a:ext>
+            </a:extLst>
+          </p:cNvPr>
+          <p:cNvSpPr>
+            <a:spLocks noGrp="1"/>
+          </p:cNvSpPr>
+          <p:nvPr>
+            <p:ph type="title"/>
+          </p:nvPr>
+        </p:nvSpPr>
+        <p:spPr>
+          <a:xfrm>
+            <a:off x="521208" y="978408"/>
+            <a:ext cx="11155680" cy="1069848"/>
+          </a:xfrm>
+        </p:spPr>
+        <p:txBody>
+          <a:bodyPr vert="horz" lIns="91440" tIns="45720" rIns="91440" bIns="45720" rtlCol="0" anchor="t">
+            <a:normAutofit/>
+          </a:bodyPr>
+          <a:lstStyle/>
+          <a:p>
+            <a:r>
+              <a:rPr lang="en-US" b="1" kern="1200" dirty="0" err="1">
+                <a:solidFill>
+                  <a:schemeClr val="tx1"/>
+                </a:solidFill>
+                <a:latin typeface="+mj-lt"/>
+                <a:ea typeface="+mj-ea"/>
+                <a:cs typeface="+mj-cs"/>
+              </a:rPr>
+              <a:t>Modelado</a:t>
+            </a:r>
+            <a:r>
+              <a:rPr lang="en-US" b="1" kern="1200" dirty="0">
+                <a:solidFill>
+                  <a:schemeClr val="tx1"/>
+                </a:solidFill>
+                <a:latin typeface="+mj-lt"/>
+                <a:ea typeface="+mj-ea"/>
+                <a:cs typeface="+mj-cs"/>
+              </a:rPr>
+              <a:t> con 5 </a:t>
+            </a:r>
+            <a:r>
+              <a:rPr lang="en-US" b="1" kern="1200" dirty="0" err="1">
+                <a:solidFill>
+                  <a:schemeClr val="tx1"/>
+                </a:solidFill>
+                <a:latin typeface="+mj-lt"/>
+                <a:ea typeface="+mj-ea"/>
+                <a:cs typeface="+mj-cs"/>
+              </a:rPr>
+              <a:t>sentimientos</a:t>
+            </a:r>
+            <a:endParaRPr lang="en-US" b="1" kern="1200" dirty="0">
+              <a:solidFill>
+                <a:schemeClr val="tx1"/>
+              </a:solidFill>
+              <a:latin typeface="+mj-lt"/>
+              <a:ea typeface="+mj-ea"/>
+              <a:cs typeface="+mj-cs"/>
+            </a:endParaRPr>
+          </a:p>
+        </p:txBody>
+      </p:sp>
+      <p:pic>
+        <p:nvPicPr>
+          <p:cNvPr id="26" name="Picture 25">
+            <a:extLst>
+              <a:ext uri="{FF2B5EF4-FFF2-40B4-BE49-F238E27FC236}">
+                <a16:creationId xmlns:a16="http://schemas.microsoft.com/office/drawing/2014/main" id="{F4D3E401-F373-12D0-267F-441D3AD1DC0D}"/>
+              </a:ext>
+            </a:extLst>
+          </p:cNvPr>
+          <p:cNvPicPr>
+            <a:picLocks noChangeAspect="1"/>
+          </p:cNvPicPr>
+          <p:nvPr/>
+        </p:nvPicPr>
+        <p:blipFill>
+          <a:blip r:embed="rId2"/>
+          <a:stretch>
+            <a:fillRect/>
+          </a:stretch>
+        </p:blipFill>
+        <p:spPr>
+          <a:xfrm>
+            <a:off x="4676579" y="2048256"/>
+            <a:ext cx="3145793" cy="1798504"/>
+          </a:xfrm>
+          <a:prstGeom prst="rect">
+            <a:avLst/>
+          </a:prstGeom>
+        </p:spPr>
+      </p:pic>
+      <p:pic>
+        <p:nvPicPr>
+          <p:cNvPr id="28" name="Picture 27">
+            <a:extLst>
+              <a:ext uri="{FF2B5EF4-FFF2-40B4-BE49-F238E27FC236}">
+                <a16:creationId xmlns:a16="http://schemas.microsoft.com/office/drawing/2014/main" id="{FCE0C21B-35F4-3328-1F5D-AD54E78AF568}"/>
+              </a:ext>
+            </a:extLst>
+          </p:cNvPr>
+          <p:cNvPicPr>
+            <a:picLocks noChangeAspect="1"/>
+          </p:cNvPicPr>
+          <p:nvPr/>
+        </p:nvPicPr>
+        <p:blipFill>
+          <a:blip r:embed="rId3"/>
+          <a:stretch>
+            <a:fillRect/>
+          </a:stretch>
+        </p:blipFill>
+        <p:spPr>
+          <a:xfrm>
+            <a:off x="4676579" y="4002472"/>
+            <a:ext cx="3145794" cy="1877120"/>
+          </a:xfrm>
+          <a:prstGeom prst="rect">
+            <a:avLst/>
+          </a:prstGeom>
+        </p:spPr>
+      </p:pic>
+      <p:pic>
+        <p:nvPicPr>
+          <p:cNvPr id="32" name="Picture 31">
+            <a:extLst>
+              <a:ext uri="{FF2B5EF4-FFF2-40B4-BE49-F238E27FC236}">
+                <a16:creationId xmlns:a16="http://schemas.microsoft.com/office/drawing/2014/main" id="{EA41CBCE-A9CC-3750-2CB5-7D43929CE730}"/>
+              </a:ext>
+            </a:extLst>
+          </p:cNvPr>
+          <p:cNvPicPr>
+            <a:picLocks noChangeAspect="1"/>
+          </p:cNvPicPr>
+          <p:nvPr/>
+        </p:nvPicPr>
+        <p:blipFill>
+          <a:blip r:embed="rId4"/>
+          <a:stretch>
+            <a:fillRect/>
+          </a:stretch>
+        </p:blipFill>
+        <p:spPr>
+          <a:xfrm>
+            <a:off x="8242715" y="2048256"/>
+            <a:ext cx="3013830" cy="1758068"/>
+          </a:xfrm>
+          <a:prstGeom prst="rect">
+            <a:avLst/>
+          </a:prstGeom>
+        </p:spPr>
+      </p:pic>
+      <p:pic>
+        <p:nvPicPr>
+          <p:cNvPr id="36" name="Picture 35">
+            <a:extLst>
+              <a:ext uri="{FF2B5EF4-FFF2-40B4-BE49-F238E27FC236}">
+                <a16:creationId xmlns:a16="http://schemas.microsoft.com/office/drawing/2014/main" id="{925B7F14-94E4-D4F5-E382-FFC7F68506BC}"/>
+              </a:ext>
+            </a:extLst>
+          </p:cNvPr>
+          <p:cNvPicPr>
+            <a:picLocks noChangeAspect="1"/>
+          </p:cNvPicPr>
+          <p:nvPr/>
+        </p:nvPicPr>
+        <p:blipFill>
+          <a:blip r:embed="rId5"/>
+          <a:stretch>
+            <a:fillRect/>
+          </a:stretch>
+        </p:blipFill>
+        <p:spPr>
+          <a:xfrm>
+            <a:off x="8083123" y="4002472"/>
+            <a:ext cx="3593265" cy="2144129"/>
+          </a:xfrm>
+          <a:prstGeom prst="rect">
+            <a:avLst/>
+          </a:prstGeom>
+        </p:spPr>
+      </p:pic>
+      <p:pic>
+        <p:nvPicPr>
+          <p:cNvPr id="45" name="Picture 44">
+            <a:extLst>
+              <a:ext uri="{FF2B5EF4-FFF2-40B4-BE49-F238E27FC236}">
+                <a16:creationId xmlns:a16="http://schemas.microsoft.com/office/drawing/2014/main" id="{1C53D4C3-A95F-4AF6-A5BF-5A90B841E375}"/>
+              </a:ext>
+            </a:extLst>
+          </p:cNvPr>
+          <p:cNvPicPr>
+            <a:picLocks noChangeAspect="1"/>
+          </p:cNvPicPr>
+          <p:nvPr/>
+        </p:nvPicPr>
+        <p:blipFill>
+          <a:blip r:embed="rId6"/>
+          <a:stretch>
+            <a:fillRect/>
+          </a:stretch>
+        </p:blipFill>
+        <p:spPr>
+          <a:xfrm>
+            <a:off x="371688" y="2048256"/>
+            <a:ext cx="3737191" cy="1578066"/>
+          </a:xfrm>
+          <a:prstGeom prst="rect">
+            <a:avLst/>
+          </a:prstGeom>
+        </p:spPr>
+      </p:pic>
+      <p:pic>
+        <p:nvPicPr>
+          <p:cNvPr id="4" name="Picture 3">
+            <a:extLst>
+              <a:ext uri="{FF2B5EF4-FFF2-40B4-BE49-F238E27FC236}">
+                <a16:creationId xmlns:a16="http://schemas.microsoft.com/office/drawing/2014/main" id="{A673115A-4711-992D-E0B0-7DDA1A99B637}"/>
+              </a:ext>
+            </a:extLst>
+          </p:cNvPr>
+          <p:cNvPicPr>
+            <a:picLocks noChangeAspect="1"/>
+          </p:cNvPicPr>
+          <p:nvPr/>
+        </p:nvPicPr>
+        <p:blipFill>
+          <a:blip r:embed="rId7"/>
+          <a:stretch>
+            <a:fillRect/>
+          </a:stretch>
+        </p:blipFill>
+        <p:spPr>
+          <a:xfrm>
+            <a:off x="331981" y="3806324"/>
+            <a:ext cx="4083848" cy="2397401"/>
+          </a:xfrm>
+          <a:prstGeom prst="rect">
+            <a:avLst/>
+          </a:prstGeom>
+        </p:spPr>
+      </p:pic>
+    </p:spTree>
+    <p:extLst>
+      <p:ext uri="{BB962C8B-B14F-4D97-AF65-F5344CB8AC3E}">
+        <p14:creationId xmlns:p14="http://schemas.microsoft.com/office/powerpoint/2010/main" val="182308150"/>
       </p:ext>
     </p:extLst>
   </p:cSld>
